--- a/[작업 중] 호흡 시스템 기획문서.pptx
+++ b/[작업 중] 호흡 시스템 기획문서.pptx
@@ -10,7 +10,7 @@
   <p:sldIdLst>
     <p:sldId id="256" r:id="rId2"/>
     <p:sldId id="282" r:id="rId3"/>
-    <p:sldId id="257" r:id="rId4"/>
+    <p:sldId id="290" r:id="rId4"/>
     <p:sldId id="258" r:id="rId5"/>
     <p:sldId id="259" r:id="rId6"/>
     <p:sldId id="286" r:id="rId7"/>
@@ -1266,7 +1266,7 @@
     </p:spTree>
     <p:extLst>
       <p:ext uri="{BB962C8B-B14F-4D97-AF65-F5344CB8AC3E}">
-        <p14:creationId xmlns:p14="http://schemas.microsoft.com/office/powerpoint/2010/main" val="1024086991"/>
+        <p14:creationId xmlns:p14="http://schemas.microsoft.com/office/powerpoint/2010/main" val="3891493635"/>
       </p:ext>
     </p:extLst>
   </p:cSld>
@@ -2661,7 +2661,7 @@
           <a:p>
             <a:fld id="{5BCAD085-E8A6-8845-BD4E-CB4CCA059FC4}" type="datetimeFigureOut">
               <a:rPr lang="en-US" smtClean="0"/>
-              <a:t>8/19/2026</a:t>
+              <a:t>8/20/2026</a:t>
             </a:fld>
             <a:endParaRPr lang="en-US"/>
           </a:p>
@@ -2755,10 +2755,9 @@
           <a:lstStyle/>
           <a:p>
             <a:r>
-              <a:rPr lang="ko-KR" altLang="en-US" smtClean="0"/>
+              <a:rPr lang="ko-KR" altLang="en-US"/>
               <a:t>마스터 제목 스타일 편집</a:t>
             </a:r>
-            <a:endParaRPr lang="ko-KR" altLang="en-US"/>
           </a:p>
         </p:txBody>
       </p:sp>
@@ -2779,38 +2778,37 @@
           <a:p>
             <a:pPr lvl="0"/>
             <a:r>
-              <a:rPr lang="ko-KR" altLang="en-US" smtClean="0"/>
+              <a:rPr lang="ko-KR" altLang="en-US"/>
               <a:t>마스터 텍스트 스타일 편집</a:t>
             </a:r>
           </a:p>
           <a:p>
             <a:pPr lvl="1"/>
             <a:r>
-              <a:rPr lang="ko-KR" altLang="en-US" smtClean="0"/>
+              <a:rPr lang="ko-KR" altLang="en-US"/>
               <a:t>둘째 수준</a:t>
             </a:r>
           </a:p>
           <a:p>
             <a:pPr lvl="2"/>
             <a:r>
-              <a:rPr lang="ko-KR" altLang="en-US" smtClean="0"/>
+              <a:rPr lang="ko-KR" altLang="en-US"/>
               <a:t>셋째 수준</a:t>
             </a:r>
           </a:p>
           <a:p>
             <a:pPr lvl="3"/>
             <a:r>
-              <a:rPr lang="ko-KR" altLang="en-US" smtClean="0"/>
+              <a:rPr lang="ko-KR" altLang="en-US"/>
               <a:t>넷째 수준</a:t>
             </a:r>
           </a:p>
           <a:p>
             <a:pPr lvl="4"/>
             <a:r>
-              <a:rPr lang="ko-KR" altLang="en-US" smtClean="0"/>
+              <a:rPr lang="ko-KR" altLang="en-US"/>
               <a:t>다섯째 수준</a:t>
             </a:r>
-            <a:endParaRPr lang="ko-KR" altLang="en-US"/>
           </a:p>
         </p:txBody>
       </p:sp>
@@ -2831,7 +2829,7 @@
           <a:p>
             <a:fld id="{FF78EF28-70DA-4FAA-8D38-6F013B029937}" type="datetimeFigureOut">
               <a:rPr lang="ko-KR" altLang="en-US" smtClean="0"/>
-              <a:t>2026-08-19</a:t>
+              <a:t>2026-08-20</a:t>
             </a:fld>
             <a:endParaRPr lang="ko-KR" altLang="en-US"/>
           </a:p>
@@ -15941,7 +15939,7 @@
         </p:nvSpPr>
         <p:spPr>
           <a:xfrm>
-            <a:off x="566928" y="440561"/>
+            <a:off x="566928" y="153063"/>
             <a:ext cx="7955279" cy="429768"/>
           </a:xfrm>
           <a:prstGeom prst="rect">
@@ -15950,7 +15948,7 @@
           <a:noFill/>
         </p:spPr>
         <p:txBody>
-          <a:bodyPr wrap="square" lIns="18288" tIns="18288" rIns="18288" bIns="18288" anchor="t">
+          <a:bodyPr wrap="square" lIns="18288" tIns="18288" rIns="18288" bIns="18288" anchor="ctr">
             <a:noAutofit/>
           </a:bodyPr>
           <a:lstStyle/>
@@ -15988,7 +15986,7 @@
         </p:nvSpPr>
         <p:spPr>
           <a:xfrm>
-            <a:off x="1515688" y="1247518"/>
+            <a:off x="1515688" y="853469"/>
             <a:ext cx="1841303" cy="228600"/>
           </a:xfrm>
           <a:prstGeom prst="rect">
@@ -15997,7 +15995,7 @@
           <a:noFill/>
         </p:spPr>
         <p:txBody>
-          <a:bodyPr wrap="square" lIns="18288" tIns="18288" rIns="18288" bIns="18288" anchor="t">
+          <a:bodyPr wrap="square" lIns="18288" tIns="18288" rIns="18288" bIns="18288" anchor="ctr">
             <a:noAutofit/>
           </a:bodyPr>
           <a:lstStyle/>
@@ -16028,7 +16026,7 @@
         </p:nvSpPr>
         <p:spPr>
           <a:xfrm>
-            <a:off x="1716856" y="1540126"/>
+            <a:off x="1716856" y="1146077"/>
             <a:ext cx="1735074" cy="210312"/>
           </a:xfrm>
           <a:prstGeom prst="rect">
@@ -16037,7 +16035,7 @@
           <a:noFill/>
         </p:spPr>
         <p:txBody>
-          <a:bodyPr wrap="square" lIns="18288" tIns="18288" rIns="18288" bIns="18288" anchor="t">
+          <a:bodyPr wrap="square" lIns="18288" tIns="18288" rIns="18288" bIns="18288" anchor="ctr">
             <a:noAutofit/>
           </a:bodyPr>
           <a:lstStyle/>
@@ -16068,7 +16066,7 @@
         </p:nvSpPr>
         <p:spPr>
           <a:xfrm>
-            <a:off x="1716856" y="1796158"/>
+            <a:off x="1716856" y="1402109"/>
             <a:ext cx="1735074" cy="210312"/>
           </a:xfrm>
           <a:prstGeom prst="rect">
@@ -16077,7 +16075,7 @@
           <a:noFill/>
         </p:spPr>
         <p:txBody>
-          <a:bodyPr wrap="square" lIns="18288" tIns="18288" rIns="18288" bIns="18288" anchor="t">
+          <a:bodyPr wrap="square" lIns="18288" tIns="18288" rIns="18288" bIns="18288" anchor="ctr">
             <a:noAutofit/>
           </a:bodyPr>
           <a:lstStyle/>
@@ -16108,7 +16106,7 @@
         </p:nvSpPr>
         <p:spPr>
           <a:xfrm>
-            <a:off x="1716856" y="2052190"/>
+            <a:off x="1716856" y="1658141"/>
             <a:ext cx="1735074" cy="210312"/>
           </a:xfrm>
           <a:prstGeom prst="rect">
@@ -16117,7 +16115,7 @@
           <a:noFill/>
         </p:spPr>
         <p:txBody>
-          <a:bodyPr wrap="square" lIns="18288" tIns="18288" rIns="18288" bIns="18288" anchor="t">
+          <a:bodyPr wrap="square" lIns="18288" tIns="18288" rIns="18288" bIns="18288" anchor="ctr">
             <a:noAutofit/>
           </a:bodyPr>
           <a:lstStyle/>
@@ -16148,7 +16146,7 @@
         </p:nvSpPr>
         <p:spPr>
           <a:xfrm>
-            <a:off x="1716856" y="2308222"/>
+            <a:off x="1716856" y="1914173"/>
             <a:ext cx="1735074" cy="210312"/>
           </a:xfrm>
           <a:prstGeom prst="rect">
@@ -16157,7 +16155,7 @@
           <a:noFill/>
         </p:spPr>
         <p:txBody>
-          <a:bodyPr wrap="square" lIns="18288" tIns="18288" rIns="18288" bIns="18288" anchor="t">
+          <a:bodyPr wrap="square" lIns="18288" tIns="18288" rIns="18288" bIns="18288" anchor="ctr">
             <a:noAutofit/>
           </a:bodyPr>
           <a:lstStyle/>
@@ -16168,15 +16166,52 @@
               </a:lnSpc>
             </a:pPr>
             <a:r>
-              <a:rPr sz="1000" b="0">
+              <a:rPr sz="1000" b="0" dirty="0">
                 <a:solidFill>
                   <a:srgbClr val="232830"/>
                 </a:solidFill>
                 <a:latin typeface="맑은 고딕" panose="020B0503020000020004" pitchFamily="50" charset="-127"/>
                 <a:ea typeface="맑은 고딕" panose="020B0503020000020004" pitchFamily="50" charset="-127"/>
               </a:rPr>
-              <a:t>1.4 적용 대상</a:t>
-            </a:r>
+              <a:t>1.4 </a:t>
+            </a:r>
+            <a:r>
+              <a:rPr sz="1000" b="0" dirty="0" err="1">
+                <a:solidFill>
+                  <a:srgbClr val="232830"/>
+                </a:solidFill>
+                <a:latin typeface="맑은 고딕" panose="020B0503020000020004" pitchFamily="50" charset="-127"/>
+                <a:ea typeface="맑은 고딕" panose="020B0503020000020004" pitchFamily="50" charset="-127"/>
+              </a:rPr>
+              <a:t>적용</a:t>
+            </a:r>
+            <a:r>
+              <a:rPr sz="1000" b="0" dirty="0">
+                <a:solidFill>
+                  <a:srgbClr val="232830"/>
+                </a:solidFill>
+                <a:latin typeface="맑은 고딕" panose="020B0503020000020004" pitchFamily="50" charset="-127"/>
+                <a:ea typeface="맑은 고딕" panose="020B0503020000020004" pitchFamily="50" charset="-127"/>
+              </a:rPr>
+              <a:t> </a:t>
+            </a:r>
+            <a:r>
+              <a:rPr lang="ko-KR" altLang="en-US" sz="1000" dirty="0">
+                <a:solidFill>
+                  <a:srgbClr val="232830"/>
+                </a:solidFill>
+                <a:latin typeface="맑은 고딕" panose="020B0503020000020004" pitchFamily="50" charset="-127"/>
+                <a:ea typeface="맑은 고딕" panose="020B0503020000020004" pitchFamily="50" charset="-127"/>
+              </a:rPr>
+              <a:t>범위</a:t>
+            </a:r>
+            <a:endParaRPr sz="1000" b="0" dirty="0">
+              <a:solidFill>
+                <a:srgbClr val="232830"/>
+              </a:solidFill>
+              <a:latin typeface="맑은 고딕" panose="020B0503020000020004" pitchFamily="50" charset="-127"/>
+              <a:ea typeface="맑은 고딕" panose="020B0503020000020004" pitchFamily="50" charset="-127"/>
+            </a:endParaRPr>
           </a:p>
         </p:txBody>
       </p:sp>
@@ -16188,7 +16223,7 @@
         </p:nvSpPr>
         <p:spPr>
           <a:xfrm>
-            <a:off x="1515688" y="2728846"/>
+            <a:off x="1515688" y="2577538"/>
             <a:ext cx="1841303" cy="228600"/>
           </a:xfrm>
           <a:prstGeom prst="rect">
@@ -16197,7 +16232,7 @@
           <a:noFill/>
         </p:spPr>
         <p:txBody>
-          <a:bodyPr wrap="square" lIns="18288" tIns="18288" rIns="18288" bIns="18288" anchor="t">
+          <a:bodyPr wrap="square" lIns="18288" tIns="18288" rIns="18288" bIns="18288" anchor="ctr">
             <a:noAutofit/>
           </a:bodyPr>
           <a:lstStyle/>
@@ -16228,7 +16263,7 @@
         </p:nvSpPr>
         <p:spPr>
           <a:xfrm>
-            <a:off x="1716856" y="3021454"/>
+            <a:off x="1716856" y="2870146"/>
             <a:ext cx="1735074" cy="210312"/>
           </a:xfrm>
           <a:prstGeom prst="rect">
@@ -16237,7 +16272,7 @@
           <a:noFill/>
         </p:spPr>
         <p:txBody>
-          <a:bodyPr wrap="square" lIns="18288" tIns="18288" rIns="18288" bIns="18288" anchor="t">
+          <a:bodyPr wrap="square" lIns="18288" tIns="18288" rIns="18288" bIns="18288" anchor="ctr">
             <a:noAutofit/>
           </a:bodyPr>
           <a:lstStyle/>
@@ -16268,7 +16303,7 @@
         </p:nvSpPr>
         <p:spPr>
           <a:xfrm>
-            <a:off x="1716856" y="3277486"/>
+            <a:off x="1716856" y="3126178"/>
             <a:ext cx="1735074" cy="210312"/>
           </a:xfrm>
           <a:prstGeom prst="rect">
@@ -16277,7 +16312,7 @@
           <a:noFill/>
         </p:spPr>
         <p:txBody>
-          <a:bodyPr wrap="square" lIns="18288" tIns="18288" rIns="18288" bIns="18288" anchor="t">
+          <a:bodyPr wrap="square" lIns="18288" tIns="18288" rIns="18288" bIns="18288" anchor="ctr">
             <a:noAutofit/>
           </a:bodyPr>
           <a:lstStyle/>
@@ -16308,7 +16343,7 @@
         </p:nvSpPr>
         <p:spPr>
           <a:xfrm>
-            <a:off x="1716856" y="3533518"/>
+            <a:off x="1716856" y="3382210"/>
             <a:ext cx="1735074" cy="210312"/>
           </a:xfrm>
           <a:prstGeom prst="rect">
@@ -16317,7 +16352,7 @@
           <a:noFill/>
         </p:spPr>
         <p:txBody>
-          <a:bodyPr wrap="square" lIns="18288" tIns="18288" rIns="18288" bIns="18288" anchor="t">
+          <a:bodyPr wrap="square" lIns="18288" tIns="18288" rIns="18288" bIns="18288" anchor="ctr">
             <a:noAutofit/>
           </a:bodyPr>
           <a:lstStyle/>
@@ -16328,15 +16363,72 @@
               </a:lnSpc>
             </a:pPr>
             <a:r>
-              <a:rPr sz="1000" b="0">
+              <a:rPr sz="1000" b="0" dirty="0">
                 <a:solidFill>
                   <a:srgbClr val="232830"/>
                 </a:solidFill>
                 <a:latin typeface="맑은 고딕" panose="020B0503020000020004" pitchFamily="50" charset="-127"/>
                 <a:ea typeface="맑은 고딕" panose="020B0503020000020004" pitchFamily="50" charset="-127"/>
               </a:rPr>
-              <a:t>2.3 시스템 순환 구조</a:t>
-            </a:r>
+              <a:t>2.3 </a:t>
+            </a:r>
+            <a:r>
+              <a:rPr sz="1000" b="0" dirty="0" err="1">
+                <a:solidFill>
+                  <a:srgbClr val="232830"/>
+                </a:solidFill>
+                <a:latin typeface="맑은 고딕" panose="020B0503020000020004" pitchFamily="50" charset="-127"/>
+                <a:ea typeface="맑은 고딕" panose="020B0503020000020004" pitchFamily="50" charset="-127"/>
+              </a:rPr>
+              <a:t>시스템</a:t>
+            </a:r>
+            <a:r>
+              <a:rPr sz="1000" b="0" dirty="0">
+                <a:solidFill>
+                  <a:srgbClr val="232830"/>
+                </a:solidFill>
+                <a:latin typeface="맑은 고딕" panose="020B0503020000020004" pitchFamily="50" charset="-127"/>
+                <a:ea typeface="맑은 고딕" panose="020B0503020000020004" pitchFamily="50" charset="-127"/>
+              </a:rPr>
+              <a:t> </a:t>
+            </a:r>
+            <a:r>
+              <a:rPr sz="1000" b="0" dirty="0" err="1">
+                <a:solidFill>
+                  <a:srgbClr val="232830"/>
+                </a:solidFill>
+                <a:latin typeface="맑은 고딕" panose="020B0503020000020004" pitchFamily="50" charset="-127"/>
+                <a:ea typeface="맑은 고딕" panose="020B0503020000020004" pitchFamily="50" charset="-127"/>
+              </a:rPr>
+              <a:t>순환</a:t>
+            </a:r>
+            <a:r>
+              <a:rPr sz="1000" b="0" dirty="0">
+                <a:solidFill>
+                  <a:srgbClr val="232830"/>
+                </a:solidFill>
+                <a:latin typeface="맑은 고딕" panose="020B0503020000020004" pitchFamily="50" charset="-127"/>
+                <a:ea typeface="맑은 고딕" panose="020B0503020000020004" pitchFamily="50" charset="-127"/>
+              </a:rPr>
+              <a:t> </a:t>
+            </a:r>
+            <a:r>
+              <a:rPr sz="1000" b="0" dirty="0" err="1">
+                <a:solidFill>
+                  <a:srgbClr val="232830"/>
+                </a:solidFill>
+                <a:latin typeface="맑은 고딕" panose="020B0503020000020004" pitchFamily="50" charset="-127"/>
+                <a:ea typeface="맑은 고딕" panose="020B0503020000020004" pitchFamily="50" charset="-127"/>
+              </a:rPr>
+              <a:t>구조</a:t>
+            </a:r>
+            <a:endParaRPr sz="1000" b="0" dirty="0">
+              <a:solidFill>
+                <a:srgbClr val="232830"/>
+              </a:solidFill>
+              <a:latin typeface="맑은 고딕" panose="020B0503020000020004" pitchFamily="50" charset="-127"/>
+              <a:ea typeface="맑은 고딕" panose="020B0503020000020004" pitchFamily="50" charset="-127"/>
+            </a:endParaRPr>
           </a:p>
         </p:txBody>
       </p:sp>
@@ -16348,7 +16440,7 @@
         </p:nvSpPr>
         <p:spPr>
           <a:xfrm>
-            <a:off x="1515688" y="3954142"/>
+            <a:off x="1515688" y="4031859"/>
             <a:ext cx="1841303" cy="228600"/>
           </a:xfrm>
           <a:prstGeom prst="rect">
@@ -16357,7 +16449,7 @@
           <a:noFill/>
         </p:spPr>
         <p:txBody>
-          <a:bodyPr wrap="square" lIns="18288" tIns="18288" rIns="18288" bIns="18288" anchor="t">
+          <a:bodyPr wrap="square" lIns="18288" tIns="18288" rIns="18288" bIns="18288" anchor="ctr">
             <a:noAutofit/>
           </a:bodyPr>
           <a:lstStyle/>
@@ -16368,174 +16460,54 @@
               </a:lnSpc>
             </a:pPr>
             <a:r>
-              <a:rPr sz="1000" b="1">
+              <a:rPr sz="1000" b="1" dirty="0" err="1">
                 <a:solidFill>
                   <a:srgbClr val="00437A"/>
                 </a:solidFill>
                 <a:latin typeface="맑은 고딕" panose="020B0503020000020004" pitchFamily="50" charset="-127"/>
                 <a:ea typeface="맑은 고딕" panose="020B0503020000020004" pitchFamily="50" charset="-127"/>
               </a:rPr>
-              <a:t>호흡 데이터 구조</a:t>
-            </a:r>
-          </a:p>
-        </p:txBody>
-      </p:sp>
-      <p:sp>
-        <p:nvSpPr>
-          <p:cNvPr id="15" name="TextBox 14"/>
-          <p:cNvSpPr txBox="1"/>
-          <p:nvPr/>
-        </p:nvSpPr>
-        <p:spPr>
-          <a:xfrm>
-            <a:off x="1716856" y="4246750"/>
-            <a:ext cx="1735074" cy="210312"/>
-          </a:xfrm>
-          <a:prstGeom prst="rect">
-            <a:avLst/>
-          </a:prstGeom>
-          <a:noFill/>
-        </p:spPr>
-        <p:txBody>
-          <a:bodyPr wrap="square" lIns="18288" tIns="18288" rIns="18288" bIns="18288" anchor="t">
-            <a:noAutofit/>
-          </a:bodyPr>
-          <a:lstStyle/>
-          <a:p>
-            <a:pPr>
-              <a:lnSpc>
-                <a:spcPct val="150000"/>
-              </a:lnSpc>
-            </a:pPr>
-            <a:r>
-              <a:rPr sz="1000" b="0">
-                <a:solidFill>
-                  <a:srgbClr val="232830"/>
+              <a:t>호흡</a:t>
+            </a:r>
+            <a:r>
+              <a:rPr sz="1000" b="1" dirty="0">
+                <a:solidFill>
+                  <a:srgbClr val="00437A"/>
                 </a:solidFill>
                 <a:latin typeface="맑은 고딕" panose="020B0503020000020004" pitchFamily="50" charset="-127"/>
                 <a:ea typeface="맑은 고딕" panose="020B0503020000020004" pitchFamily="50" charset="-127"/>
               </a:rPr>
-              <a:t>3.1 호흡 값 정의</a:t>
-            </a:r>
-          </a:p>
-        </p:txBody>
-      </p:sp>
-      <p:sp>
-        <p:nvSpPr>
-          <p:cNvPr id="16" name="TextBox 15"/>
-          <p:cNvSpPr txBox="1"/>
-          <p:nvPr/>
-        </p:nvSpPr>
-        <p:spPr>
-          <a:xfrm>
-            <a:off x="1716856" y="4502782"/>
-            <a:ext cx="1735074" cy="210312"/>
-          </a:xfrm>
-          <a:prstGeom prst="rect">
-            <a:avLst/>
-          </a:prstGeom>
-          <a:noFill/>
-        </p:spPr>
-        <p:txBody>
-          <a:bodyPr wrap="square" lIns="18288" tIns="18288" rIns="18288" bIns="18288" anchor="t">
-            <a:noAutofit/>
-          </a:bodyPr>
-          <a:lstStyle/>
-          <a:p>
-            <a:pPr>
-              <a:lnSpc>
-                <a:spcPct val="150000"/>
-              </a:lnSpc>
-            </a:pPr>
-            <a:r>
-              <a:rPr sz="1000" b="0">
-                <a:solidFill>
-                  <a:srgbClr val="232830"/>
+              <a:t> </a:t>
+            </a:r>
+            <a:r>
+              <a:rPr sz="1000" b="1" dirty="0" err="1">
+                <a:solidFill>
+                  <a:srgbClr val="00437A"/>
                 </a:solidFill>
                 <a:latin typeface="맑은 고딕" panose="020B0503020000020004" pitchFamily="50" charset="-127"/>
                 <a:ea typeface="맑은 고딕" panose="020B0503020000020004" pitchFamily="50" charset="-127"/>
               </a:rPr>
-              <a:t>3.2 호흡 참조 대상</a:t>
-            </a:r>
-          </a:p>
-        </p:txBody>
-      </p:sp>
-      <p:sp>
-        <p:nvSpPr>
-          <p:cNvPr id="17" name="TextBox 16"/>
-          <p:cNvSpPr txBox="1"/>
-          <p:nvPr/>
-        </p:nvSpPr>
-        <p:spPr>
-          <a:xfrm>
-            <a:off x="5372100" y="1243327"/>
-            <a:ext cx="1841303" cy="228600"/>
-          </a:xfrm>
-          <a:prstGeom prst="rect">
-            <a:avLst/>
-          </a:prstGeom>
-          <a:noFill/>
-        </p:spPr>
-        <p:txBody>
-          <a:bodyPr wrap="square" lIns="18288" tIns="18288" rIns="18288" bIns="18288" anchor="t">
-            <a:noAutofit/>
-          </a:bodyPr>
-          <a:lstStyle/>
-          <a:p>
-            <a:pPr>
-              <a:lnSpc>
-                <a:spcPct val="150000"/>
-              </a:lnSpc>
-            </a:pPr>
-            <a:r>
-              <a:rPr sz="1000" b="1" dirty="0" err="1">
+              <a:t>데이터</a:t>
+            </a:r>
+            <a:r>
+              <a:rPr sz="1000" b="1" dirty="0">
                 <a:solidFill>
                   <a:srgbClr val="00437A"/>
                 </a:solidFill>
                 <a:latin typeface="맑은 고딕" panose="020B0503020000020004" pitchFamily="50" charset="-127"/>
                 <a:ea typeface="맑은 고딕" panose="020B0503020000020004" pitchFamily="50" charset="-127"/>
               </a:rPr>
-              <a:t>호흡</a:t>
-            </a:r>
-            <a:r>
-              <a:rPr sz="1000" b="1" dirty="0">
+              <a:t> </a:t>
+            </a:r>
+            <a:r>
+              <a:rPr sz="1000" b="1" dirty="0" err="1">
                 <a:solidFill>
                   <a:srgbClr val="00437A"/>
                 </a:solidFill>
                 <a:latin typeface="맑은 고딕" panose="020B0503020000020004" pitchFamily="50" charset="-127"/>
                 <a:ea typeface="맑은 고딕" panose="020B0503020000020004" pitchFamily="50" charset="-127"/>
               </a:rPr>
-              <a:t> </a:t>
-            </a:r>
-            <a:r>
-              <a:rPr sz="1000" b="1" dirty="0" err="1">
-                <a:solidFill>
-                  <a:srgbClr val="00437A"/>
-                </a:solidFill>
-                <a:latin typeface="맑은 고딕" panose="020B0503020000020004" pitchFamily="50" charset="-127"/>
-                <a:ea typeface="맑은 고딕" panose="020B0503020000020004" pitchFamily="50" charset="-127"/>
-              </a:rPr>
-              <a:t>행동</a:t>
-            </a:r>
-            <a:r>
-              <a:rPr sz="1000" b="1" dirty="0">
-                <a:solidFill>
-                  <a:srgbClr val="00437A"/>
-                </a:solidFill>
-                <a:latin typeface="맑은 고딕" panose="020B0503020000020004" pitchFamily="50" charset="-127"/>
-                <a:ea typeface="맑은 고딕" panose="020B0503020000020004" pitchFamily="50" charset="-127"/>
-              </a:rPr>
-              <a:t> </a:t>
-            </a:r>
-            <a:r>
-              <a:rPr sz="1000" b="1" dirty="0" err="1">
-                <a:solidFill>
-                  <a:srgbClr val="00437A"/>
-                </a:solidFill>
-                <a:latin typeface="맑은 고딕" panose="020B0503020000020004" pitchFamily="50" charset="-127"/>
-                <a:ea typeface="맑은 고딕" panose="020B0503020000020004" pitchFamily="50" charset="-127"/>
-              </a:rPr>
-              <a:t>규칙</a:t>
+              <a:t>구조</a:t>
             </a:r>
             <a:endParaRPr sz="1000" b="1" dirty="0">
               <a:solidFill>
@@ -16549,13 +16521,13 @@
       </p:sp>
       <p:sp>
         <p:nvSpPr>
-          <p:cNvPr id="18" name="TextBox 17"/>
+          <p:cNvPr id="15" name="TextBox 14"/>
           <p:cNvSpPr txBox="1"/>
           <p:nvPr/>
         </p:nvSpPr>
         <p:spPr>
           <a:xfrm>
-            <a:off x="5573268" y="1535935"/>
+            <a:off x="1716856" y="4324467"/>
             <a:ext cx="1735074" cy="210312"/>
           </a:xfrm>
           <a:prstGeom prst="rect">
@@ -16564,7 +16536,7 @@
           <a:noFill/>
         </p:spPr>
         <p:txBody>
-          <a:bodyPr wrap="square" lIns="18288" tIns="18288" rIns="18288" bIns="18288" anchor="t">
+          <a:bodyPr wrap="square" lIns="18288" tIns="18288" rIns="18288" bIns="18288" anchor="ctr">
             <a:noAutofit/>
           </a:bodyPr>
           <a:lstStyle/>
@@ -16582,20 +16554,20 @@
                 <a:latin typeface="맑은 고딕" panose="020B0503020000020004" pitchFamily="50" charset="-127"/>
                 <a:ea typeface="맑은 고딕" panose="020B0503020000020004" pitchFamily="50" charset="-127"/>
               </a:rPr>
-              <a:t>4.1 기본 행동 규칙</a:t>
-            </a:r>
-          </a:p>
-        </p:txBody>
-      </p:sp>
-      <p:sp>
-        <p:nvSpPr>
-          <p:cNvPr id="19" name="TextBox 18"/>
+              <a:t>3.1 호흡 값 정의</a:t>
+            </a:r>
+          </a:p>
+        </p:txBody>
+      </p:sp>
+      <p:sp>
+        <p:nvSpPr>
+          <p:cNvPr id="16" name="TextBox 15"/>
           <p:cNvSpPr txBox="1"/>
           <p:nvPr/>
         </p:nvSpPr>
         <p:spPr>
           <a:xfrm>
-            <a:off x="5573268" y="1791967"/>
+            <a:off x="1716856" y="4580499"/>
             <a:ext cx="1735074" cy="210312"/>
           </a:xfrm>
           <a:prstGeom prst="rect">
@@ -16604,7 +16576,7 @@
           <a:noFill/>
         </p:spPr>
         <p:txBody>
-          <a:bodyPr wrap="square" lIns="18288" tIns="18288" rIns="18288" bIns="18288" anchor="t">
+          <a:bodyPr wrap="square" lIns="18288" tIns="18288" rIns="18288" bIns="18288" anchor="ctr">
             <a:noAutofit/>
           </a:bodyPr>
           <a:lstStyle/>
@@ -16622,20 +16594,20 @@
                 <a:latin typeface="맑은 고딕" panose="020B0503020000020004" pitchFamily="50" charset="-127"/>
                 <a:ea typeface="맑은 고딕" panose="020B0503020000020004" pitchFamily="50" charset="-127"/>
               </a:rPr>
-              <a:t>4.2 한계/강제 호흡</a:t>
-            </a:r>
-          </a:p>
-        </p:txBody>
-      </p:sp>
-      <p:sp>
-        <p:nvSpPr>
-          <p:cNvPr id="20" name="TextBox 19"/>
+              <a:t>3.2 호흡 참조 대상</a:t>
+            </a:r>
+          </a:p>
+        </p:txBody>
+      </p:sp>
+      <p:sp>
+        <p:nvSpPr>
+          <p:cNvPr id="17" name="TextBox 16"/>
           <p:cNvSpPr txBox="1"/>
           <p:nvPr/>
         </p:nvSpPr>
         <p:spPr>
           <a:xfrm>
-            <a:off x="5372100" y="2733037"/>
+            <a:off x="5372100" y="849278"/>
             <a:ext cx="1841303" cy="228600"/>
           </a:xfrm>
           <a:prstGeom prst="rect">
@@ -16644,7 +16616,7 @@
           <a:noFill/>
         </p:spPr>
         <p:txBody>
-          <a:bodyPr wrap="square" lIns="18288" tIns="18288" rIns="18288" bIns="18288" anchor="t">
+          <a:bodyPr wrap="square" lIns="18288" tIns="18288" rIns="18288" bIns="18288" anchor="ctr">
             <a:noAutofit/>
           </a:bodyPr>
           <a:lstStyle/>
@@ -16662,7 +16634,7 @@
                 <a:latin typeface="맑은 고딕" panose="020B0503020000020004" pitchFamily="50" charset="-127"/>
                 <a:ea typeface="맑은 고딕" panose="020B0503020000020004" pitchFamily="50" charset="-127"/>
               </a:rPr>
-              <a:t>환경</a:t>
+              <a:t>호흡</a:t>
             </a:r>
             <a:r>
               <a:rPr sz="1000" b="1" dirty="0">
@@ -16672,7 +16644,7 @@
                 <a:latin typeface="맑은 고딕" panose="020B0503020000020004" pitchFamily="50" charset="-127"/>
                 <a:ea typeface="맑은 고딕" panose="020B0503020000020004" pitchFamily="50" charset="-127"/>
               </a:rPr>
-              <a:t>/</a:t>
+              <a:t> </a:t>
             </a:r>
             <a:r>
               <a:rPr sz="1000" b="1" dirty="0" err="1">
@@ -16682,7 +16654,7 @@
                 <a:latin typeface="맑은 고딕" panose="020B0503020000020004" pitchFamily="50" charset="-127"/>
                 <a:ea typeface="맑은 고딕" panose="020B0503020000020004" pitchFamily="50" charset="-127"/>
               </a:rPr>
-              <a:t>감지</a:t>
+              <a:t>행동</a:t>
             </a:r>
             <a:r>
               <a:rPr sz="1000" b="1" dirty="0">
@@ -16716,13 +16688,13 @@
       </p:sp>
       <p:sp>
         <p:nvSpPr>
-          <p:cNvPr id="21" name="TextBox 20"/>
+          <p:cNvPr id="18" name="TextBox 17"/>
           <p:cNvSpPr txBox="1"/>
           <p:nvPr/>
         </p:nvSpPr>
         <p:spPr>
           <a:xfrm>
-            <a:off x="5573267" y="3025645"/>
+            <a:off x="5573268" y="1141886"/>
             <a:ext cx="1735074" cy="210312"/>
           </a:xfrm>
           <a:prstGeom prst="rect">
@@ -16731,7 +16703,7 @@
           <a:noFill/>
         </p:spPr>
         <p:txBody>
-          <a:bodyPr wrap="square" lIns="18288" tIns="18288" rIns="18288" bIns="18288" anchor="t">
+          <a:bodyPr wrap="square" lIns="18288" tIns="18288" rIns="18288" bIns="18288" anchor="ctr">
             <a:noAutofit/>
           </a:bodyPr>
           <a:lstStyle/>
@@ -16749,20 +16721,20 @@
                 <a:latin typeface="맑은 고딕" panose="020B0503020000020004" pitchFamily="50" charset="-127"/>
                 <a:ea typeface="맑은 고딕" panose="020B0503020000020004" pitchFamily="50" charset="-127"/>
               </a:rPr>
-              <a:t>5.1 공기 환경 반응</a:t>
-            </a:r>
-          </a:p>
-        </p:txBody>
-      </p:sp>
-      <p:sp>
-        <p:nvSpPr>
-          <p:cNvPr id="22" name="TextBox 21"/>
+              <a:t>4.1 기본 행동 규칙</a:t>
+            </a:r>
+          </a:p>
+        </p:txBody>
+      </p:sp>
+      <p:sp>
+        <p:nvSpPr>
+          <p:cNvPr id="19" name="TextBox 18"/>
           <p:cNvSpPr txBox="1"/>
           <p:nvPr/>
         </p:nvSpPr>
         <p:spPr>
           <a:xfrm>
-            <a:off x="5573267" y="3281677"/>
+            <a:off x="5573268" y="1397918"/>
             <a:ext cx="1735074" cy="210312"/>
           </a:xfrm>
           <a:prstGeom prst="rect">
@@ -16771,7 +16743,7 @@
           <a:noFill/>
         </p:spPr>
         <p:txBody>
-          <a:bodyPr wrap="square" lIns="18288" tIns="18288" rIns="18288" bIns="18288" anchor="t">
+          <a:bodyPr wrap="square" lIns="18288" tIns="18288" rIns="18288" bIns="18288" anchor="ctr">
             <a:noAutofit/>
           </a:bodyPr>
           <a:lstStyle/>
@@ -16789,57 +16761,17 @@
                 <a:latin typeface="맑은 고딕" panose="020B0503020000020004" pitchFamily="50" charset="-127"/>
                 <a:ea typeface="맑은 고딕" panose="020B0503020000020004" pitchFamily="50" charset="-127"/>
               </a:rPr>
-              <a:t>5.2 </a:t>
-            </a:r>
-            <a:r>
-              <a:rPr sz="1000" b="0" dirty="0" err="1">
+              <a:t>4.2 </a:t>
+            </a:r>
+            <a:r>
+              <a:rPr lang="ko-KR" altLang="en-US" sz="1000" b="0" dirty="0">
                 <a:solidFill>
                   <a:srgbClr val="232830"/>
                 </a:solidFill>
                 <a:latin typeface="맑은 고딕" panose="020B0503020000020004" pitchFamily="50" charset="-127"/>
                 <a:ea typeface="맑은 고딕" panose="020B0503020000020004" pitchFamily="50" charset="-127"/>
               </a:rPr>
-              <a:t>들숨</a:t>
-            </a:r>
-            <a:r>
-              <a:rPr sz="1000" b="0" dirty="0">
-                <a:solidFill>
-                  <a:srgbClr val="232830"/>
-                </a:solidFill>
-                <a:latin typeface="맑은 고딕" panose="020B0503020000020004" pitchFamily="50" charset="-127"/>
-                <a:ea typeface="맑은 고딕" panose="020B0503020000020004" pitchFamily="50" charset="-127"/>
-              </a:rPr>
-              <a:t> </a:t>
-            </a:r>
-            <a:r>
-              <a:rPr sz="1000" b="0" dirty="0" err="1">
-                <a:solidFill>
-                  <a:srgbClr val="232830"/>
-                </a:solidFill>
-                <a:latin typeface="맑은 고딕" panose="020B0503020000020004" pitchFamily="50" charset="-127"/>
-                <a:ea typeface="맑은 고딕" panose="020B0503020000020004" pitchFamily="50" charset="-127"/>
-              </a:rPr>
-              <a:t>안전</a:t>
-            </a:r>
-            <a:r>
-              <a:rPr sz="1000" b="0" dirty="0">
-                <a:solidFill>
-                  <a:srgbClr val="232830"/>
-                </a:solidFill>
-                <a:latin typeface="맑은 고딕" panose="020B0503020000020004" pitchFamily="50" charset="-127"/>
-                <a:ea typeface="맑은 고딕" panose="020B0503020000020004" pitchFamily="50" charset="-127"/>
-              </a:rPr>
-              <a:t> </a:t>
-            </a:r>
-            <a:r>
-              <a:rPr sz="1000" b="0" dirty="0" err="1">
-                <a:solidFill>
-                  <a:srgbClr val="232830"/>
-                </a:solidFill>
-                <a:latin typeface="맑은 고딕" panose="020B0503020000020004" pitchFamily="50" charset="-127"/>
-                <a:ea typeface="맑은 고딕" panose="020B0503020000020004" pitchFamily="50" charset="-127"/>
-              </a:rPr>
-              <a:t>한계</a:t>
+              <a:t>들이마시기</a:t>
             </a:r>
             <a:endParaRPr sz="1000" b="0" dirty="0">
               <a:solidFill>
@@ -16853,13 +16785,13 @@
       </p:sp>
       <p:sp>
         <p:nvSpPr>
-          <p:cNvPr id="23" name="TextBox 22"/>
+          <p:cNvPr id="20" name="TextBox 19"/>
           <p:cNvSpPr txBox="1"/>
           <p:nvPr/>
         </p:nvSpPr>
         <p:spPr>
           <a:xfrm>
-            <a:off x="5372100" y="3949570"/>
+            <a:off x="5372100" y="2581729"/>
             <a:ext cx="1841303" cy="228600"/>
           </a:xfrm>
           <a:prstGeom prst="rect">
@@ -16868,7 +16800,7 @@
           <a:noFill/>
         </p:spPr>
         <p:txBody>
-          <a:bodyPr wrap="square" lIns="18288" tIns="18288" rIns="18288" bIns="18288" anchor="t">
+          <a:bodyPr wrap="square" lIns="18288" tIns="18288" rIns="18288" bIns="18288" anchor="ctr">
             <a:noAutofit/>
           </a:bodyPr>
           <a:lstStyle/>
@@ -16879,44 +16811,54 @@
               </a:lnSpc>
             </a:pPr>
             <a:r>
-              <a:rPr sz="1000" b="1" dirty="0">
+              <a:rPr sz="1000" b="1" dirty="0" err="1">
                 <a:solidFill>
                   <a:srgbClr val="00437A"/>
                 </a:solidFill>
                 <a:latin typeface="맑은 고딕" panose="020B0503020000020004" pitchFamily="50" charset="-127"/>
                 <a:ea typeface="맑은 고딕" panose="020B0503020000020004" pitchFamily="50" charset="-127"/>
               </a:rPr>
-              <a:t>적 </a:t>
-            </a:r>
-            <a:r>
-              <a:rPr sz="1000" b="1" dirty="0" err="1">
+              <a:t>환경</a:t>
+            </a:r>
+            <a:r>
+              <a:rPr sz="1000" b="1" dirty="0">
                 <a:solidFill>
                   <a:srgbClr val="00437A"/>
                 </a:solidFill>
                 <a:latin typeface="맑은 고딕" panose="020B0503020000020004" pitchFamily="50" charset="-127"/>
                 <a:ea typeface="맑은 고딕" panose="020B0503020000020004" pitchFamily="50" charset="-127"/>
               </a:rPr>
-              <a:t>AI와</a:t>
-            </a:r>
-            <a:r>
-              <a:rPr sz="1000" b="1" dirty="0">
+              <a:t>/</a:t>
+            </a:r>
+            <a:r>
+              <a:rPr sz="1000" b="1" dirty="0" err="1">
                 <a:solidFill>
                   <a:srgbClr val="00437A"/>
                 </a:solidFill>
                 <a:latin typeface="맑은 고딕" panose="020B0503020000020004" pitchFamily="50" charset="-127"/>
                 <a:ea typeface="맑은 고딕" panose="020B0503020000020004" pitchFamily="50" charset="-127"/>
               </a:rPr>
-              <a:t> </a:t>
-            </a:r>
-            <a:r>
-              <a:rPr sz="1000" b="1" dirty="0" err="1">
+              <a:t>감지</a:t>
+            </a:r>
+            <a:r>
+              <a:rPr sz="1000" b="1" dirty="0">
                 <a:solidFill>
                   <a:srgbClr val="00437A"/>
                 </a:solidFill>
                 <a:latin typeface="맑은 고딕" panose="020B0503020000020004" pitchFamily="50" charset="-127"/>
                 <a:ea typeface="맑은 고딕" panose="020B0503020000020004" pitchFamily="50" charset="-127"/>
               </a:rPr>
-              <a:t>호흡</a:t>
+              <a:t> </a:t>
+            </a:r>
+            <a:r>
+              <a:rPr sz="1000" b="1" dirty="0" err="1">
+                <a:solidFill>
+                  <a:srgbClr val="00437A"/>
+                </a:solidFill>
+                <a:latin typeface="맑은 고딕" panose="020B0503020000020004" pitchFamily="50" charset="-127"/>
+                <a:ea typeface="맑은 고딕" panose="020B0503020000020004" pitchFamily="50" charset="-127"/>
+              </a:rPr>
+              <a:t>규칙</a:t>
             </a:r>
             <a:endParaRPr sz="1000" b="1" dirty="0">
               <a:solidFill>
@@ -16930,13 +16872,13 @@
       </p:sp>
       <p:sp>
         <p:nvSpPr>
-          <p:cNvPr id="24" name="TextBox 23"/>
+          <p:cNvPr id="21" name="TextBox 20"/>
           <p:cNvSpPr txBox="1"/>
           <p:nvPr/>
         </p:nvSpPr>
         <p:spPr>
           <a:xfrm>
-            <a:off x="5573267" y="4242178"/>
+            <a:off x="5573267" y="2874337"/>
             <a:ext cx="1735074" cy="210312"/>
           </a:xfrm>
           <a:prstGeom prst="rect">
@@ -16945,7 +16887,7 @@
           <a:noFill/>
         </p:spPr>
         <p:txBody>
-          <a:bodyPr wrap="square" lIns="18288" tIns="18288" rIns="18288" bIns="18288" anchor="t">
+          <a:bodyPr wrap="square" lIns="18288" tIns="18288" rIns="18288" bIns="18288" anchor="ctr">
             <a:noAutofit/>
           </a:bodyPr>
           <a:lstStyle/>
@@ -16963,7 +16905,7 @@
                 <a:latin typeface="맑은 고딕" panose="020B0503020000020004" pitchFamily="50" charset="-127"/>
                 <a:ea typeface="맑은 고딕" panose="020B0503020000020004" pitchFamily="50" charset="-127"/>
               </a:rPr>
-              <a:t>6.1 </a:t>
+              <a:t>5.1 </a:t>
             </a:r>
             <a:r>
               <a:rPr sz="1000" b="0" dirty="0" err="1">
@@ -16973,7 +16915,7 @@
                 <a:latin typeface="맑은 고딕" panose="020B0503020000020004" pitchFamily="50" charset="-127"/>
                 <a:ea typeface="맑은 고딕" panose="020B0503020000020004" pitchFamily="50" charset="-127"/>
               </a:rPr>
-              <a:t>적의</a:t>
+              <a:t>공기</a:t>
             </a:r>
             <a:r>
               <a:rPr sz="1000" b="0" dirty="0">
@@ -16993,27 +16935,7 @@
                 <a:latin typeface="맑은 고딕" panose="020B0503020000020004" pitchFamily="50" charset="-127"/>
                 <a:ea typeface="맑은 고딕" panose="020B0503020000020004" pitchFamily="50" charset="-127"/>
               </a:rPr>
-              <a:t>호흡</a:t>
-            </a:r>
-            <a:r>
-              <a:rPr sz="1000" b="0" dirty="0">
-                <a:solidFill>
-                  <a:srgbClr val="232830"/>
-                </a:solidFill>
-                <a:latin typeface="맑은 고딕" panose="020B0503020000020004" pitchFamily="50" charset="-127"/>
-                <a:ea typeface="맑은 고딕" panose="020B0503020000020004" pitchFamily="50" charset="-127"/>
-              </a:rPr>
-              <a:t> </a:t>
-            </a:r>
-            <a:r>
-              <a:rPr sz="1000" b="0" dirty="0" err="1">
-                <a:solidFill>
-                  <a:srgbClr val="232830"/>
-                </a:solidFill>
-                <a:latin typeface="맑은 고딕" panose="020B0503020000020004" pitchFamily="50" charset="-127"/>
-                <a:ea typeface="맑은 고딕" panose="020B0503020000020004" pitchFamily="50" charset="-127"/>
-              </a:rPr>
-              <a:t>감지</a:t>
+              <a:t>환경</a:t>
             </a:r>
             <a:endParaRPr sz="1000" b="0" dirty="0">
               <a:solidFill>
@@ -17027,13 +16949,13 @@
       </p:sp>
       <p:sp>
         <p:nvSpPr>
-          <p:cNvPr id="25" name="TextBox 24"/>
+          <p:cNvPr id="22" name="TextBox 21"/>
           <p:cNvSpPr txBox="1"/>
           <p:nvPr/>
         </p:nvSpPr>
         <p:spPr>
           <a:xfrm>
-            <a:off x="5573267" y="4498210"/>
+            <a:off x="5573267" y="3130369"/>
             <a:ext cx="1735074" cy="210312"/>
           </a:xfrm>
           <a:prstGeom prst="rect">
@@ -17042,7 +16964,7 @@
           <a:noFill/>
         </p:spPr>
         <p:txBody>
-          <a:bodyPr wrap="square" lIns="18288" tIns="18288" rIns="18288" bIns="18288" anchor="t">
+          <a:bodyPr wrap="square" lIns="18288" tIns="18288" rIns="18288" bIns="18288" anchor="ctr">
             <a:noAutofit/>
           </a:bodyPr>
           <a:lstStyle/>
@@ -17053,27 +16975,44 @@
               </a:lnSpc>
             </a:pPr>
             <a:r>
-              <a:rPr sz="1000" b="0">
+              <a:rPr sz="1000" b="0" dirty="0">
                 <a:solidFill>
                   <a:srgbClr val="232830"/>
                 </a:solidFill>
                 <a:latin typeface="맑은 고딕" panose="020B0503020000020004" pitchFamily="50" charset="-127"/>
                 <a:ea typeface="맑은 고딕" panose="020B0503020000020004" pitchFamily="50" charset="-127"/>
               </a:rPr>
-              <a:t>6.2 타입별 탐지 차이</a:t>
-            </a:r>
-          </a:p>
-        </p:txBody>
-      </p:sp>
-      <p:sp>
-        <p:nvSpPr>
-          <p:cNvPr id="26" name="TextBox 25"/>
+              <a:t>5.2 </a:t>
+            </a:r>
+            <a:r>
+              <a:rPr lang="ko-KR" altLang="en-US" sz="1000" b="0" dirty="0">
+                <a:solidFill>
+                  <a:srgbClr val="232830"/>
+                </a:solidFill>
+                <a:latin typeface="맑은 고딕" panose="020B0503020000020004" pitchFamily="50" charset="-127"/>
+                <a:ea typeface="맑은 고딕" panose="020B0503020000020004" pitchFamily="50" charset="-127"/>
+              </a:rPr>
+              <a:t>환경 소음</a:t>
+            </a:r>
+            <a:endParaRPr sz="1000" b="0" dirty="0">
+              <a:solidFill>
+                <a:srgbClr val="232830"/>
+              </a:solidFill>
+              <a:latin typeface="맑은 고딕" panose="020B0503020000020004" pitchFamily="50" charset="-127"/>
+              <a:ea typeface="맑은 고딕" panose="020B0503020000020004" pitchFamily="50" charset="-127"/>
+            </a:endParaRPr>
+          </a:p>
+        </p:txBody>
+      </p:sp>
+      <p:sp>
+        <p:nvSpPr>
+          <p:cNvPr id="23" name="TextBox 22"/>
           <p:cNvSpPr txBox="1"/>
           <p:nvPr/>
         </p:nvSpPr>
         <p:spPr>
           <a:xfrm>
-            <a:off x="8740072" y="1252090"/>
+            <a:off x="5372100" y="4027287"/>
             <a:ext cx="1841303" cy="228600"/>
           </a:xfrm>
           <a:prstGeom prst="rect">
@@ -17082,7 +17021,7 @@
           <a:noFill/>
         </p:spPr>
         <p:txBody>
-          <a:bodyPr wrap="square" lIns="18288" tIns="18288" rIns="18288" bIns="18288" anchor="t">
+          <a:bodyPr wrap="square" lIns="18288" tIns="18288" rIns="18288" bIns="18288" anchor="ctr">
             <a:noAutofit/>
           </a:bodyPr>
           <a:lstStyle/>
@@ -17093,14 +17032,24 @@
               </a:lnSpc>
             </a:pPr>
             <a:r>
-              <a:rPr sz="1000" b="1" dirty="0" err="1">
+              <a:rPr sz="1000" b="1" dirty="0">
                 <a:solidFill>
                   <a:srgbClr val="00437A"/>
                 </a:solidFill>
                 <a:latin typeface="맑은 고딕" panose="020B0503020000020004" pitchFamily="50" charset="-127"/>
                 <a:ea typeface="맑은 고딕" panose="020B0503020000020004" pitchFamily="50" charset="-127"/>
               </a:rPr>
-              <a:t>플레이어와</a:t>
+              <a:t>적 </a:t>
+            </a:r>
+            <a:r>
+              <a:rPr sz="1000" b="1" dirty="0" err="1">
+                <a:solidFill>
+                  <a:srgbClr val="00437A"/>
+                </a:solidFill>
+                <a:latin typeface="맑은 고딕" panose="020B0503020000020004" pitchFamily="50" charset="-127"/>
+                <a:ea typeface="맑은 고딕" panose="020B0503020000020004" pitchFamily="50" charset="-127"/>
+              </a:rPr>
+              <a:t>AI와</a:t>
             </a:r>
             <a:r>
               <a:rPr sz="1000" b="1" dirty="0">
@@ -17134,13 +17083,13 @@
       </p:sp>
       <p:sp>
         <p:nvSpPr>
-          <p:cNvPr id="27" name="TextBox 26"/>
+          <p:cNvPr id="24" name="TextBox 23"/>
           <p:cNvSpPr txBox="1"/>
           <p:nvPr/>
         </p:nvSpPr>
         <p:spPr>
           <a:xfrm>
-            <a:off x="8941239" y="1544698"/>
+            <a:off x="5573267" y="4319895"/>
             <a:ext cx="1735074" cy="210312"/>
           </a:xfrm>
           <a:prstGeom prst="rect">
@@ -17149,7 +17098,7 @@
           <a:noFill/>
         </p:spPr>
         <p:txBody>
-          <a:bodyPr wrap="square" lIns="18288" tIns="18288" rIns="18288" bIns="18288" anchor="t">
+          <a:bodyPr wrap="square" lIns="18288" tIns="18288" rIns="18288" bIns="18288" anchor="ctr">
             <a:noAutofit/>
           </a:bodyPr>
           <a:lstStyle/>
@@ -17167,7 +17116,7 @@
                 <a:latin typeface="맑은 고딕" panose="020B0503020000020004" pitchFamily="50" charset="-127"/>
                 <a:ea typeface="맑은 고딕" panose="020B0503020000020004" pitchFamily="50" charset="-127"/>
               </a:rPr>
-              <a:t>7.1 </a:t>
+              <a:t>6.1 </a:t>
             </a:r>
             <a:r>
               <a:rPr sz="1000" b="0" dirty="0" err="1">
@@ -17177,7 +17126,7 @@
                 <a:latin typeface="맑은 고딕" panose="020B0503020000020004" pitchFamily="50" charset="-127"/>
                 <a:ea typeface="맑은 고딕" panose="020B0503020000020004" pitchFamily="50" charset="-127"/>
               </a:rPr>
-              <a:t>플레이어</a:t>
+              <a:t>적의</a:t>
             </a:r>
             <a:r>
               <a:rPr sz="1000" b="0" dirty="0">
@@ -17197,7 +17146,7 @@
                 <a:latin typeface="맑은 고딕" panose="020B0503020000020004" pitchFamily="50" charset="-127"/>
                 <a:ea typeface="맑은 고딕" panose="020B0503020000020004" pitchFamily="50" charset="-127"/>
               </a:rPr>
-              <a:t>조작</a:t>
+              <a:t>호흡</a:t>
             </a:r>
             <a:r>
               <a:rPr sz="1000" b="0" dirty="0">
@@ -17217,7 +17166,7 @@
                 <a:latin typeface="맑은 고딕" panose="020B0503020000020004" pitchFamily="50" charset="-127"/>
                 <a:ea typeface="맑은 고딕" panose="020B0503020000020004" pitchFamily="50" charset="-127"/>
               </a:rPr>
-              <a:t>규칙</a:t>
+              <a:t>감지</a:t>
             </a:r>
             <a:endParaRPr sz="1000" b="0" dirty="0">
               <a:solidFill>
@@ -17231,13 +17180,13 @@
       </p:sp>
       <p:sp>
         <p:nvSpPr>
-          <p:cNvPr id="28" name="TextBox 27"/>
+          <p:cNvPr id="25" name="TextBox 24"/>
           <p:cNvSpPr txBox="1"/>
           <p:nvPr/>
         </p:nvSpPr>
         <p:spPr>
           <a:xfrm>
-            <a:off x="8941239" y="1800730"/>
+            <a:off x="5573267" y="4575927"/>
             <a:ext cx="1735074" cy="210312"/>
           </a:xfrm>
           <a:prstGeom prst="rect">
@@ -17246,7 +17195,7 @@
           <a:noFill/>
         </p:spPr>
         <p:txBody>
-          <a:bodyPr wrap="square" lIns="18288" tIns="18288" rIns="18288" bIns="18288" anchor="t">
+          <a:bodyPr wrap="square" lIns="18288" tIns="18288" rIns="18288" bIns="18288" anchor="ctr">
             <a:noAutofit/>
           </a:bodyPr>
           <a:lstStyle/>
@@ -17257,27 +17206,84 @@
               </a:lnSpc>
             </a:pPr>
             <a:r>
-              <a:rPr sz="1000" b="0">
+              <a:rPr sz="1000" b="0" dirty="0">
                 <a:solidFill>
                   <a:srgbClr val="232830"/>
                 </a:solidFill>
                 <a:latin typeface="맑은 고딕" panose="020B0503020000020004" pitchFamily="50" charset="-127"/>
                 <a:ea typeface="맑은 고딕" panose="020B0503020000020004" pitchFamily="50" charset="-127"/>
               </a:rPr>
-              <a:t>7.2 호흡 기술 확장</a:t>
-            </a:r>
-          </a:p>
-        </p:txBody>
-      </p:sp>
-      <p:sp>
-        <p:nvSpPr>
-          <p:cNvPr id="29" name="TextBox 28"/>
+              <a:t>6.2 </a:t>
+            </a:r>
+            <a:r>
+              <a:rPr sz="1000" b="0" dirty="0" err="1">
+                <a:solidFill>
+                  <a:srgbClr val="232830"/>
+                </a:solidFill>
+                <a:latin typeface="맑은 고딕" panose="020B0503020000020004" pitchFamily="50" charset="-127"/>
+                <a:ea typeface="맑은 고딕" panose="020B0503020000020004" pitchFamily="50" charset="-127"/>
+              </a:rPr>
+              <a:t>타입별</a:t>
+            </a:r>
+            <a:r>
+              <a:rPr sz="1000" b="0" dirty="0">
+                <a:solidFill>
+                  <a:srgbClr val="232830"/>
+                </a:solidFill>
+                <a:latin typeface="맑은 고딕" panose="020B0503020000020004" pitchFamily="50" charset="-127"/>
+                <a:ea typeface="맑은 고딕" panose="020B0503020000020004" pitchFamily="50" charset="-127"/>
+              </a:rPr>
+              <a:t> </a:t>
+            </a:r>
+            <a:r>
+              <a:rPr sz="1000" b="0" dirty="0" err="1">
+                <a:solidFill>
+                  <a:srgbClr val="232830"/>
+                </a:solidFill>
+                <a:latin typeface="맑은 고딕" panose="020B0503020000020004" pitchFamily="50" charset="-127"/>
+                <a:ea typeface="맑은 고딕" panose="020B0503020000020004" pitchFamily="50" charset="-127"/>
+              </a:rPr>
+              <a:t>탐지</a:t>
+            </a:r>
+            <a:r>
+              <a:rPr sz="1000" b="0" dirty="0">
+                <a:solidFill>
+                  <a:srgbClr val="232830"/>
+                </a:solidFill>
+                <a:latin typeface="맑은 고딕" panose="020B0503020000020004" pitchFamily="50" charset="-127"/>
+                <a:ea typeface="맑은 고딕" panose="020B0503020000020004" pitchFamily="50" charset="-127"/>
+              </a:rPr>
+              <a:t> </a:t>
+            </a:r>
+            <a:r>
+              <a:rPr sz="1000" b="0" dirty="0" err="1">
+                <a:solidFill>
+                  <a:srgbClr val="232830"/>
+                </a:solidFill>
+                <a:latin typeface="맑은 고딕" panose="020B0503020000020004" pitchFamily="50" charset="-127"/>
+                <a:ea typeface="맑은 고딕" panose="020B0503020000020004" pitchFamily="50" charset="-127"/>
+              </a:rPr>
+              <a:t>차이</a:t>
+            </a:r>
+            <a:endParaRPr sz="1000" b="0" dirty="0">
+              <a:solidFill>
+                <a:srgbClr val="232830"/>
+              </a:solidFill>
+              <a:latin typeface="맑은 고딕" panose="020B0503020000020004" pitchFamily="50" charset="-127"/>
+              <a:ea typeface="맑은 고딕" panose="020B0503020000020004" pitchFamily="50" charset="-127"/>
+            </a:endParaRPr>
+          </a:p>
+        </p:txBody>
+      </p:sp>
+      <p:sp>
+        <p:nvSpPr>
+          <p:cNvPr id="26" name="TextBox 25"/>
           <p:cNvSpPr txBox="1"/>
           <p:nvPr/>
         </p:nvSpPr>
         <p:spPr>
           <a:xfrm>
-            <a:off x="8740072" y="2724274"/>
+            <a:off x="8740072" y="858041"/>
             <a:ext cx="1841303" cy="228600"/>
           </a:xfrm>
           <a:prstGeom prst="rect">
@@ -17286,7 +17292,7 @@
           <a:noFill/>
         </p:spPr>
         <p:txBody>
-          <a:bodyPr wrap="square" lIns="18288" tIns="18288" rIns="18288" bIns="18288" anchor="t">
+          <a:bodyPr wrap="square" lIns="18288" tIns="18288" rIns="18288" bIns="18288" anchor="ctr">
             <a:noAutofit/>
           </a:bodyPr>
           <a:lstStyle/>
@@ -17304,7 +17310,7 @@
                 <a:latin typeface="맑은 고딕" panose="020B0503020000020004" pitchFamily="50" charset="-127"/>
                 <a:ea typeface="맑은 고딕" panose="020B0503020000020004" pitchFamily="50" charset="-127"/>
               </a:rPr>
-              <a:t>콘텐츠</a:t>
+              <a:t>플레이어와</a:t>
             </a:r>
             <a:r>
               <a:rPr sz="1000" b="1" dirty="0">
@@ -17324,7 +17330,7 @@
                 <a:latin typeface="맑은 고딕" panose="020B0503020000020004" pitchFamily="50" charset="-127"/>
                 <a:ea typeface="맑은 고딕" panose="020B0503020000020004" pitchFamily="50" charset="-127"/>
               </a:rPr>
-              <a:t>연동</a:t>
+              <a:t>호흡</a:t>
             </a:r>
             <a:endParaRPr sz="1000" b="1" dirty="0">
               <a:solidFill>
@@ -17338,13 +17344,13 @@
       </p:sp>
       <p:sp>
         <p:nvSpPr>
-          <p:cNvPr id="30" name="TextBox 29"/>
+          <p:cNvPr id="27" name="TextBox 26"/>
           <p:cNvSpPr txBox="1"/>
           <p:nvPr/>
         </p:nvSpPr>
         <p:spPr>
           <a:xfrm>
-            <a:off x="8941239" y="3016882"/>
+            <a:off x="8941239" y="1150649"/>
             <a:ext cx="1735074" cy="210312"/>
           </a:xfrm>
           <a:prstGeom prst="rect">
@@ -17353,7 +17359,7 @@
           <a:noFill/>
         </p:spPr>
         <p:txBody>
-          <a:bodyPr wrap="square" lIns="18288" tIns="18288" rIns="18288" bIns="18288" anchor="t">
+          <a:bodyPr wrap="square" lIns="18288" tIns="18288" rIns="18288" bIns="18288" anchor="ctr">
             <a:noAutofit/>
           </a:bodyPr>
           <a:lstStyle/>
@@ -17364,27 +17370,84 @@
               </a:lnSpc>
             </a:pPr>
             <a:r>
-              <a:rPr sz="1000" b="0">
+              <a:rPr sz="1000" b="0" dirty="0">
                 <a:solidFill>
                   <a:srgbClr val="232830"/>
                 </a:solidFill>
                 <a:latin typeface="맑은 고딕" panose="020B0503020000020004" pitchFamily="50" charset="-127"/>
                 <a:ea typeface="맑은 고딕" panose="020B0503020000020004" pitchFamily="50" charset="-127"/>
               </a:rPr>
-              <a:t>8.1 은신/이동</a:t>
-            </a:r>
-          </a:p>
-        </p:txBody>
-      </p:sp>
-      <p:sp>
-        <p:nvSpPr>
-          <p:cNvPr id="31" name="TextBox 30"/>
+              <a:t>7.1 </a:t>
+            </a:r>
+            <a:r>
+              <a:rPr sz="1000" b="0" dirty="0" err="1">
+                <a:solidFill>
+                  <a:srgbClr val="232830"/>
+                </a:solidFill>
+                <a:latin typeface="맑은 고딕" panose="020B0503020000020004" pitchFamily="50" charset="-127"/>
+                <a:ea typeface="맑은 고딕" panose="020B0503020000020004" pitchFamily="50" charset="-127"/>
+              </a:rPr>
+              <a:t>플레이어</a:t>
+            </a:r>
+            <a:r>
+              <a:rPr sz="1000" b="0" dirty="0">
+                <a:solidFill>
+                  <a:srgbClr val="232830"/>
+                </a:solidFill>
+                <a:latin typeface="맑은 고딕" panose="020B0503020000020004" pitchFamily="50" charset="-127"/>
+                <a:ea typeface="맑은 고딕" panose="020B0503020000020004" pitchFamily="50" charset="-127"/>
+              </a:rPr>
+              <a:t> </a:t>
+            </a:r>
+            <a:r>
+              <a:rPr sz="1000" b="0" dirty="0" err="1">
+                <a:solidFill>
+                  <a:srgbClr val="232830"/>
+                </a:solidFill>
+                <a:latin typeface="맑은 고딕" panose="020B0503020000020004" pitchFamily="50" charset="-127"/>
+                <a:ea typeface="맑은 고딕" panose="020B0503020000020004" pitchFamily="50" charset="-127"/>
+              </a:rPr>
+              <a:t>조작</a:t>
+            </a:r>
+            <a:r>
+              <a:rPr sz="1000" b="0" dirty="0">
+                <a:solidFill>
+                  <a:srgbClr val="232830"/>
+                </a:solidFill>
+                <a:latin typeface="맑은 고딕" panose="020B0503020000020004" pitchFamily="50" charset="-127"/>
+                <a:ea typeface="맑은 고딕" panose="020B0503020000020004" pitchFamily="50" charset="-127"/>
+              </a:rPr>
+              <a:t> </a:t>
+            </a:r>
+            <a:r>
+              <a:rPr sz="1000" b="0" dirty="0" err="1">
+                <a:solidFill>
+                  <a:srgbClr val="232830"/>
+                </a:solidFill>
+                <a:latin typeface="맑은 고딕" panose="020B0503020000020004" pitchFamily="50" charset="-127"/>
+                <a:ea typeface="맑은 고딕" panose="020B0503020000020004" pitchFamily="50" charset="-127"/>
+              </a:rPr>
+              <a:t>규칙</a:t>
+            </a:r>
+            <a:endParaRPr sz="1000" b="0" dirty="0">
+              <a:solidFill>
+                <a:srgbClr val="232830"/>
+              </a:solidFill>
+              <a:latin typeface="맑은 고딕" panose="020B0503020000020004" pitchFamily="50" charset="-127"/>
+              <a:ea typeface="맑은 고딕" panose="020B0503020000020004" pitchFamily="50" charset="-127"/>
+            </a:endParaRPr>
+          </a:p>
+        </p:txBody>
+      </p:sp>
+      <p:sp>
+        <p:nvSpPr>
+          <p:cNvPr id="28" name="TextBox 27"/>
           <p:cNvSpPr txBox="1"/>
           <p:nvPr/>
         </p:nvSpPr>
         <p:spPr>
           <a:xfrm>
-            <a:off x="8941239" y="3272914"/>
+            <a:off x="8941239" y="1406681"/>
             <a:ext cx="1735074" cy="210312"/>
           </a:xfrm>
           <a:prstGeom prst="rect">
@@ -17393,7 +17456,7 @@
           <a:noFill/>
         </p:spPr>
         <p:txBody>
-          <a:bodyPr wrap="square" lIns="18288" tIns="18288" rIns="18288" bIns="18288" anchor="t">
+          <a:bodyPr wrap="square" lIns="18288" tIns="18288" rIns="18288" bIns="18288" anchor="ctr">
             <a:noAutofit/>
           </a:bodyPr>
           <a:lstStyle/>
@@ -17404,27 +17467,44 @@
               </a:lnSpc>
             </a:pPr>
             <a:r>
-              <a:rPr sz="1000" b="0">
+              <a:rPr sz="1000" b="0" dirty="0">
                 <a:solidFill>
                   <a:srgbClr val="232830"/>
                 </a:solidFill>
                 <a:latin typeface="맑은 고딕" panose="020B0503020000020004" pitchFamily="50" charset="-127"/>
                 <a:ea typeface="맑은 고딕" panose="020B0503020000020004" pitchFamily="50" charset="-127"/>
               </a:rPr>
-              <a:t>8.2 스토리/에피소드</a:t>
-            </a:r>
-          </a:p>
-        </p:txBody>
-      </p:sp>
-      <p:sp>
-        <p:nvSpPr>
-          <p:cNvPr id="32" name="TextBox 31"/>
+              <a:t>7.2 </a:t>
+            </a:r>
+            <a:r>
+              <a:rPr lang="ko-KR" altLang="en-US" sz="1000" b="0" dirty="0">
+                <a:solidFill>
+                  <a:srgbClr val="232830"/>
+                </a:solidFill>
+                <a:latin typeface="맑은 고딕" panose="020B0503020000020004" pitchFamily="50" charset="-127"/>
+                <a:ea typeface="맑은 고딕" panose="020B0503020000020004" pitchFamily="50" charset="-127"/>
+              </a:rPr>
+              <a:t>이동과 호흡</a:t>
+            </a:r>
+            <a:endParaRPr sz="1000" b="0" dirty="0">
+              <a:solidFill>
+                <a:srgbClr val="232830"/>
+              </a:solidFill>
+              <a:latin typeface="맑은 고딕" panose="020B0503020000020004" pitchFamily="50" charset="-127"/>
+              <a:ea typeface="맑은 고딕" panose="020B0503020000020004" pitchFamily="50" charset="-127"/>
+            </a:endParaRPr>
+          </a:p>
+        </p:txBody>
+      </p:sp>
+      <p:sp>
+        <p:nvSpPr>
+          <p:cNvPr id="29" name="TextBox 28"/>
           <p:cNvSpPr txBox="1"/>
           <p:nvPr/>
         </p:nvSpPr>
         <p:spPr>
           <a:xfrm>
-            <a:off x="8740072" y="3949570"/>
+            <a:off x="8740072" y="2572966"/>
             <a:ext cx="1841303" cy="228600"/>
           </a:xfrm>
           <a:prstGeom prst="rect">
@@ -17433,7 +17513,7 @@
           <a:noFill/>
         </p:spPr>
         <p:txBody>
-          <a:bodyPr wrap="square" lIns="18288" tIns="18288" rIns="18288" bIns="18288" anchor="t">
+          <a:bodyPr wrap="square" lIns="18288" tIns="18288" rIns="18288" bIns="18288" anchor="ctr">
             <a:noAutofit/>
           </a:bodyPr>
           <a:lstStyle/>
@@ -17451,7 +17531,7 @@
                 <a:latin typeface="맑은 고딕" panose="020B0503020000020004" pitchFamily="50" charset="-127"/>
                 <a:ea typeface="맑은 고딕" panose="020B0503020000020004" pitchFamily="50" charset="-127"/>
               </a:rPr>
-              <a:t>플레이</a:t>
+              <a:t>콘텐츠</a:t>
             </a:r>
             <a:r>
               <a:rPr sz="1000" b="1" dirty="0">
@@ -17471,47 +17551,7 @@
                 <a:latin typeface="맑은 고딕" panose="020B0503020000020004" pitchFamily="50" charset="-127"/>
                 <a:ea typeface="맑은 고딕" panose="020B0503020000020004" pitchFamily="50" charset="-127"/>
               </a:rPr>
-              <a:t>화면</a:t>
-            </a:r>
-            <a:r>
-              <a:rPr sz="1000" b="1" dirty="0">
-                <a:solidFill>
-                  <a:srgbClr val="00437A"/>
-                </a:solidFill>
-                <a:latin typeface="맑은 고딕" panose="020B0503020000020004" pitchFamily="50" charset="-127"/>
-                <a:ea typeface="맑은 고딕" panose="020B0503020000020004" pitchFamily="50" charset="-127"/>
-              </a:rPr>
-              <a:t> / </a:t>
-            </a:r>
-            <a:r>
-              <a:rPr sz="1000" b="1" dirty="0" err="1">
-                <a:solidFill>
-                  <a:srgbClr val="00437A"/>
-                </a:solidFill>
-                <a:latin typeface="맑은 고딕" panose="020B0503020000020004" pitchFamily="50" charset="-127"/>
-                <a:ea typeface="맑은 고딕" panose="020B0503020000020004" pitchFamily="50" charset="-127"/>
-              </a:rPr>
-              <a:t>리소스</a:t>
-            </a:r>
-            <a:r>
-              <a:rPr sz="1000" b="1" dirty="0">
-                <a:solidFill>
-                  <a:srgbClr val="00437A"/>
-                </a:solidFill>
-                <a:latin typeface="맑은 고딕" panose="020B0503020000020004" pitchFamily="50" charset="-127"/>
-                <a:ea typeface="맑은 고딕" panose="020B0503020000020004" pitchFamily="50" charset="-127"/>
-              </a:rPr>
-              <a:t> / </a:t>
-            </a:r>
-            <a:r>
-              <a:rPr sz="1000" b="1" dirty="0" err="1">
-                <a:solidFill>
-                  <a:srgbClr val="00437A"/>
-                </a:solidFill>
-                <a:latin typeface="맑은 고딕" panose="020B0503020000020004" pitchFamily="50" charset="-127"/>
-                <a:ea typeface="맑은 고딕" panose="020B0503020000020004" pitchFamily="50" charset="-127"/>
-              </a:rPr>
-              <a:t>예외</a:t>
+              <a:t>연동</a:t>
             </a:r>
             <a:endParaRPr sz="1000" b="1" dirty="0">
               <a:solidFill>
@@ -17525,13 +17565,13 @@
       </p:sp>
       <p:sp>
         <p:nvSpPr>
-          <p:cNvPr id="33" name="TextBox 32"/>
+          <p:cNvPr id="30" name="TextBox 29"/>
           <p:cNvSpPr txBox="1"/>
           <p:nvPr/>
         </p:nvSpPr>
         <p:spPr>
           <a:xfrm>
-            <a:off x="8941239" y="4242178"/>
+            <a:off x="8941239" y="2865574"/>
             <a:ext cx="1735074" cy="210312"/>
           </a:xfrm>
           <a:prstGeom prst="rect">
@@ -17540,7 +17580,7 @@
           <a:noFill/>
         </p:spPr>
         <p:txBody>
-          <a:bodyPr wrap="square" lIns="18288" tIns="18288" rIns="18288" bIns="18288" anchor="t">
+          <a:bodyPr wrap="square" lIns="18288" tIns="18288" rIns="18288" bIns="18288" anchor="ctr">
             <a:noAutofit/>
           </a:bodyPr>
           <a:lstStyle/>
@@ -17558,20 +17598,20 @@
                 <a:latin typeface="맑은 고딕" panose="020B0503020000020004" pitchFamily="50" charset="-127"/>
                 <a:ea typeface="맑은 고딕" panose="020B0503020000020004" pitchFamily="50" charset="-127"/>
               </a:rPr>
-              <a:t>9. 플레이 화면</a:t>
-            </a:r>
-          </a:p>
-        </p:txBody>
-      </p:sp>
-      <p:sp>
-        <p:nvSpPr>
-          <p:cNvPr id="34" name="TextBox 33"/>
+              <a:t>8.1 은신/이동</a:t>
+            </a:r>
+          </a:p>
+        </p:txBody>
+      </p:sp>
+      <p:sp>
+        <p:nvSpPr>
+          <p:cNvPr id="31" name="TextBox 30"/>
           <p:cNvSpPr txBox="1"/>
           <p:nvPr/>
         </p:nvSpPr>
         <p:spPr>
           <a:xfrm>
-            <a:off x="8941239" y="4498210"/>
+            <a:off x="8941239" y="3121606"/>
             <a:ext cx="1735074" cy="210312"/>
           </a:xfrm>
           <a:prstGeom prst="rect">
@@ -17580,7 +17620,7 @@
           <a:noFill/>
         </p:spPr>
         <p:txBody>
-          <a:bodyPr wrap="square" lIns="18288" tIns="18288" rIns="18288" bIns="18288" anchor="t">
+          <a:bodyPr wrap="square" lIns="18288" tIns="18288" rIns="18288" bIns="18288" anchor="ctr">
             <a:noAutofit/>
           </a:bodyPr>
           <a:lstStyle/>
@@ -17591,36 +17631,53 @@
               </a:lnSpc>
             </a:pPr>
             <a:r>
-              <a:rPr sz="1000" b="0">
+              <a:rPr sz="1000" b="0" dirty="0">
                 <a:solidFill>
                   <a:srgbClr val="232830"/>
                 </a:solidFill>
                 <a:latin typeface="맑은 고딕" panose="020B0503020000020004" pitchFamily="50" charset="-127"/>
                 <a:ea typeface="맑은 고딕" panose="020B0503020000020004" pitchFamily="50" charset="-127"/>
               </a:rPr>
-              <a:t>10. 리소스</a:t>
-            </a:r>
-          </a:p>
-        </p:txBody>
-      </p:sp>
-      <p:sp>
-        <p:nvSpPr>
-          <p:cNvPr id="35" name="TextBox 34"/>
+              <a:t>8.2 </a:t>
+            </a:r>
+            <a:r>
+              <a:rPr lang="ko-KR" altLang="en-US" sz="1000" b="0" dirty="0">
+                <a:solidFill>
+                  <a:srgbClr val="232830"/>
+                </a:solidFill>
+                <a:latin typeface="맑은 고딕" panose="020B0503020000020004" pitchFamily="50" charset="-127"/>
+                <a:ea typeface="맑은 고딕" panose="020B0503020000020004" pitchFamily="50" charset="-127"/>
+              </a:rPr>
+              <a:t>환경 퍼즐</a:t>
+            </a:r>
+            <a:endParaRPr sz="1000" b="0" dirty="0">
+              <a:solidFill>
+                <a:srgbClr val="232830"/>
+              </a:solidFill>
+              <a:latin typeface="맑은 고딕" panose="020B0503020000020004" pitchFamily="50" charset="-127"/>
+              <a:ea typeface="맑은 고딕" panose="020B0503020000020004" pitchFamily="50" charset="-127"/>
+            </a:endParaRPr>
+          </a:p>
+        </p:txBody>
+      </p:sp>
+      <p:sp>
+        <p:nvSpPr>
+          <p:cNvPr id="32" name="TextBox 31"/>
           <p:cNvSpPr txBox="1"/>
           <p:nvPr/>
         </p:nvSpPr>
         <p:spPr>
           <a:xfrm>
-            <a:off x="8941239" y="4754242"/>
-            <a:ext cx="1735074" cy="210312"/>
-          </a:xfrm>
-          <a:prstGeom prst="rect">
-            <a:avLst/>
-          </a:prstGeom>
-          <a:noFill/>
-        </p:spPr>
-        <p:txBody>
-          <a:bodyPr wrap="square" lIns="18288" tIns="18288" rIns="18288" bIns="18288" anchor="t">
+            <a:off x="8740072" y="4027287"/>
+            <a:ext cx="1841303" cy="228600"/>
+          </a:xfrm>
+          <a:prstGeom prst="rect">
+            <a:avLst/>
+          </a:prstGeom>
+          <a:noFill/>
+        </p:spPr>
+        <p:txBody>
+          <a:bodyPr wrap="square" lIns="18288" tIns="18288" rIns="18288" bIns="18288" anchor="ctr">
             <a:noAutofit/>
           </a:bodyPr>
           <a:lstStyle/>
@@ -17631,15 +17688,279 @@
               </a:lnSpc>
             </a:pPr>
             <a:r>
-              <a:rPr sz="1000" b="0">
-                <a:solidFill>
-                  <a:srgbClr val="232830"/>
+              <a:rPr sz="1000" b="1" dirty="0" err="1">
+                <a:solidFill>
+                  <a:srgbClr val="00437A"/>
                 </a:solidFill>
                 <a:latin typeface="맑은 고딕" panose="020B0503020000020004" pitchFamily="50" charset="-127"/>
                 <a:ea typeface="맑은 고딕" panose="020B0503020000020004" pitchFamily="50" charset="-127"/>
               </a:rPr>
-              <a:t>11. 예외 사항 안전 장치</a:t>
-            </a:r>
+              <a:t>플레이</a:t>
+            </a:r>
+            <a:r>
+              <a:rPr sz="1000" b="1" dirty="0">
+                <a:solidFill>
+                  <a:srgbClr val="00437A"/>
+                </a:solidFill>
+                <a:latin typeface="맑은 고딕" panose="020B0503020000020004" pitchFamily="50" charset="-127"/>
+                <a:ea typeface="맑은 고딕" panose="020B0503020000020004" pitchFamily="50" charset="-127"/>
+              </a:rPr>
+              <a:t> </a:t>
+            </a:r>
+            <a:r>
+              <a:rPr sz="1000" b="1" dirty="0" err="1">
+                <a:solidFill>
+                  <a:srgbClr val="00437A"/>
+                </a:solidFill>
+                <a:latin typeface="맑은 고딕" panose="020B0503020000020004" pitchFamily="50" charset="-127"/>
+                <a:ea typeface="맑은 고딕" panose="020B0503020000020004" pitchFamily="50" charset="-127"/>
+              </a:rPr>
+              <a:t>화면</a:t>
+            </a:r>
+            <a:r>
+              <a:rPr sz="1000" b="1" dirty="0">
+                <a:solidFill>
+                  <a:srgbClr val="00437A"/>
+                </a:solidFill>
+                <a:latin typeface="맑은 고딕" panose="020B0503020000020004" pitchFamily="50" charset="-127"/>
+                <a:ea typeface="맑은 고딕" panose="020B0503020000020004" pitchFamily="50" charset="-127"/>
+              </a:rPr>
+              <a:t> / </a:t>
+            </a:r>
+            <a:r>
+              <a:rPr sz="1000" b="1" dirty="0" err="1">
+                <a:solidFill>
+                  <a:srgbClr val="00437A"/>
+                </a:solidFill>
+                <a:latin typeface="맑은 고딕" panose="020B0503020000020004" pitchFamily="50" charset="-127"/>
+                <a:ea typeface="맑은 고딕" panose="020B0503020000020004" pitchFamily="50" charset="-127"/>
+              </a:rPr>
+              <a:t>리소스</a:t>
+            </a:r>
+            <a:r>
+              <a:rPr sz="1000" b="1" dirty="0">
+                <a:solidFill>
+                  <a:srgbClr val="00437A"/>
+                </a:solidFill>
+                <a:latin typeface="맑은 고딕" panose="020B0503020000020004" pitchFamily="50" charset="-127"/>
+                <a:ea typeface="맑은 고딕" panose="020B0503020000020004" pitchFamily="50" charset="-127"/>
+              </a:rPr>
+              <a:t> / </a:t>
+            </a:r>
+            <a:r>
+              <a:rPr sz="1000" b="1" dirty="0" err="1">
+                <a:solidFill>
+                  <a:srgbClr val="00437A"/>
+                </a:solidFill>
+                <a:latin typeface="맑은 고딕" panose="020B0503020000020004" pitchFamily="50" charset="-127"/>
+                <a:ea typeface="맑은 고딕" panose="020B0503020000020004" pitchFamily="50" charset="-127"/>
+              </a:rPr>
+              <a:t>예외</a:t>
+            </a:r>
+            <a:endParaRPr sz="1000" b="1" dirty="0">
+              <a:solidFill>
+                <a:srgbClr val="00437A"/>
+              </a:solidFill>
+              <a:latin typeface="맑은 고딕" panose="020B0503020000020004" pitchFamily="50" charset="-127"/>
+              <a:ea typeface="맑은 고딕" panose="020B0503020000020004" pitchFamily="50" charset="-127"/>
+            </a:endParaRPr>
+          </a:p>
+        </p:txBody>
+      </p:sp>
+      <p:sp>
+        <p:nvSpPr>
+          <p:cNvPr id="33" name="TextBox 32"/>
+          <p:cNvSpPr txBox="1"/>
+          <p:nvPr/>
+        </p:nvSpPr>
+        <p:spPr>
+          <a:xfrm>
+            <a:off x="8941239" y="4319895"/>
+            <a:ext cx="1735074" cy="210312"/>
+          </a:xfrm>
+          <a:prstGeom prst="rect">
+            <a:avLst/>
+          </a:prstGeom>
+          <a:noFill/>
+        </p:spPr>
+        <p:txBody>
+          <a:bodyPr wrap="square" lIns="18288" tIns="18288" rIns="18288" bIns="18288" anchor="ctr">
+            <a:noAutofit/>
+          </a:bodyPr>
+          <a:lstStyle/>
+          <a:p>
+            <a:pPr>
+              <a:lnSpc>
+                <a:spcPct val="150000"/>
+              </a:lnSpc>
+            </a:pPr>
+            <a:r>
+              <a:rPr sz="1000" b="0">
+                <a:solidFill>
+                  <a:srgbClr val="232830"/>
+                </a:solidFill>
+                <a:latin typeface="맑은 고딕" panose="020B0503020000020004" pitchFamily="50" charset="-127"/>
+                <a:ea typeface="맑은 고딕" panose="020B0503020000020004" pitchFamily="50" charset="-127"/>
+              </a:rPr>
+              <a:t>9. 플레이 화면</a:t>
+            </a:r>
+          </a:p>
+        </p:txBody>
+      </p:sp>
+      <p:sp>
+        <p:nvSpPr>
+          <p:cNvPr id="34" name="TextBox 33"/>
+          <p:cNvSpPr txBox="1"/>
+          <p:nvPr/>
+        </p:nvSpPr>
+        <p:spPr>
+          <a:xfrm>
+            <a:off x="8941239" y="4575927"/>
+            <a:ext cx="1735074" cy="210312"/>
+          </a:xfrm>
+          <a:prstGeom prst="rect">
+            <a:avLst/>
+          </a:prstGeom>
+          <a:noFill/>
+        </p:spPr>
+        <p:txBody>
+          <a:bodyPr wrap="square" lIns="18288" tIns="18288" rIns="18288" bIns="18288" anchor="ctr">
+            <a:noAutofit/>
+          </a:bodyPr>
+          <a:lstStyle/>
+          <a:p>
+            <a:pPr>
+              <a:lnSpc>
+                <a:spcPct val="150000"/>
+              </a:lnSpc>
+            </a:pPr>
+            <a:r>
+              <a:rPr sz="1000" b="0">
+                <a:solidFill>
+                  <a:srgbClr val="232830"/>
+                </a:solidFill>
+                <a:latin typeface="맑은 고딕" panose="020B0503020000020004" pitchFamily="50" charset="-127"/>
+                <a:ea typeface="맑은 고딕" panose="020B0503020000020004" pitchFamily="50" charset="-127"/>
+              </a:rPr>
+              <a:t>10. 리소스</a:t>
+            </a:r>
+          </a:p>
+        </p:txBody>
+      </p:sp>
+      <p:sp>
+        <p:nvSpPr>
+          <p:cNvPr id="35" name="TextBox 34"/>
+          <p:cNvSpPr txBox="1"/>
+          <p:nvPr/>
+        </p:nvSpPr>
+        <p:spPr>
+          <a:xfrm>
+            <a:off x="8941239" y="4831959"/>
+            <a:ext cx="1735074" cy="210312"/>
+          </a:xfrm>
+          <a:prstGeom prst="rect">
+            <a:avLst/>
+          </a:prstGeom>
+          <a:noFill/>
+        </p:spPr>
+        <p:txBody>
+          <a:bodyPr wrap="square" lIns="18288" tIns="18288" rIns="18288" bIns="18288" anchor="ctr">
+            <a:noAutofit/>
+          </a:bodyPr>
+          <a:lstStyle/>
+          <a:p>
+            <a:pPr>
+              <a:lnSpc>
+                <a:spcPct val="150000"/>
+              </a:lnSpc>
+            </a:pPr>
+            <a:r>
+              <a:rPr sz="1000" b="0" dirty="0">
+                <a:solidFill>
+                  <a:srgbClr val="232830"/>
+                </a:solidFill>
+                <a:latin typeface="맑은 고딕" panose="020B0503020000020004" pitchFamily="50" charset="-127"/>
+                <a:ea typeface="맑은 고딕" panose="020B0503020000020004" pitchFamily="50" charset="-127"/>
+              </a:rPr>
+              <a:t>11. </a:t>
+            </a:r>
+            <a:r>
+              <a:rPr sz="1000" b="0" dirty="0" err="1">
+                <a:solidFill>
+                  <a:srgbClr val="232830"/>
+                </a:solidFill>
+                <a:latin typeface="맑은 고딕" panose="020B0503020000020004" pitchFamily="50" charset="-127"/>
+                <a:ea typeface="맑은 고딕" panose="020B0503020000020004" pitchFamily="50" charset="-127"/>
+              </a:rPr>
+              <a:t>예외</a:t>
+            </a:r>
+            <a:r>
+              <a:rPr sz="1000" b="0" dirty="0">
+                <a:solidFill>
+                  <a:srgbClr val="232830"/>
+                </a:solidFill>
+                <a:latin typeface="맑은 고딕" panose="020B0503020000020004" pitchFamily="50" charset="-127"/>
+                <a:ea typeface="맑은 고딕" panose="020B0503020000020004" pitchFamily="50" charset="-127"/>
+              </a:rPr>
+              <a:t> </a:t>
+            </a:r>
+            <a:r>
+              <a:rPr sz="1000" b="0" dirty="0" err="1">
+                <a:solidFill>
+                  <a:srgbClr val="232830"/>
+                </a:solidFill>
+                <a:latin typeface="맑은 고딕" panose="020B0503020000020004" pitchFamily="50" charset="-127"/>
+                <a:ea typeface="맑은 고딕" panose="020B0503020000020004" pitchFamily="50" charset="-127"/>
+              </a:rPr>
+              <a:t>사항</a:t>
+            </a:r>
+            <a:r>
+              <a:rPr lang="en-US" sz="1000" dirty="0">
+                <a:solidFill>
+                  <a:srgbClr val="232830"/>
+                </a:solidFill>
+                <a:latin typeface="맑은 고딕" panose="020B0503020000020004" pitchFamily="50" charset="-127"/>
+                <a:ea typeface="맑은 고딕" panose="020B0503020000020004" pitchFamily="50" charset="-127"/>
+              </a:rPr>
+              <a:t> / </a:t>
+            </a:r>
+            <a:r>
+              <a:rPr sz="1000" b="0" dirty="0" err="1">
+                <a:solidFill>
+                  <a:srgbClr val="232830"/>
+                </a:solidFill>
+                <a:latin typeface="맑은 고딕" panose="020B0503020000020004" pitchFamily="50" charset="-127"/>
+                <a:ea typeface="맑은 고딕" panose="020B0503020000020004" pitchFamily="50" charset="-127"/>
+              </a:rPr>
+              <a:t>안전</a:t>
+            </a:r>
+            <a:r>
+              <a:rPr sz="1000" b="0" dirty="0">
+                <a:solidFill>
+                  <a:srgbClr val="232830"/>
+                </a:solidFill>
+                <a:latin typeface="맑은 고딕" panose="020B0503020000020004" pitchFamily="50" charset="-127"/>
+                <a:ea typeface="맑은 고딕" panose="020B0503020000020004" pitchFamily="50" charset="-127"/>
+              </a:rPr>
+              <a:t> </a:t>
+            </a:r>
+            <a:r>
+              <a:rPr sz="1000" b="0" dirty="0" err="1">
+                <a:solidFill>
+                  <a:srgbClr val="232830"/>
+                </a:solidFill>
+                <a:latin typeface="맑은 고딕" panose="020B0503020000020004" pitchFamily="50" charset="-127"/>
+                <a:ea typeface="맑은 고딕" panose="020B0503020000020004" pitchFamily="50" charset="-127"/>
+              </a:rPr>
+              <a:t>장치</a:t>
+            </a:r>
+            <a:endParaRPr sz="1000" b="0" dirty="0">
+              <a:solidFill>
+                <a:srgbClr val="232830"/>
+              </a:solidFill>
+              <a:latin typeface="맑은 고딕" panose="020B0503020000020004" pitchFamily="50" charset="-127"/>
+              <a:ea typeface="맑은 고딕" panose="020B0503020000020004" pitchFamily="50" charset="-127"/>
+            </a:endParaRPr>
           </a:p>
         </p:txBody>
       </p:sp>
@@ -17655,11 +17976,17 @@
           <p:cNvGraphicFramePr>
             <a:graphicFrameLocks noGrp="1"/>
           </p:cNvGraphicFramePr>
-          <p:nvPr/>
+          <p:nvPr>
+            <p:extLst>
+              <p:ext uri="{D42A27DB-BD31-4B8C-83A1-F6EECF244321}">
+                <p14:modId xmlns:p14="http://schemas.microsoft.com/office/powerpoint/2010/main" val="2292909072"/>
+              </p:ext>
+            </p:extLst>
+          </p:nvPr>
         </p:nvGraphicFramePr>
         <p:xfrm>
-          <a:off x="566928" y="5300091"/>
-          <a:ext cx="11045952" cy="1280160"/>
+          <a:off x="566928" y="5459640"/>
+          <a:ext cx="11045952" cy="1162304"/>
         </p:xfrm>
         <a:graphic>
           <a:graphicData uri="http://schemas.openxmlformats.org/drawingml/2006/table">
@@ -17889,7 +18216,7 @@
         </p:nvCxnSpPr>
         <p:spPr>
           <a:xfrm>
-            <a:off x="588264" y="959482"/>
+            <a:off x="588264" y="671984"/>
             <a:ext cx="11015472" cy="0"/>
           </a:xfrm>
           <a:prstGeom prst="line">
@@ -17916,6 +18243,1321 @@
           </a:fontRef>
         </p:style>
       </p:cxnSp>
+      <p:sp>
+        <p:nvSpPr>
+          <p:cNvPr id="36" name="TextBox 35">
+            <a:extLst>
+              <a:ext uri="{FF2B5EF4-FFF2-40B4-BE49-F238E27FC236}">
+                <a16:creationId xmlns:a16="http://schemas.microsoft.com/office/drawing/2014/main" id="{83210356-AF6D-4364-B011-E8793BBD1331}"/>
+              </a:ext>
+            </a:extLst>
+          </p:cNvPr>
+          <p:cNvSpPr txBox="1"/>
+          <p:nvPr/>
+        </p:nvSpPr>
+        <p:spPr>
+          <a:xfrm>
+            <a:off x="1716855" y="3635452"/>
+            <a:ext cx="1735074" cy="210312"/>
+          </a:xfrm>
+          <a:prstGeom prst="rect">
+            <a:avLst/>
+          </a:prstGeom>
+          <a:noFill/>
+        </p:spPr>
+        <p:txBody>
+          <a:bodyPr wrap="square" lIns="18288" tIns="18288" rIns="18288" bIns="18288" anchor="ctr">
+            <a:noAutofit/>
+          </a:bodyPr>
+          <a:lstStyle/>
+          <a:p>
+            <a:pPr>
+              <a:lnSpc>
+                <a:spcPct val="150000"/>
+              </a:lnSpc>
+            </a:pPr>
+            <a:r>
+              <a:rPr sz="1000" b="0" dirty="0">
+                <a:solidFill>
+                  <a:srgbClr val="232830"/>
+                </a:solidFill>
+                <a:latin typeface="맑은 고딕" panose="020B0503020000020004" pitchFamily="50" charset="-127"/>
+                <a:ea typeface="맑은 고딕" panose="020B0503020000020004" pitchFamily="50" charset="-127"/>
+              </a:rPr>
+              <a:t>2.</a:t>
+            </a:r>
+            <a:r>
+              <a:rPr lang="en-US" sz="1000" b="0" dirty="0">
+                <a:solidFill>
+                  <a:srgbClr val="232830"/>
+                </a:solidFill>
+                <a:latin typeface="맑은 고딕" panose="020B0503020000020004" pitchFamily="50" charset="-127"/>
+                <a:ea typeface="맑은 고딕" panose="020B0503020000020004" pitchFamily="50" charset="-127"/>
+              </a:rPr>
+              <a:t>4</a:t>
+            </a:r>
+            <a:r>
+              <a:rPr sz="1000" b="0" dirty="0">
+                <a:solidFill>
+                  <a:srgbClr val="232830"/>
+                </a:solidFill>
+                <a:latin typeface="맑은 고딕" panose="020B0503020000020004" pitchFamily="50" charset="-127"/>
+                <a:ea typeface="맑은 고딕" panose="020B0503020000020004" pitchFamily="50" charset="-127"/>
+              </a:rPr>
+              <a:t> </a:t>
+            </a:r>
+            <a:r>
+              <a:rPr sz="1000" b="0" dirty="0" err="1">
+                <a:solidFill>
+                  <a:srgbClr val="232830"/>
+                </a:solidFill>
+                <a:latin typeface="맑은 고딕" panose="020B0503020000020004" pitchFamily="50" charset="-127"/>
+                <a:ea typeface="맑은 고딕" panose="020B0503020000020004" pitchFamily="50" charset="-127"/>
+              </a:rPr>
+              <a:t>시스템</a:t>
+            </a:r>
+            <a:r>
+              <a:rPr sz="1000" b="0" dirty="0">
+                <a:solidFill>
+                  <a:srgbClr val="232830"/>
+                </a:solidFill>
+                <a:latin typeface="맑은 고딕" panose="020B0503020000020004" pitchFamily="50" charset="-127"/>
+                <a:ea typeface="맑은 고딕" panose="020B0503020000020004" pitchFamily="50" charset="-127"/>
+              </a:rPr>
+              <a:t> </a:t>
+            </a:r>
+            <a:r>
+              <a:rPr lang="ko-KR" altLang="en-US" sz="1000" b="0" dirty="0">
+                <a:solidFill>
+                  <a:srgbClr val="232830"/>
+                </a:solidFill>
+                <a:latin typeface="맑은 고딕" panose="020B0503020000020004" pitchFamily="50" charset="-127"/>
+                <a:ea typeface="맑은 고딕" panose="020B0503020000020004" pitchFamily="50" charset="-127"/>
+              </a:rPr>
+              <a:t>플로우 차트</a:t>
+            </a:r>
+            <a:endParaRPr sz="1000" b="0" dirty="0">
+              <a:solidFill>
+                <a:srgbClr val="232830"/>
+              </a:solidFill>
+              <a:latin typeface="맑은 고딕" panose="020B0503020000020004" pitchFamily="50" charset="-127"/>
+              <a:ea typeface="맑은 고딕" panose="020B0503020000020004" pitchFamily="50" charset="-127"/>
+            </a:endParaRPr>
+          </a:p>
+        </p:txBody>
+      </p:sp>
+      <p:sp>
+        <p:nvSpPr>
+          <p:cNvPr id="37" name="TextBox 36">
+            <a:extLst>
+              <a:ext uri="{FF2B5EF4-FFF2-40B4-BE49-F238E27FC236}">
+                <a16:creationId xmlns:a16="http://schemas.microsoft.com/office/drawing/2014/main" id="{0CD5253A-234E-4C1E-858D-1A457D312014}"/>
+              </a:ext>
+            </a:extLst>
+          </p:cNvPr>
+          <p:cNvSpPr txBox="1"/>
+          <p:nvPr/>
+        </p:nvSpPr>
+        <p:spPr>
+          <a:xfrm>
+            <a:off x="5573267" y="1676429"/>
+            <a:ext cx="1735074" cy="210312"/>
+          </a:xfrm>
+          <a:prstGeom prst="rect">
+            <a:avLst/>
+          </a:prstGeom>
+          <a:noFill/>
+        </p:spPr>
+        <p:txBody>
+          <a:bodyPr wrap="square" lIns="18288" tIns="18288" rIns="18288" bIns="18288" anchor="ctr">
+            <a:noAutofit/>
+          </a:bodyPr>
+          <a:lstStyle/>
+          <a:p>
+            <a:pPr>
+              <a:lnSpc>
+                <a:spcPct val="150000"/>
+              </a:lnSpc>
+            </a:pPr>
+            <a:r>
+              <a:rPr sz="1000" b="0" dirty="0">
+                <a:solidFill>
+                  <a:srgbClr val="232830"/>
+                </a:solidFill>
+                <a:latin typeface="맑은 고딕" panose="020B0503020000020004" pitchFamily="50" charset="-127"/>
+                <a:ea typeface="맑은 고딕" panose="020B0503020000020004" pitchFamily="50" charset="-127"/>
+              </a:rPr>
+              <a:t>4.</a:t>
+            </a:r>
+            <a:r>
+              <a:rPr lang="en-US" sz="1000" b="0" dirty="0">
+                <a:solidFill>
+                  <a:srgbClr val="232830"/>
+                </a:solidFill>
+                <a:latin typeface="맑은 고딕" panose="020B0503020000020004" pitchFamily="50" charset="-127"/>
+                <a:ea typeface="맑은 고딕" panose="020B0503020000020004" pitchFamily="50" charset="-127"/>
+              </a:rPr>
+              <a:t>3</a:t>
+            </a:r>
+            <a:r>
+              <a:rPr sz="1000" b="0" dirty="0">
+                <a:solidFill>
+                  <a:srgbClr val="232830"/>
+                </a:solidFill>
+                <a:latin typeface="맑은 고딕" panose="020B0503020000020004" pitchFamily="50" charset="-127"/>
+                <a:ea typeface="맑은 고딕" panose="020B0503020000020004" pitchFamily="50" charset="-127"/>
+              </a:rPr>
+              <a:t> </a:t>
+            </a:r>
+            <a:r>
+              <a:rPr lang="ko-KR" altLang="en-US" sz="1000" b="0" dirty="0">
+                <a:solidFill>
+                  <a:srgbClr val="232830"/>
+                </a:solidFill>
+                <a:latin typeface="맑은 고딕" panose="020B0503020000020004" pitchFamily="50" charset="-127"/>
+                <a:ea typeface="맑은 고딕" panose="020B0503020000020004" pitchFamily="50" charset="-127"/>
+              </a:rPr>
+              <a:t>숨 참기</a:t>
+            </a:r>
+            <a:endParaRPr sz="1000" b="0" dirty="0">
+              <a:solidFill>
+                <a:srgbClr val="232830"/>
+              </a:solidFill>
+              <a:latin typeface="맑은 고딕" panose="020B0503020000020004" pitchFamily="50" charset="-127"/>
+              <a:ea typeface="맑은 고딕" panose="020B0503020000020004" pitchFamily="50" charset="-127"/>
+            </a:endParaRPr>
+          </a:p>
+        </p:txBody>
+      </p:sp>
+      <p:sp>
+        <p:nvSpPr>
+          <p:cNvPr id="39" name="TextBox 38">
+            <a:extLst>
+              <a:ext uri="{FF2B5EF4-FFF2-40B4-BE49-F238E27FC236}">
+                <a16:creationId xmlns:a16="http://schemas.microsoft.com/office/drawing/2014/main" id="{6A071872-5E52-4F86-A060-8D4665D30D1E}"/>
+              </a:ext>
+            </a:extLst>
+          </p:cNvPr>
+          <p:cNvSpPr txBox="1"/>
+          <p:nvPr/>
+        </p:nvSpPr>
+        <p:spPr>
+          <a:xfrm>
+            <a:off x="5573267" y="1928650"/>
+            <a:ext cx="1735074" cy="210312"/>
+          </a:xfrm>
+          <a:prstGeom prst="rect">
+            <a:avLst/>
+          </a:prstGeom>
+          <a:noFill/>
+        </p:spPr>
+        <p:txBody>
+          <a:bodyPr wrap="square" lIns="18288" tIns="18288" rIns="18288" bIns="18288" anchor="ctr">
+            <a:noAutofit/>
+          </a:bodyPr>
+          <a:lstStyle/>
+          <a:p>
+            <a:pPr>
+              <a:lnSpc>
+                <a:spcPct val="150000"/>
+              </a:lnSpc>
+            </a:pPr>
+            <a:r>
+              <a:rPr sz="1000" b="0" dirty="0">
+                <a:solidFill>
+                  <a:srgbClr val="232830"/>
+                </a:solidFill>
+                <a:latin typeface="맑은 고딕" panose="020B0503020000020004" pitchFamily="50" charset="-127"/>
+                <a:ea typeface="맑은 고딕" panose="020B0503020000020004" pitchFamily="50" charset="-127"/>
+              </a:rPr>
+              <a:t>4.</a:t>
+            </a:r>
+            <a:r>
+              <a:rPr lang="en-US" sz="1000" b="0" dirty="0">
+                <a:solidFill>
+                  <a:srgbClr val="232830"/>
+                </a:solidFill>
+                <a:latin typeface="맑은 고딕" panose="020B0503020000020004" pitchFamily="50" charset="-127"/>
+                <a:ea typeface="맑은 고딕" panose="020B0503020000020004" pitchFamily="50" charset="-127"/>
+              </a:rPr>
+              <a:t>4</a:t>
+            </a:r>
+            <a:r>
+              <a:rPr sz="1000" b="0" dirty="0">
+                <a:solidFill>
+                  <a:srgbClr val="232830"/>
+                </a:solidFill>
+                <a:latin typeface="맑은 고딕" panose="020B0503020000020004" pitchFamily="50" charset="-127"/>
+                <a:ea typeface="맑은 고딕" panose="020B0503020000020004" pitchFamily="50" charset="-127"/>
+              </a:rPr>
+              <a:t> </a:t>
+            </a:r>
+            <a:r>
+              <a:rPr lang="ko-KR" altLang="en-US" sz="1000" b="0" dirty="0">
+                <a:solidFill>
+                  <a:srgbClr val="232830"/>
+                </a:solidFill>
+                <a:latin typeface="맑은 고딕" panose="020B0503020000020004" pitchFamily="50" charset="-127"/>
+                <a:ea typeface="맑은 고딕" panose="020B0503020000020004" pitchFamily="50" charset="-127"/>
+              </a:rPr>
+              <a:t>내쉬기</a:t>
+            </a:r>
+            <a:endParaRPr sz="1000" b="0" dirty="0">
+              <a:solidFill>
+                <a:srgbClr val="232830"/>
+              </a:solidFill>
+              <a:latin typeface="맑은 고딕" panose="020B0503020000020004" pitchFamily="50" charset="-127"/>
+              <a:ea typeface="맑은 고딕" panose="020B0503020000020004" pitchFamily="50" charset="-127"/>
+            </a:endParaRPr>
+          </a:p>
+        </p:txBody>
+      </p:sp>
+      <p:sp>
+        <p:nvSpPr>
+          <p:cNvPr id="40" name="TextBox 39">
+            <a:extLst>
+              <a:ext uri="{FF2B5EF4-FFF2-40B4-BE49-F238E27FC236}">
+                <a16:creationId xmlns:a16="http://schemas.microsoft.com/office/drawing/2014/main" id="{A70130DF-540C-4B06-8577-9EA570F402E7}"/>
+              </a:ext>
+            </a:extLst>
+          </p:cNvPr>
+          <p:cNvSpPr txBox="1"/>
+          <p:nvPr/>
+        </p:nvSpPr>
+        <p:spPr>
+          <a:xfrm>
+            <a:off x="5573268" y="2189880"/>
+            <a:ext cx="1735074" cy="210312"/>
+          </a:xfrm>
+          <a:prstGeom prst="rect">
+            <a:avLst/>
+          </a:prstGeom>
+          <a:noFill/>
+        </p:spPr>
+        <p:txBody>
+          <a:bodyPr wrap="square" lIns="18288" tIns="18288" rIns="18288" bIns="18288" anchor="ctr">
+            <a:noAutofit/>
+          </a:bodyPr>
+          <a:lstStyle/>
+          <a:p>
+            <a:pPr>
+              <a:lnSpc>
+                <a:spcPct val="150000"/>
+              </a:lnSpc>
+            </a:pPr>
+            <a:r>
+              <a:rPr sz="1000" b="0" dirty="0">
+                <a:solidFill>
+                  <a:srgbClr val="232830"/>
+                </a:solidFill>
+                <a:latin typeface="맑은 고딕" panose="020B0503020000020004" pitchFamily="50" charset="-127"/>
+                <a:ea typeface="맑은 고딕" panose="020B0503020000020004" pitchFamily="50" charset="-127"/>
+              </a:rPr>
+              <a:t>4.</a:t>
+            </a:r>
+            <a:r>
+              <a:rPr lang="en-US" sz="1000" b="0" dirty="0">
+                <a:solidFill>
+                  <a:srgbClr val="232830"/>
+                </a:solidFill>
+                <a:latin typeface="맑은 고딕" panose="020B0503020000020004" pitchFamily="50" charset="-127"/>
+                <a:ea typeface="맑은 고딕" panose="020B0503020000020004" pitchFamily="50" charset="-127"/>
+              </a:rPr>
+              <a:t>5</a:t>
+            </a:r>
+            <a:r>
+              <a:rPr sz="1000" b="0" dirty="0">
+                <a:solidFill>
+                  <a:srgbClr val="232830"/>
+                </a:solidFill>
+                <a:latin typeface="맑은 고딕" panose="020B0503020000020004" pitchFamily="50" charset="-127"/>
+                <a:ea typeface="맑은 고딕" panose="020B0503020000020004" pitchFamily="50" charset="-127"/>
+              </a:rPr>
+              <a:t> </a:t>
+            </a:r>
+            <a:r>
+              <a:rPr sz="1000" b="0" dirty="0" err="1">
+                <a:solidFill>
+                  <a:srgbClr val="232830"/>
+                </a:solidFill>
+                <a:latin typeface="맑은 고딕" panose="020B0503020000020004" pitchFamily="50" charset="-127"/>
+                <a:ea typeface="맑은 고딕" panose="020B0503020000020004" pitchFamily="50" charset="-127"/>
+              </a:rPr>
+              <a:t>한계</a:t>
+            </a:r>
+            <a:r>
+              <a:rPr sz="1000" b="0" dirty="0">
+                <a:solidFill>
+                  <a:srgbClr val="232830"/>
+                </a:solidFill>
+                <a:latin typeface="맑은 고딕" panose="020B0503020000020004" pitchFamily="50" charset="-127"/>
+                <a:ea typeface="맑은 고딕" panose="020B0503020000020004" pitchFamily="50" charset="-127"/>
+              </a:rPr>
+              <a:t>/</a:t>
+            </a:r>
+            <a:r>
+              <a:rPr sz="1000" b="0" dirty="0" err="1">
+                <a:solidFill>
+                  <a:srgbClr val="232830"/>
+                </a:solidFill>
+                <a:latin typeface="맑은 고딕" panose="020B0503020000020004" pitchFamily="50" charset="-127"/>
+                <a:ea typeface="맑은 고딕" panose="020B0503020000020004" pitchFamily="50" charset="-127"/>
+              </a:rPr>
+              <a:t>강제</a:t>
+            </a:r>
+            <a:r>
+              <a:rPr lang="en-US" sz="1000" b="0" dirty="0">
+                <a:solidFill>
+                  <a:srgbClr val="232830"/>
+                </a:solidFill>
+                <a:latin typeface="맑은 고딕" panose="020B0503020000020004" pitchFamily="50" charset="-127"/>
+                <a:ea typeface="맑은 고딕" panose="020B0503020000020004" pitchFamily="50" charset="-127"/>
+              </a:rPr>
+              <a:t>/</a:t>
+            </a:r>
+            <a:r>
+              <a:rPr lang="ko-KR" altLang="en-US" sz="1000" b="0" dirty="0">
+                <a:solidFill>
+                  <a:srgbClr val="232830"/>
+                </a:solidFill>
+                <a:latin typeface="맑은 고딕" panose="020B0503020000020004" pitchFamily="50" charset="-127"/>
+                <a:ea typeface="맑은 고딕" panose="020B0503020000020004" pitchFamily="50" charset="-127"/>
+              </a:rPr>
+              <a:t>비상</a:t>
+            </a:r>
+            <a:r>
+              <a:rPr sz="1000" b="0" dirty="0">
+                <a:solidFill>
+                  <a:srgbClr val="232830"/>
+                </a:solidFill>
+                <a:latin typeface="맑은 고딕" panose="020B0503020000020004" pitchFamily="50" charset="-127"/>
+                <a:ea typeface="맑은 고딕" panose="020B0503020000020004" pitchFamily="50" charset="-127"/>
+              </a:rPr>
+              <a:t> </a:t>
+            </a:r>
+            <a:r>
+              <a:rPr sz="1000" b="0" dirty="0" err="1">
+                <a:solidFill>
+                  <a:srgbClr val="232830"/>
+                </a:solidFill>
+                <a:latin typeface="맑은 고딕" panose="020B0503020000020004" pitchFamily="50" charset="-127"/>
+                <a:ea typeface="맑은 고딕" panose="020B0503020000020004" pitchFamily="50" charset="-127"/>
+              </a:rPr>
+              <a:t>호흡</a:t>
+            </a:r>
+            <a:endParaRPr sz="1000" b="0" dirty="0">
+              <a:solidFill>
+                <a:srgbClr val="232830"/>
+              </a:solidFill>
+              <a:latin typeface="맑은 고딕" panose="020B0503020000020004" pitchFamily="50" charset="-127"/>
+              <a:ea typeface="맑은 고딕" panose="020B0503020000020004" pitchFamily="50" charset="-127"/>
+            </a:endParaRPr>
+          </a:p>
+        </p:txBody>
+      </p:sp>
+      <p:sp>
+        <p:nvSpPr>
+          <p:cNvPr id="41" name="TextBox 40">
+            <a:extLst>
+              <a:ext uri="{FF2B5EF4-FFF2-40B4-BE49-F238E27FC236}">
+                <a16:creationId xmlns:a16="http://schemas.microsoft.com/office/drawing/2014/main" id="{5CFA0ED6-68EC-4ED3-89B5-35B77F9078C1}"/>
+              </a:ext>
+            </a:extLst>
+          </p:cNvPr>
+          <p:cNvSpPr txBox="1"/>
+          <p:nvPr/>
+        </p:nvSpPr>
+        <p:spPr>
+          <a:xfrm>
+            <a:off x="5573267" y="3384083"/>
+            <a:ext cx="1735074" cy="210312"/>
+          </a:xfrm>
+          <a:prstGeom prst="rect">
+            <a:avLst/>
+          </a:prstGeom>
+          <a:noFill/>
+        </p:spPr>
+        <p:txBody>
+          <a:bodyPr wrap="square" lIns="18288" tIns="18288" rIns="18288" bIns="18288" anchor="ctr">
+            <a:noAutofit/>
+          </a:bodyPr>
+          <a:lstStyle/>
+          <a:p>
+            <a:pPr>
+              <a:lnSpc>
+                <a:spcPct val="150000"/>
+              </a:lnSpc>
+            </a:pPr>
+            <a:r>
+              <a:rPr lang="en-US" sz="1000" b="0" dirty="0">
+                <a:solidFill>
+                  <a:srgbClr val="232830"/>
+                </a:solidFill>
+                <a:latin typeface="맑은 고딕" panose="020B0503020000020004" pitchFamily="50" charset="-127"/>
+                <a:ea typeface="맑은 고딕" panose="020B0503020000020004" pitchFamily="50" charset="-127"/>
+              </a:rPr>
+              <a:t>5.3 </a:t>
+            </a:r>
+            <a:r>
+              <a:rPr lang="ko-KR" altLang="en-US" sz="1000" dirty="0">
+                <a:solidFill>
+                  <a:srgbClr val="232830"/>
+                </a:solidFill>
+                <a:latin typeface="맑은 고딕" panose="020B0503020000020004" pitchFamily="50" charset="-127"/>
+                <a:ea typeface="맑은 고딕" panose="020B0503020000020004" pitchFamily="50" charset="-127"/>
+              </a:rPr>
+              <a:t>소음 판정</a:t>
+            </a:r>
+            <a:endParaRPr sz="1000" b="0" dirty="0">
+              <a:solidFill>
+                <a:srgbClr val="232830"/>
+              </a:solidFill>
+              <a:latin typeface="맑은 고딕" panose="020B0503020000020004" pitchFamily="50" charset="-127"/>
+              <a:ea typeface="맑은 고딕" panose="020B0503020000020004" pitchFamily="50" charset="-127"/>
+            </a:endParaRPr>
+          </a:p>
+        </p:txBody>
+      </p:sp>
+      <p:sp>
+        <p:nvSpPr>
+          <p:cNvPr id="42" name="TextBox 41">
+            <a:extLst>
+              <a:ext uri="{FF2B5EF4-FFF2-40B4-BE49-F238E27FC236}">
+                <a16:creationId xmlns:a16="http://schemas.microsoft.com/office/drawing/2014/main" id="{20398768-67ED-4882-BADC-79CCD9B2A5E9}"/>
+              </a:ext>
+            </a:extLst>
+          </p:cNvPr>
+          <p:cNvSpPr txBox="1"/>
+          <p:nvPr/>
+        </p:nvSpPr>
+        <p:spPr>
+          <a:xfrm>
+            <a:off x="5573267" y="3637118"/>
+            <a:ext cx="1735074" cy="210312"/>
+          </a:xfrm>
+          <a:prstGeom prst="rect">
+            <a:avLst/>
+          </a:prstGeom>
+          <a:noFill/>
+        </p:spPr>
+        <p:txBody>
+          <a:bodyPr wrap="square" lIns="18288" tIns="18288" rIns="18288" bIns="18288" anchor="ctr">
+            <a:noAutofit/>
+          </a:bodyPr>
+          <a:lstStyle/>
+          <a:p>
+            <a:pPr>
+              <a:lnSpc>
+                <a:spcPct val="150000"/>
+              </a:lnSpc>
+            </a:pPr>
+            <a:r>
+              <a:rPr lang="en-US" sz="1000" b="0" dirty="0">
+                <a:solidFill>
+                  <a:srgbClr val="232830"/>
+                </a:solidFill>
+                <a:latin typeface="맑은 고딕" panose="020B0503020000020004" pitchFamily="50" charset="-127"/>
+                <a:ea typeface="맑은 고딕" panose="020B0503020000020004" pitchFamily="50" charset="-127"/>
+              </a:rPr>
+              <a:t>5.4 </a:t>
+            </a:r>
+            <a:r>
+              <a:rPr lang="ko-KR" altLang="en-US" sz="1000" b="0" dirty="0">
+                <a:solidFill>
+                  <a:srgbClr val="232830"/>
+                </a:solidFill>
+                <a:latin typeface="맑은 고딕" panose="020B0503020000020004" pitchFamily="50" charset="-127"/>
+                <a:ea typeface="맑은 고딕" panose="020B0503020000020004" pitchFamily="50" charset="-127"/>
+              </a:rPr>
+              <a:t>안전 들숨 한계</a:t>
+            </a:r>
+            <a:endParaRPr sz="1000" b="0" dirty="0">
+              <a:solidFill>
+                <a:srgbClr val="232830"/>
+              </a:solidFill>
+              <a:latin typeface="맑은 고딕" panose="020B0503020000020004" pitchFamily="50" charset="-127"/>
+              <a:ea typeface="맑은 고딕" panose="020B0503020000020004" pitchFamily="50" charset="-127"/>
+            </a:endParaRPr>
+          </a:p>
+        </p:txBody>
+      </p:sp>
+      <p:sp>
+        <p:nvSpPr>
+          <p:cNvPr id="43" name="TextBox 42">
+            <a:extLst>
+              <a:ext uri="{FF2B5EF4-FFF2-40B4-BE49-F238E27FC236}">
+                <a16:creationId xmlns:a16="http://schemas.microsoft.com/office/drawing/2014/main" id="{719246A3-DBA9-4A71-BFED-DF267BDED072}"/>
+              </a:ext>
+            </a:extLst>
+          </p:cNvPr>
+          <p:cNvSpPr txBox="1"/>
+          <p:nvPr/>
+        </p:nvSpPr>
+        <p:spPr>
+          <a:xfrm>
+            <a:off x="1716855" y="4833038"/>
+            <a:ext cx="1735074" cy="210312"/>
+          </a:xfrm>
+          <a:prstGeom prst="rect">
+            <a:avLst/>
+          </a:prstGeom>
+          <a:noFill/>
+        </p:spPr>
+        <p:txBody>
+          <a:bodyPr wrap="square" lIns="18288" tIns="18288" rIns="18288" bIns="18288" anchor="ctr">
+            <a:noAutofit/>
+          </a:bodyPr>
+          <a:lstStyle/>
+          <a:p>
+            <a:pPr>
+              <a:lnSpc>
+                <a:spcPct val="150000"/>
+              </a:lnSpc>
+            </a:pPr>
+            <a:r>
+              <a:rPr lang="en-US" sz="1000" b="0" dirty="0">
+                <a:solidFill>
+                  <a:srgbClr val="232830"/>
+                </a:solidFill>
+                <a:latin typeface="맑은 고딕" panose="020B0503020000020004" pitchFamily="50" charset="-127"/>
+                <a:ea typeface="맑은 고딕" panose="020B0503020000020004" pitchFamily="50" charset="-127"/>
+              </a:rPr>
+              <a:t>3.3 </a:t>
+            </a:r>
+            <a:r>
+              <a:rPr lang="ko-KR" altLang="en-US" sz="1000" b="0" dirty="0">
+                <a:solidFill>
+                  <a:srgbClr val="232830"/>
+                </a:solidFill>
+                <a:latin typeface="맑은 고딕" panose="020B0503020000020004" pitchFamily="50" charset="-127"/>
+                <a:ea typeface="맑은 고딕" panose="020B0503020000020004" pitchFamily="50" charset="-127"/>
+              </a:rPr>
+              <a:t>호흡 부채</a:t>
+            </a:r>
+            <a:endParaRPr sz="1000" b="0" dirty="0">
+              <a:solidFill>
+                <a:srgbClr val="232830"/>
+              </a:solidFill>
+              <a:latin typeface="맑은 고딕" panose="020B0503020000020004" pitchFamily="50" charset="-127"/>
+              <a:ea typeface="맑은 고딕" panose="020B0503020000020004" pitchFamily="50" charset="-127"/>
+            </a:endParaRPr>
+          </a:p>
+        </p:txBody>
+      </p:sp>
+      <p:sp>
+        <p:nvSpPr>
+          <p:cNvPr id="44" name="TextBox 43">
+            <a:extLst>
+              <a:ext uri="{FF2B5EF4-FFF2-40B4-BE49-F238E27FC236}">
+                <a16:creationId xmlns:a16="http://schemas.microsoft.com/office/drawing/2014/main" id="{A1F5C7C6-5EFA-4A28-9CE8-689B8DDA3F56}"/>
+              </a:ext>
+            </a:extLst>
+          </p:cNvPr>
+          <p:cNvSpPr txBox="1"/>
+          <p:nvPr/>
+        </p:nvSpPr>
+        <p:spPr>
+          <a:xfrm>
+            <a:off x="1716856" y="5090594"/>
+            <a:ext cx="1735074" cy="210312"/>
+          </a:xfrm>
+          <a:prstGeom prst="rect">
+            <a:avLst/>
+          </a:prstGeom>
+          <a:noFill/>
+        </p:spPr>
+        <p:txBody>
+          <a:bodyPr wrap="square" lIns="18288" tIns="18288" rIns="18288" bIns="18288" anchor="ctr">
+            <a:noAutofit/>
+          </a:bodyPr>
+          <a:lstStyle/>
+          <a:p>
+            <a:pPr>
+              <a:lnSpc>
+                <a:spcPct val="150000"/>
+              </a:lnSpc>
+            </a:pPr>
+            <a:r>
+              <a:rPr lang="en-US" sz="1000" b="0" dirty="0">
+                <a:solidFill>
+                  <a:srgbClr val="232830"/>
+                </a:solidFill>
+                <a:latin typeface="맑은 고딕" panose="020B0503020000020004" pitchFamily="50" charset="-127"/>
+                <a:ea typeface="맑은 고딕" panose="020B0503020000020004" pitchFamily="50" charset="-127"/>
+              </a:rPr>
+              <a:t>3.4 </a:t>
+            </a:r>
+            <a:r>
+              <a:rPr lang="ko-KR" altLang="en-US" sz="1000" b="0" dirty="0">
+                <a:solidFill>
+                  <a:srgbClr val="232830"/>
+                </a:solidFill>
+                <a:latin typeface="맑은 고딕" panose="020B0503020000020004" pitchFamily="50" charset="-127"/>
+                <a:ea typeface="맑은 고딕" panose="020B0503020000020004" pitchFamily="50" charset="-127"/>
+              </a:rPr>
+              <a:t>소음 데이터</a:t>
+            </a:r>
+            <a:endParaRPr sz="1000" b="0" dirty="0">
+              <a:solidFill>
+                <a:srgbClr val="232830"/>
+              </a:solidFill>
+              <a:latin typeface="맑은 고딕" panose="020B0503020000020004" pitchFamily="50" charset="-127"/>
+              <a:ea typeface="맑은 고딕" panose="020B0503020000020004" pitchFamily="50" charset="-127"/>
+            </a:endParaRPr>
+          </a:p>
+        </p:txBody>
+      </p:sp>
+      <p:sp>
+        <p:nvSpPr>
+          <p:cNvPr id="46" name="TextBox 45">
+            <a:extLst>
+              <a:ext uri="{FF2B5EF4-FFF2-40B4-BE49-F238E27FC236}">
+                <a16:creationId xmlns:a16="http://schemas.microsoft.com/office/drawing/2014/main" id="{7EFF56CD-51E6-4B47-81C4-026A7F2733F4}"/>
+              </a:ext>
+            </a:extLst>
+          </p:cNvPr>
+          <p:cNvSpPr txBox="1"/>
+          <p:nvPr/>
+        </p:nvSpPr>
+        <p:spPr>
+          <a:xfrm>
+            <a:off x="5573268" y="4833483"/>
+            <a:ext cx="1735074" cy="210312"/>
+          </a:xfrm>
+          <a:prstGeom prst="rect">
+            <a:avLst/>
+          </a:prstGeom>
+          <a:noFill/>
+        </p:spPr>
+        <p:txBody>
+          <a:bodyPr wrap="square" lIns="18288" tIns="18288" rIns="18288" bIns="18288" anchor="ctr">
+            <a:noAutofit/>
+          </a:bodyPr>
+          <a:lstStyle/>
+          <a:p>
+            <a:pPr>
+              <a:lnSpc>
+                <a:spcPct val="150000"/>
+              </a:lnSpc>
+            </a:pPr>
+            <a:r>
+              <a:rPr lang="en-US" sz="1000" b="0" dirty="0">
+                <a:solidFill>
+                  <a:srgbClr val="232830"/>
+                </a:solidFill>
+                <a:latin typeface="맑은 고딕" panose="020B0503020000020004" pitchFamily="50" charset="-127"/>
+                <a:ea typeface="맑은 고딕" panose="020B0503020000020004" pitchFamily="50" charset="-127"/>
+              </a:rPr>
+              <a:t>6.3 </a:t>
+            </a:r>
+            <a:r>
+              <a:rPr lang="ko-KR" altLang="en-US" sz="1000" b="0" dirty="0">
+                <a:solidFill>
+                  <a:srgbClr val="232830"/>
+                </a:solidFill>
+                <a:latin typeface="맑은 고딕" panose="020B0503020000020004" pitchFamily="50" charset="-127"/>
+                <a:ea typeface="맑은 고딕" panose="020B0503020000020004" pitchFamily="50" charset="-127"/>
+              </a:rPr>
+              <a:t>의심</a:t>
+            </a:r>
+            <a:r>
+              <a:rPr lang="en-US" altLang="ko-KR" sz="1000" b="0" dirty="0">
+                <a:solidFill>
+                  <a:srgbClr val="232830"/>
+                </a:solidFill>
+                <a:latin typeface="맑은 고딕" panose="020B0503020000020004" pitchFamily="50" charset="-127"/>
+                <a:ea typeface="맑은 고딕" panose="020B0503020000020004" pitchFamily="50" charset="-127"/>
+              </a:rPr>
+              <a:t>/</a:t>
+            </a:r>
+            <a:r>
+              <a:rPr lang="ko-KR" altLang="en-US" sz="1000" b="0" dirty="0">
+                <a:solidFill>
+                  <a:srgbClr val="232830"/>
+                </a:solidFill>
+                <a:latin typeface="맑은 고딕" panose="020B0503020000020004" pitchFamily="50" charset="-127"/>
+                <a:ea typeface="맑은 고딕" panose="020B0503020000020004" pitchFamily="50" charset="-127"/>
+              </a:rPr>
+              <a:t>조사</a:t>
+            </a:r>
+            <a:r>
+              <a:rPr lang="en-US" altLang="ko-KR" sz="1000" b="0" dirty="0">
+                <a:solidFill>
+                  <a:srgbClr val="232830"/>
+                </a:solidFill>
+                <a:latin typeface="맑은 고딕" panose="020B0503020000020004" pitchFamily="50" charset="-127"/>
+                <a:ea typeface="맑은 고딕" panose="020B0503020000020004" pitchFamily="50" charset="-127"/>
+              </a:rPr>
+              <a:t>/</a:t>
+            </a:r>
+            <a:r>
+              <a:rPr lang="ko-KR" altLang="en-US" sz="1000" b="0" dirty="0">
+                <a:solidFill>
+                  <a:srgbClr val="232830"/>
+                </a:solidFill>
+                <a:latin typeface="맑은 고딕" panose="020B0503020000020004" pitchFamily="50" charset="-127"/>
+                <a:ea typeface="맑은 고딕" panose="020B0503020000020004" pitchFamily="50" charset="-127"/>
+              </a:rPr>
+              <a:t>복귀</a:t>
+            </a:r>
+            <a:endParaRPr sz="1000" b="0" dirty="0">
+              <a:solidFill>
+                <a:srgbClr val="232830"/>
+              </a:solidFill>
+              <a:latin typeface="맑은 고딕" panose="020B0503020000020004" pitchFamily="50" charset="-127"/>
+              <a:ea typeface="맑은 고딕" panose="020B0503020000020004" pitchFamily="50" charset="-127"/>
+            </a:endParaRPr>
+          </a:p>
+        </p:txBody>
+      </p:sp>
+      <p:sp>
+        <p:nvSpPr>
+          <p:cNvPr id="47" name="TextBox 46">
+            <a:extLst>
+              <a:ext uri="{FF2B5EF4-FFF2-40B4-BE49-F238E27FC236}">
+                <a16:creationId xmlns:a16="http://schemas.microsoft.com/office/drawing/2014/main" id="{C243B258-7FAA-4936-A8E8-23B2565F13FD}"/>
+              </a:ext>
+            </a:extLst>
+          </p:cNvPr>
+          <p:cNvSpPr txBox="1"/>
+          <p:nvPr/>
+        </p:nvSpPr>
+        <p:spPr>
+          <a:xfrm>
+            <a:off x="5573268" y="5089515"/>
+            <a:ext cx="1735074" cy="210312"/>
+          </a:xfrm>
+          <a:prstGeom prst="rect">
+            <a:avLst/>
+          </a:prstGeom>
+          <a:noFill/>
+        </p:spPr>
+        <p:txBody>
+          <a:bodyPr wrap="square" lIns="18288" tIns="18288" rIns="18288" bIns="18288" anchor="ctr">
+            <a:noAutofit/>
+          </a:bodyPr>
+          <a:lstStyle/>
+          <a:p>
+            <a:pPr>
+              <a:lnSpc>
+                <a:spcPct val="150000"/>
+              </a:lnSpc>
+            </a:pPr>
+            <a:r>
+              <a:rPr lang="en-US" sz="1000" b="0" dirty="0">
+                <a:solidFill>
+                  <a:srgbClr val="232830"/>
+                </a:solidFill>
+                <a:latin typeface="맑은 고딕" panose="020B0503020000020004" pitchFamily="50" charset="-127"/>
+                <a:ea typeface="맑은 고딕" panose="020B0503020000020004" pitchFamily="50" charset="-127"/>
+              </a:rPr>
+              <a:t>6.4 </a:t>
+            </a:r>
+            <a:r>
+              <a:rPr lang="ko-KR" altLang="en-US" sz="1000" b="0" dirty="0" err="1">
+                <a:solidFill>
+                  <a:srgbClr val="232830"/>
+                </a:solidFill>
+                <a:latin typeface="맑은 고딕" panose="020B0503020000020004" pitchFamily="50" charset="-127"/>
+                <a:ea typeface="맑은 고딕" panose="020B0503020000020004" pitchFamily="50" charset="-127"/>
+              </a:rPr>
+              <a:t>타입별</a:t>
+            </a:r>
+            <a:r>
+              <a:rPr lang="ko-KR" altLang="en-US" sz="1000" b="0" dirty="0">
+                <a:solidFill>
+                  <a:srgbClr val="232830"/>
+                </a:solidFill>
+                <a:latin typeface="맑은 고딕" panose="020B0503020000020004" pitchFamily="50" charset="-127"/>
+                <a:ea typeface="맑은 고딕" panose="020B0503020000020004" pitchFamily="50" charset="-127"/>
+              </a:rPr>
+              <a:t> 감지 차이</a:t>
+            </a:r>
+            <a:endParaRPr sz="1000" b="0" dirty="0">
+              <a:solidFill>
+                <a:srgbClr val="232830"/>
+              </a:solidFill>
+              <a:latin typeface="맑은 고딕" panose="020B0503020000020004" pitchFamily="50" charset="-127"/>
+              <a:ea typeface="맑은 고딕" panose="020B0503020000020004" pitchFamily="50" charset="-127"/>
+            </a:endParaRPr>
+          </a:p>
+        </p:txBody>
+      </p:sp>
+      <p:sp>
+        <p:nvSpPr>
+          <p:cNvPr id="48" name="TextBox 47">
+            <a:extLst>
+              <a:ext uri="{FF2B5EF4-FFF2-40B4-BE49-F238E27FC236}">
+                <a16:creationId xmlns:a16="http://schemas.microsoft.com/office/drawing/2014/main" id="{7961BDC6-D2B5-4BA5-9247-656A8A165BED}"/>
+              </a:ext>
+            </a:extLst>
+          </p:cNvPr>
+          <p:cNvSpPr txBox="1"/>
+          <p:nvPr/>
+        </p:nvSpPr>
+        <p:spPr>
+          <a:xfrm>
+            <a:off x="8941239" y="1658739"/>
+            <a:ext cx="1735074" cy="210312"/>
+          </a:xfrm>
+          <a:prstGeom prst="rect">
+            <a:avLst/>
+          </a:prstGeom>
+          <a:noFill/>
+        </p:spPr>
+        <p:txBody>
+          <a:bodyPr wrap="square" lIns="18288" tIns="18288" rIns="18288" bIns="18288" anchor="ctr">
+            <a:noAutofit/>
+          </a:bodyPr>
+          <a:lstStyle/>
+          <a:p>
+            <a:pPr>
+              <a:lnSpc>
+                <a:spcPct val="150000"/>
+              </a:lnSpc>
+            </a:pPr>
+            <a:r>
+              <a:rPr sz="1000" b="0" dirty="0">
+                <a:solidFill>
+                  <a:srgbClr val="232830"/>
+                </a:solidFill>
+                <a:latin typeface="맑은 고딕" panose="020B0503020000020004" pitchFamily="50" charset="-127"/>
+                <a:ea typeface="맑은 고딕" panose="020B0503020000020004" pitchFamily="50" charset="-127"/>
+              </a:rPr>
+              <a:t>7.</a:t>
+            </a:r>
+            <a:r>
+              <a:rPr lang="en-US" sz="1000" b="0" dirty="0">
+                <a:solidFill>
+                  <a:srgbClr val="232830"/>
+                </a:solidFill>
+                <a:latin typeface="맑은 고딕" panose="020B0503020000020004" pitchFamily="50" charset="-127"/>
+                <a:ea typeface="맑은 고딕" panose="020B0503020000020004" pitchFamily="50" charset="-127"/>
+              </a:rPr>
+              <a:t>3</a:t>
+            </a:r>
+            <a:r>
+              <a:rPr sz="1000" b="0" dirty="0">
+                <a:solidFill>
+                  <a:srgbClr val="232830"/>
+                </a:solidFill>
+                <a:latin typeface="맑은 고딕" panose="020B0503020000020004" pitchFamily="50" charset="-127"/>
+                <a:ea typeface="맑은 고딕" panose="020B0503020000020004" pitchFamily="50" charset="-127"/>
+              </a:rPr>
+              <a:t> </a:t>
+            </a:r>
+            <a:r>
+              <a:rPr sz="1000" b="0" dirty="0" err="1">
+                <a:solidFill>
+                  <a:srgbClr val="232830"/>
+                </a:solidFill>
+                <a:latin typeface="맑은 고딕" panose="020B0503020000020004" pitchFamily="50" charset="-127"/>
+                <a:ea typeface="맑은 고딕" panose="020B0503020000020004" pitchFamily="50" charset="-127"/>
+              </a:rPr>
+              <a:t>호흡</a:t>
+            </a:r>
+            <a:r>
+              <a:rPr sz="1000" b="0" dirty="0">
+                <a:solidFill>
+                  <a:srgbClr val="232830"/>
+                </a:solidFill>
+                <a:latin typeface="맑은 고딕" panose="020B0503020000020004" pitchFamily="50" charset="-127"/>
+                <a:ea typeface="맑은 고딕" panose="020B0503020000020004" pitchFamily="50" charset="-127"/>
+              </a:rPr>
+              <a:t> </a:t>
+            </a:r>
+            <a:r>
+              <a:rPr sz="1000" b="0" dirty="0" err="1">
+                <a:solidFill>
+                  <a:srgbClr val="232830"/>
+                </a:solidFill>
+                <a:latin typeface="맑은 고딕" panose="020B0503020000020004" pitchFamily="50" charset="-127"/>
+                <a:ea typeface="맑은 고딕" panose="020B0503020000020004" pitchFamily="50" charset="-127"/>
+              </a:rPr>
+              <a:t>기술</a:t>
+            </a:r>
+            <a:r>
+              <a:rPr sz="1000" b="0" dirty="0">
+                <a:solidFill>
+                  <a:srgbClr val="232830"/>
+                </a:solidFill>
+                <a:latin typeface="맑은 고딕" panose="020B0503020000020004" pitchFamily="50" charset="-127"/>
+                <a:ea typeface="맑은 고딕" panose="020B0503020000020004" pitchFamily="50" charset="-127"/>
+              </a:rPr>
+              <a:t> </a:t>
+            </a:r>
+            <a:r>
+              <a:rPr sz="1000" b="0" dirty="0" err="1">
+                <a:solidFill>
+                  <a:srgbClr val="232830"/>
+                </a:solidFill>
+                <a:latin typeface="맑은 고딕" panose="020B0503020000020004" pitchFamily="50" charset="-127"/>
+                <a:ea typeface="맑은 고딕" panose="020B0503020000020004" pitchFamily="50" charset="-127"/>
+              </a:rPr>
+              <a:t>확장</a:t>
+            </a:r>
+            <a:endParaRPr sz="1000" b="0" dirty="0">
+              <a:solidFill>
+                <a:srgbClr val="232830"/>
+              </a:solidFill>
+              <a:latin typeface="맑은 고딕" panose="020B0503020000020004" pitchFamily="50" charset="-127"/>
+              <a:ea typeface="맑은 고딕" panose="020B0503020000020004" pitchFamily="50" charset="-127"/>
+            </a:endParaRPr>
+          </a:p>
+        </p:txBody>
+      </p:sp>
+      <p:sp>
+        <p:nvSpPr>
+          <p:cNvPr id="49" name="TextBox 48">
+            <a:extLst>
+              <a:ext uri="{FF2B5EF4-FFF2-40B4-BE49-F238E27FC236}">
+                <a16:creationId xmlns:a16="http://schemas.microsoft.com/office/drawing/2014/main" id="{1FE1E44D-E33E-40D2-9B79-C02652440995}"/>
+              </a:ext>
+            </a:extLst>
+          </p:cNvPr>
+          <p:cNvSpPr txBox="1"/>
+          <p:nvPr/>
+        </p:nvSpPr>
+        <p:spPr>
+          <a:xfrm>
+            <a:off x="8941239" y="1928650"/>
+            <a:ext cx="2107062" cy="210312"/>
+          </a:xfrm>
+          <a:prstGeom prst="rect">
+            <a:avLst/>
+          </a:prstGeom>
+          <a:noFill/>
+        </p:spPr>
+        <p:txBody>
+          <a:bodyPr wrap="square" lIns="18288" tIns="18288" rIns="18288" bIns="18288" anchor="ctr">
+            <a:noAutofit/>
+          </a:bodyPr>
+          <a:lstStyle/>
+          <a:p>
+            <a:pPr>
+              <a:lnSpc>
+                <a:spcPct val="150000"/>
+              </a:lnSpc>
+            </a:pPr>
+            <a:r>
+              <a:rPr lang="en-US" sz="1000" b="0" dirty="0">
+                <a:solidFill>
+                  <a:srgbClr val="232830"/>
+                </a:solidFill>
+                <a:latin typeface="맑은 고딕" panose="020B0503020000020004" pitchFamily="50" charset="-127"/>
+                <a:ea typeface="맑은 고딕" panose="020B0503020000020004" pitchFamily="50" charset="-127"/>
+              </a:rPr>
+              <a:t>7.4 </a:t>
+            </a:r>
+            <a:r>
+              <a:rPr lang="ko-KR" altLang="en-US" sz="1000" b="0" dirty="0">
+                <a:solidFill>
+                  <a:srgbClr val="232830"/>
+                </a:solidFill>
+                <a:latin typeface="맑은 고딕" panose="020B0503020000020004" pitchFamily="50" charset="-127"/>
+                <a:ea typeface="맑은 고딕" panose="020B0503020000020004" pitchFamily="50" charset="-127"/>
+              </a:rPr>
+              <a:t>들이마시기</a:t>
+            </a:r>
+            <a:r>
+              <a:rPr lang="en-US" altLang="ko-KR" sz="1000" b="0" dirty="0">
+                <a:solidFill>
+                  <a:srgbClr val="232830"/>
+                </a:solidFill>
+                <a:latin typeface="맑은 고딕" panose="020B0503020000020004" pitchFamily="50" charset="-127"/>
+                <a:ea typeface="맑은 고딕" panose="020B0503020000020004" pitchFamily="50" charset="-127"/>
+              </a:rPr>
+              <a:t>/</a:t>
+            </a:r>
+            <a:r>
+              <a:rPr lang="ko-KR" altLang="en-US" sz="1000" b="0" dirty="0">
+                <a:solidFill>
+                  <a:srgbClr val="232830"/>
+                </a:solidFill>
+                <a:latin typeface="맑은 고딕" panose="020B0503020000020004" pitchFamily="50" charset="-127"/>
+                <a:ea typeface="맑은 고딕" panose="020B0503020000020004" pitchFamily="50" charset="-127"/>
+              </a:rPr>
+              <a:t>내쉬기 계열 능력</a:t>
+            </a:r>
+            <a:endParaRPr sz="1000" b="0" dirty="0">
+              <a:solidFill>
+                <a:srgbClr val="232830"/>
+              </a:solidFill>
+              <a:latin typeface="맑은 고딕" panose="020B0503020000020004" pitchFamily="50" charset="-127"/>
+              <a:ea typeface="맑은 고딕" panose="020B0503020000020004" pitchFamily="50" charset="-127"/>
+            </a:endParaRPr>
+          </a:p>
+        </p:txBody>
+      </p:sp>
+      <p:sp>
+        <p:nvSpPr>
+          <p:cNvPr id="50" name="TextBox 49">
+            <a:extLst>
+              <a:ext uri="{FF2B5EF4-FFF2-40B4-BE49-F238E27FC236}">
+                <a16:creationId xmlns:a16="http://schemas.microsoft.com/office/drawing/2014/main" id="{000CA8F3-F27E-424C-A9F1-2ACF438045A7}"/>
+              </a:ext>
+            </a:extLst>
+          </p:cNvPr>
+          <p:cNvSpPr txBox="1"/>
+          <p:nvPr/>
+        </p:nvSpPr>
+        <p:spPr>
+          <a:xfrm>
+            <a:off x="8941239" y="2189880"/>
+            <a:ext cx="1735074" cy="210312"/>
+          </a:xfrm>
+          <a:prstGeom prst="rect">
+            <a:avLst/>
+          </a:prstGeom>
+          <a:noFill/>
+        </p:spPr>
+        <p:txBody>
+          <a:bodyPr wrap="square" lIns="18288" tIns="18288" rIns="18288" bIns="18288" anchor="ctr">
+            <a:noAutofit/>
+          </a:bodyPr>
+          <a:lstStyle/>
+          <a:p>
+            <a:pPr>
+              <a:lnSpc>
+                <a:spcPct val="150000"/>
+              </a:lnSpc>
+            </a:pPr>
+            <a:r>
+              <a:rPr lang="en-US" sz="1000" b="0" dirty="0">
+                <a:solidFill>
+                  <a:srgbClr val="232830"/>
+                </a:solidFill>
+                <a:latin typeface="맑은 고딕" panose="020B0503020000020004" pitchFamily="50" charset="-127"/>
+                <a:ea typeface="맑은 고딕" panose="020B0503020000020004" pitchFamily="50" charset="-127"/>
+              </a:rPr>
+              <a:t>7.5 </a:t>
+            </a:r>
+            <a:r>
+              <a:rPr lang="ko-KR" altLang="en-US" sz="1000" b="0" dirty="0">
+                <a:solidFill>
+                  <a:srgbClr val="232830"/>
+                </a:solidFill>
+                <a:latin typeface="맑은 고딕" panose="020B0503020000020004" pitchFamily="50" charset="-127"/>
+                <a:ea typeface="맑은 고딕" panose="020B0503020000020004" pitchFamily="50" charset="-127"/>
+              </a:rPr>
+              <a:t>숨 참기 계열 능력</a:t>
+            </a:r>
+            <a:endParaRPr sz="1000" b="0" dirty="0">
+              <a:solidFill>
+                <a:srgbClr val="232830"/>
+              </a:solidFill>
+              <a:latin typeface="맑은 고딕" panose="020B0503020000020004" pitchFamily="50" charset="-127"/>
+              <a:ea typeface="맑은 고딕" panose="020B0503020000020004" pitchFamily="50" charset="-127"/>
+            </a:endParaRPr>
+          </a:p>
+        </p:txBody>
+      </p:sp>
+      <p:sp>
+        <p:nvSpPr>
+          <p:cNvPr id="51" name="TextBox 50">
+            <a:extLst>
+              <a:ext uri="{FF2B5EF4-FFF2-40B4-BE49-F238E27FC236}">
+                <a16:creationId xmlns:a16="http://schemas.microsoft.com/office/drawing/2014/main" id="{C9E14BA7-7042-4F15-8901-7471B85D3354}"/>
+              </a:ext>
+            </a:extLst>
+          </p:cNvPr>
+          <p:cNvSpPr txBox="1"/>
+          <p:nvPr/>
+        </p:nvSpPr>
+        <p:spPr>
+          <a:xfrm>
+            <a:off x="8941239" y="3375679"/>
+            <a:ext cx="1735074" cy="210312"/>
+          </a:xfrm>
+          <a:prstGeom prst="rect">
+            <a:avLst/>
+          </a:prstGeom>
+          <a:noFill/>
+        </p:spPr>
+        <p:txBody>
+          <a:bodyPr wrap="square" lIns="18288" tIns="18288" rIns="18288" bIns="18288" anchor="ctr">
+            <a:noAutofit/>
+          </a:bodyPr>
+          <a:lstStyle/>
+          <a:p>
+            <a:pPr>
+              <a:lnSpc>
+                <a:spcPct val="150000"/>
+              </a:lnSpc>
+            </a:pPr>
+            <a:r>
+              <a:rPr sz="1000" b="0" dirty="0">
+                <a:solidFill>
+                  <a:srgbClr val="232830"/>
+                </a:solidFill>
+                <a:latin typeface="맑은 고딕" panose="020B0503020000020004" pitchFamily="50" charset="-127"/>
+                <a:ea typeface="맑은 고딕" panose="020B0503020000020004" pitchFamily="50" charset="-127"/>
+              </a:rPr>
+              <a:t>8.</a:t>
+            </a:r>
+            <a:r>
+              <a:rPr lang="en-US" sz="1000" b="0" dirty="0">
+                <a:solidFill>
+                  <a:srgbClr val="232830"/>
+                </a:solidFill>
+                <a:latin typeface="맑은 고딕" panose="020B0503020000020004" pitchFamily="50" charset="-127"/>
+                <a:ea typeface="맑은 고딕" panose="020B0503020000020004" pitchFamily="50" charset="-127"/>
+              </a:rPr>
+              <a:t>3</a:t>
+            </a:r>
+            <a:r>
+              <a:rPr sz="1000" b="0" dirty="0">
+                <a:solidFill>
+                  <a:srgbClr val="232830"/>
+                </a:solidFill>
+                <a:latin typeface="맑은 고딕" panose="020B0503020000020004" pitchFamily="50" charset="-127"/>
+                <a:ea typeface="맑은 고딕" panose="020B0503020000020004" pitchFamily="50" charset="-127"/>
+              </a:rPr>
+              <a:t> </a:t>
+            </a:r>
+            <a:r>
+              <a:rPr sz="1000" b="0" dirty="0" err="1">
+                <a:solidFill>
+                  <a:srgbClr val="232830"/>
+                </a:solidFill>
+                <a:latin typeface="맑은 고딕" panose="020B0503020000020004" pitchFamily="50" charset="-127"/>
+                <a:ea typeface="맑은 고딕" panose="020B0503020000020004" pitchFamily="50" charset="-127"/>
+              </a:rPr>
+              <a:t>스토리</a:t>
+            </a:r>
+            <a:r>
+              <a:rPr sz="1000" b="0" dirty="0">
+                <a:solidFill>
+                  <a:srgbClr val="232830"/>
+                </a:solidFill>
+                <a:latin typeface="맑은 고딕" panose="020B0503020000020004" pitchFamily="50" charset="-127"/>
+                <a:ea typeface="맑은 고딕" panose="020B0503020000020004" pitchFamily="50" charset="-127"/>
+              </a:rPr>
+              <a:t>/</a:t>
+            </a:r>
+            <a:r>
+              <a:rPr sz="1000" b="0" dirty="0" err="1">
+                <a:solidFill>
+                  <a:srgbClr val="232830"/>
+                </a:solidFill>
+                <a:latin typeface="맑은 고딕" panose="020B0503020000020004" pitchFamily="50" charset="-127"/>
+                <a:ea typeface="맑은 고딕" panose="020B0503020000020004" pitchFamily="50" charset="-127"/>
+              </a:rPr>
+              <a:t>에피소드</a:t>
+            </a:r>
+            <a:endParaRPr sz="1000" b="0" dirty="0">
+              <a:solidFill>
+                <a:srgbClr val="232830"/>
+              </a:solidFill>
+              <a:latin typeface="맑은 고딕" panose="020B0503020000020004" pitchFamily="50" charset="-127"/>
+              <a:ea typeface="맑은 고딕" panose="020B0503020000020004" pitchFamily="50" charset="-127"/>
+            </a:endParaRPr>
+          </a:p>
+        </p:txBody>
+      </p:sp>
+      <p:sp>
+        <p:nvSpPr>
+          <p:cNvPr id="52" name="TextBox 51">
+            <a:extLst>
+              <a:ext uri="{FF2B5EF4-FFF2-40B4-BE49-F238E27FC236}">
+                <a16:creationId xmlns:a16="http://schemas.microsoft.com/office/drawing/2014/main" id="{DE696A88-8752-49BD-9EEC-7669B75FC1A7}"/>
+              </a:ext>
+            </a:extLst>
+          </p:cNvPr>
+          <p:cNvSpPr txBox="1"/>
+          <p:nvPr/>
+        </p:nvSpPr>
+        <p:spPr>
+          <a:xfrm>
+            <a:off x="8941239" y="3637524"/>
+            <a:ext cx="1735074" cy="210312"/>
+          </a:xfrm>
+          <a:prstGeom prst="rect">
+            <a:avLst/>
+          </a:prstGeom>
+          <a:noFill/>
+        </p:spPr>
+        <p:txBody>
+          <a:bodyPr wrap="square" lIns="18288" tIns="18288" rIns="18288" bIns="18288" anchor="ctr">
+            <a:noAutofit/>
+          </a:bodyPr>
+          <a:lstStyle/>
+          <a:p>
+            <a:pPr>
+              <a:lnSpc>
+                <a:spcPct val="150000"/>
+              </a:lnSpc>
+            </a:pPr>
+            <a:r>
+              <a:rPr sz="1000" b="0" dirty="0">
+                <a:solidFill>
+                  <a:srgbClr val="232830"/>
+                </a:solidFill>
+                <a:latin typeface="맑은 고딕" panose="020B0503020000020004" pitchFamily="50" charset="-127"/>
+                <a:ea typeface="맑은 고딕" panose="020B0503020000020004" pitchFamily="50" charset="-127"/>
+              </a:rPr>
+              <a:t>8.</a:t>
+            </a:r>
+            <a:r>
+              <a:rPr lang="en-US" sz="1000" b="0" dirty="0">
+                <a:solidFill>
+                  <a:srgbClr val="232830"/>
+                </a:solidFill>
+                <a:latin typeface="맑은 고딕" panose="020B0503020000020004" pitchFamily="50" charset="-127"/>
+                <a:ea typeface="맑은 고딕" panose="020B0503020000020004" pitchFamily="50" charset="-127"/>
+              </a:rPr>
+              <a:t>4</a:t>
+            </a:r>
+            <a:r>
+              <a:rPr sz="1000" b="0" dirty="0">
+                <a:solidFill>
+                  <a:srgbClr val="232830"/>
+                </a:solidFill>
+                <a:latin typeface="맑은 고딕" panose="020B0503020000020004" pitchFamily="50" charset="-127"/>
+                <a:ea typeface="맑은 고딕" panose="020B0503020000020004" pitchFamily="50" charset="-127"/>
+              </a:rPr>
+              <a:t> </a:t>
+            </a:r>
+            <a:r>
+              <a:rPr lang="ko-KR" altLang="en-US" sz="1000" b="0" dirty="0">
+                <a:solidFill>
+                  <a:srgbClr val="232830"/>
+                </a:solidFill>
+                <a:latin typeface="맑은 고딕" panose="020B0503020000020004" pitchFamily="50" charset="-127"/>
+                <a:ea typeface="맑은 고딕" panose="020B0503020000020004" pitchFamily="50" charset="-127"/>
+              </a:rPr>
+              <a:t>성장</a:t>
+            </a:r>
+            <a:r>
+              <a:rPr lang="en-US" altLang="ko-KR" sz="1000" b="0" dirty="0">
+                <a:solidFill>
+                  <a:srgbClr val="232830"/>
+                </a:solidFill>
+                <a:latin typeface="맑은 고딕" panose="020B0503020000020004" pitchFamily="50" charset="-127"/>
+                <a:ea typeface="맑은 고딕" panose="020B0503020000020004" pitchFamily="50" charset="-127"/>
+              </a:rPr>
+              <a:t>/</a:t>
+            </a:r>
+            <a:r>
+              <a:rPr lang="ko-KR" altLang="en-US" sz="1000" b="0" dirty="0">
+                <a:solidFill>
+                  <a:srgbClr val="232830"/>
+                </a:solidFill>
+                <a:latin typeface="맑은 고딕" panose="020B0503020000020004" pitchFamily="50" charset="-127"/>
+                <a:ea typeface="맑은 고딕" panose="020B0503020000020004" pitchFamily="50" charset="-127"/>
+              </a:rPr>
+              <a:t>능력 획득</a:t>
+            </a:r>
+            <a:endParaRPr sz="1000" b="0" dirty="0">
+              <a:solidFill>
+                <a:srgbClr val="232830"/>
+              </a:solidFill>
+              <a:latin typeface="맑은 고딕" panose="020B0503020000020004" pitchFamily="50" charset="-127"/>
+              <a:ea typeface="맑은 고딕" panose="020B0503020000020004" pitchFamily="50" charset="-127"/>
+            </a:endParaRPr>
+          </a:p>
+        </p:txBody>
+      </p:sp>
     </p:spTree>
     <p:extLst>
       <p:ext uri="{BB962C8B-B14F-4D97-AF65-F5344CB8AC3E}">
@@ -30458,15 +32100,7 @@
 
 <file path=ppt/slides/slide3.xml><?xml version="1.0" encoding="utf-8"?>
 <p:sld xmlns:a="http://schemas.openxmlformats.org/drawingml/2006/main" xmlns:r="http://schemas.openxmlformats.org/officeDocument/2006/relationships" xmlns:p="http://schemas.openxmlformats.org/presentationml/2006/main">
-  <p:cSld name="Slide 2">
-    <p:bg>
-      <p:bgPr>
-        <a:solidFill>
-          <a:srgbClr val="FFFFFF"/>
-        </a:solidFill>
-        <a:effectLst/>
-      </p:bgPr>
-    </p:bg>
+  <p:cSld>
     <p:spTree>
       <p:nvGrpSpPr>
         <p:cNvPr id="1" name=""/>
@@ -30507,6 +32141,18 @@
             <a:prstDash val="solid"/>
           </a:ln>
         </p:spPr>
+        <p:txBody>
+          <a:bodyPr anchor="ctr"/>
+          <a:lstStyle/>
+          <a:p>
+            <a:pPr>
+              <a:lnSpc>
+                <a:spcPct val="150000"/>
+              </a:lnSpc>
+            </a:pPr>
+            <a:endParaRPr lang="ko-KR" altLang="en-US"/>
+          </a:p>
+        </p:txBody>
       </p:sp>
       <p:sp>
         <p:nvSpPr>
@@ -30530,43 +32176,16 @@
             <a:prstDash val="solid"/>
           </a:ln>
         </p:spPr>
-      </p:sp>
-      <p:sp>
-        <p:nvSpPr>
-          <p:cNvPr id="4" name="Text 2"/>
-          <p:cNvSpPr/>
-          <p:nvPr/>
-        </p:nvSpPr>
-        <p:spPr>
-          <a:xfrm>
-            <a:off x="530352" y="6446520"/>
-            <a:ext cx="2926080" cy="146304"/>
-          </a:xfrm>
-          <a:prstGeom prst="rect">
-            <a:avLst/>
-          </a:prstGeom>
-          <a:noFill/>
-          <a:ln/>
-        </p:spPr>
-        <p:txBody>
-          <a:bodyPr wrap="square" lIns="0" tIns="0" rIns="0" bIns="0" rtlCol="0" anchor="ctr"/>
-          <a:lstStyle/>
-          <a:p>
-            <a:pPr marL="0" indent="0">
-              <a:buNone/>
-            </a:pPr>
-            <a:r>
-              <a:rPr lang="en-US" sz="1000" dirty="0">
-                <a:solidFill>
-                  <a:srgbClr val="6B7280"/>
-                </a:solidFill>
-                <a:latin typeface="맑은 고딕" pitchFamily="34" charset="0"/>
-                <a:ea typeface="맑은 고딕" pitchFamily="34" charset="-122"/>
-                <a:cs typeface="맑은 고딕" pitchFamily="34" charset="-120"/>
-              </a:rPr>
-              <a:t>목차</a:t>
-            </a:r>
-            <a:endParaRPr lang="en-US" sz="1000" dirty="0"/>
+        <p:txBody>
+          <a:bodyPr anchor="ctr"/>
+          <a:lstStyle/>
+          <a:p>
+            <a:pPr>
+              <a:lnSpc>
+                <a:spcPct val="150000"/>
+              </a:lnSpc>
+            </a:pPr>
+            <a:endParaRPr lang="ko-KR" altLang="en-US"/>
           </a:p>
         </p:txBody>
       </p:sp>
@@ -30592,6 +32211,9 @@
           <a:lstStyle/>
           <a:p>
             <a:pPr marL="0" indent="0">
+              <a:lnSpc>
+                <a:spcPct val="150000"/>
+              </a:lnSpc>
               <a:buNone/>
             </a:pPr>
             <a:r>
@@ -30603,7 +32225,18 @@
                 <a:ea typeface="맑은 고딕" pitchFamily="34" charset="-122"/>
                 <a:cs typeface="맑은 고딕" pitchFamily="34" charset="-120"/>
               </a:rPr>
-              <a:t>목차</a:t>
+              <a:t>1.1 </a:t>
+            </a:r>
+            <a:r>
+              <a:rPr lang="ko-KR" altLang="en-US" sz="2000" b="1" dirty="0">
+                <a:solidFill>
+                  <a:srgbClr val="111827"/>
+                </a:solidFill>
+                <a:latin typeface="맑은 고딕" pitchFamily="34" charset="0"/>
+                <a:ea typeface="맑은 고딕" pitchFamily="34" charset="-122"/>
+                <a:cs typeface="맑은 고딕" pitchFamily="34" charset="-120"/>
+              </a:rPr>
+              <a:t>시스템 목적</a:t>
             </a:r>
             <a:endParaRPr lang="en-US" sz="2000" dirty="0"/>
           </a:p>
@@ -30611,41 +32244,282 @@
       </p:sp>
       <p:sp>
         <p:nvSpPr>
-          <p:cNvPr id="6" name="Shape 4"/>
-          <p:cNvSpPr/>
-          <p:nvPr/>
-        </p:nvSpPr>
-        <p:spPr>
-          <a:xfrm>
-            <a:off x="777240" y="1143000"/>
-            <a:ext cx="5074920" cy="987552"/>
+          <p:cNvPr id="6" name="Text 4"/>
+          <p:cNvSpPr/>
+          <p:nvPr/>
+        </p:nvSpPr>
+        <p:spPr>
+          <a:xfrm>
+            <a:off x="658368" y="1078992"/>
+            <a:ext cx="1188720" cy="320040"/>
+          </a:xfrm>
+          <a:prstGeom prst="rect">
+            <a:avLst/>
+          </a:prstGeom>
+          <a:noFill/>
+          <a:ln/>
+        </p:spPr>
+        <p:txBody>
+          <a:bodyPr wrap="square" lIns="762" tIns="762" rIns="762" bIns="762" rtlCol="0" anchor="ctr">
+            <a:normAutofit/>
+          </a:bodyPr>
+          <a:lstStyle/>
+          <a:p>
+            <a:pPr marL="0" indent="0" algn="l">
+              <a:lnSpc>
+                <a:spcPct val="150000"/>
+              </a:lnSpc>
+              <a:buNone/>
+            </a:pPr>
+            <a:r>
+              <a:rPr lang="ko-KR" altLang="en-US" sz="1500" b="1" dirty="0">
+                <a:solidFill>
+                  <a:srgbClr val="073B5A"/>
+                </a:solidFill>
+                <a:latin typeface="맑은 고딕" pitchFamily="34" charset="0"/>
+                <a:ea typeface="맑은 고딕" pitchFamily="34" charset="-122"/>
+                <a:cs typeface="맑은 고딕" pitchFamily="34" charset="-120"/>
+              </a:rPr>
+              <a:t>목적</a:t>
+            </a:r>
+            <a:endParaRPr lang="en-US" sz="1500" dirty="0"/>
+          </a:p>
+        </p:txBody>
+      </p:sp>
+      <p:sp>
+        <p:nvSpPr>
+          <p:cNvPr id="7" name="Text 5"/>
+          <p:cNvSpPr/>
+          <p:nvPr/>
+        </p:nvSpPr>
+        <p:spPr>
+          <a:xfrm>
+            <a:off x="658368" y="1463040"/>
+            <a:ext cx="7319562" cy="502920"/>
+          </a:xfrm>
+          <a:prstGeom prst="rect">
+            <a:avLst/>
+          </a:prstGeom>
+          <a:noFill/>
+          <a:ln/>
+        </p:spPr>
+        <p:txBody>
+          <a:bodyPr wrap="square" lIns="508" tIns="508" rIns="508" bIns="508" rtlCol="0" anchor="ctr">
+            <a:normAutofit/>
+          </a:bodyPr>
+          <a:lstStyle/>
+          <a:p>
+            <a:pPr marL="0" indent="0" algn="l">
+              <a:lnSpc>
+                <a:spcPct val="150000"/>
+              </a:lnSpc>
+              <a:buNone/>
+            </a:pPr>
+            <a:r>
+              <a:rPr lang="ko-KR" altLang="en-US" sz="1000" dirty="0">
+                <a:solidFill>
+                  <a:srgbClr val="111827"/>
+                </a:solidFill>
+                <a:latin typeface="맑은 고딕" pitchFamily="34" charset="0"/>
+                <a:ea typeface="맑은 고딕" pitchFamily="34" charset="-122"/>
+                <a:cs typeface="맑은 고딕" pitchFamily="34" charset="-120"/>
+              </a:rPr>
+              <a:t>호흡을 플레이어가 직접 조작하는 핵심 행동으로 만들고</a:t>
+            </a:r>
+            <a:r>
+              <a:rPr lang="en-US" altLang="ko-KR" sz="1000" dirty="0">
+                <a:solidFill>
+                  <a:srgbClr val="111827"/>
+                </a:solidFill>
+                <a:latin typeface="맑은 고딕" pitchFamily="34" charset="0"/>
+                <a:ea typeface="맑은 고딕" pitchFamily="34" charset="-122"/>
+                <a:cs typeface="맑은 고딕" pitchFamily="34" charset="-120"/>
+              </a:rPr>
+              <a:t>, </a:t>
+            </a:r>
+            <a:r>
+              <a:rPr lang="ko-KR" altLang="en-US" sz="1000" dirty="0">
+                <a:solidFill>
+                  <a:srgbClr val="111827"/>
+                </a:solidFill>
+                <a:latin typeface="맑은 고딕" pitchFamily="34" charset="0"/>
+                <a:ea typeface="맑은 고딕" pitchFamily="34" charset="-122"/>
+                <a:cs typeface="맑은 고딕" pitchFamily="34" charset="-120"/>
+              </a:rPr>
+              <a:t>이동</a:t>
+            </a:r>
+            <a:r>
+              <a:rPr lang="en-US" altLang="ko-KR" sz="1000" dirty="0">
+                <a:solidFill>
+                  <a:srgbClr val="111827"/>
+                </a:solidFill>
+                <a:latin typeface="맑은 고딕" pitchFamily="34" charset="0"/>
+                <a:ea typeface="맑은 고딕" pitchFamily="34" charset="-122"/>
+                <a:cs typeface="맑은 고딕" pitchFamily="34" charset="-120"/>
+              </a:rPr>
+              <a:t>·</a:t>
+            </a:r>
+            <a:r>
+              <a:rPr lang="ko-KR" altLang="en-US" sz="1000" dirty="0">
+                <a:solidFill>
+                  <a:srgbClr val="111827"/>
+                </a:solidFill>
+                <a:latin typeface="맑은 고딕" pitchFamily="34" charset="0"/>
+                <a:ea typeface="맑은 고딕" pitchFamily="34" charset="-122"/>
+                <a:cs typeface="맑은 고딕" pitchFamily="34" charset="-120"/>
+              </a:rPr>
+              <a:t>은신</a:t>
+            </a:r>
+            <a:r>
+              <a:rPr lang="en-US" altLang="ko-KR" sz="1000" dirty="0">
+                <a:solidFill>
+                  <a:srgbClr val="111827"/>
+                </a:solidFill>
+                <a:latin typeface="맑은 고딕" pitchFamily="34" charset="0"/>
+                <a:ea typeface="맑은 고딕" pitchFamily="34" charset="-122"/>
+                <a:cs typeface="맑은 고딕" pitchFamily="34" charset="-120"/>
+              </a:rPr>
+              <a:t>·</a:t>
+            </a:r>
+            <a:r>
+              <a:rPr lang="ko-KR" altLang="en-US" sz="1000" dirty="0">
+                <a:solidFill>
+                  <a:srgbClr val="111827"/>
+                </a:solidFill>
+                <a:latin typeface="맑은 고딕" pitchFamily="34" charset="0"/>
+                <a:ea typeface="맑은 고딕" pitchFamily="34" charset="-122"/>
+                <a:cs typeface="맑은 고딕" pitchFamily="34" charset="-120"/>
+              </a:rPr>
+              <a:t>소음</a:t>
+            </a:r>
+            <a:r>
+              <a:rPr lang="en-US" altLang="ko-KR" sz="1000" dirty="0">
+                <a:solidFill>
+                  <a:srgbClr val="111827"/>
+                </a:solidFill>
+                <a:latin typeface="맑은 고딕" pitchFamily="34" charset="0"/>
+                <a:ea typeface="맑은 고딕" pitchFamily="34" charset="-122"/>
+                <a:cs typeface="맑은 고딕" pitchFamily="34" charset="-120"/>
+              </a:rPr>
+              <a:t>·</a:t>
+            </a:r>
+            <a:r>
+              <a:rPr lang="ko-KR" altLang="en-US" sz="1000" dirty="0">
+                <a:solidFill>
+                  <a:srgbClr val="111827"/>
+                </a:solidFill>
+                <a:latin typeface="맑은 고딕" pitchFamily="34" charset="0"/>
+                <a:ea typeface="맑은 고딕" pitchFamily="34" charset="-122"/>
+                <a:cs typeface="맑은 고딕" pitchFamily="34" charset="-120"/>
+              </a:rPr>
+              <a:t>환경 대응</a:t>
+            </a:r>
+            <a:r>
+              <a:rPr lang="en-US" altLang="ko-KR" sz="1000" dirty="0">
+                <a:solidFill>
+                  <a:srgbClr val="111827"/>
+                </a:solidFill>
+                <a:latin typeface="맑은 고딕" pitchFamily="34" charset="0"/>
+                <a:ea typeface="맑은 고딕" pitchFamily="34" charset="-122"/>
+                <a:cs typeface="맑은 고딕" pitchFamily="34" charset="-120"/>
+              </a:rPr>
+              <a:t>·</a:t>
+            </a:r>
+            <a:r>
+              <a:rPr lang="ko-KR" altLang="en-US" sz="1000" dirty="0">
+                <a:solidFill>
+                  <a:srgbClr val="111827"/>
+                </a:solidFill>
+                <a:latin typeface="맑은 고딕" pitchFamily="34" charset="0"/>
+                <a:ea typeface="맑은 고딕" pitchFamily="34" charset="-122"/>
+                <a:cs typeface="맑은 고딕" pitchFamily="34" charset="-120"/>
+              </a:rPr>
+              <a:t>적 </a:t>
+            </a:r>
+            <a:r>
+              <a:rPr lang="en-US" altLang="ko-KR" sz="1000" dirty="0">
+                <a:solidFill>
+                  <a:srgbClr val="111827"/>
+                </a:solidFill>
+                <a:latin typeface="맑은 고딕" pitchFamily="34" charset="0"/>
+                <a:ea typeface="맑은 고딕" pitchFamily="34" charset="-122"/>
+                <a:cs typeface="맑은 고딕" pitchFamily="34" charset="-120"/>
+              </a:rPr>
+              <a:t>AI</a:t>
+            </a:r>
+            <a:r>
+              <a:rPr lang="ko-KR" altLang="en-US" sz="1000" dirty="0">
+                <a:solidFill>
+                  <a:srgbClr val="111827"/>
+                </a:solidFill>
+                <a:latin typeface="맑은 고딕" pitchFamily="34" charset="0"/>
+                <a:ea typeface="맑은 고딕" pitchFamily="34" charset="-122"/>
+                <a:cs typeface="맑은 고딕" pitchFamily="34" charset="-120"/>
+              </a:rPr>
+              <a:t>를 하나의 규칙으로 연결한다</a:t>
+            </a:r>
+            <a:r>
+              <a:rPr lang="en-US" altLang="ko-KR" sz="1000" dirty="0">
+                <a:solidFill>
+                  <a:srgbClr val="111827"/>
+                </a:solidFill>
+                <a:latin typeface="맑은 고딕" pitchFamily="34" charset="0"/>
+                <a:ea typeface="맑은 고딕" pitchFamily="34" charset="-122"/>
+                <a:cs typeface="맑은 고딕" pitchFamily="34" charset="-120"/>
+              </a:rPr>
+              <a:t>.</a:t>
+            </a:r>
+            <a:endParaRPr lang="en-US" sz="1000" dirty="0"/>
+          </a:p>
+        </p:txBody>
+      </p:sp>
+      <p:sp>
+        <p:nvSpPr>
+          <p:cNvPr id="15" name="Shape 13"/>
+          <p:cNvSpPr/>
+          <p:nvPr/>
+        </p:nvSpPr>
+        <p:spPr>
+          <a:xfrm>
+            <a:off x="658368" y="2458183"/>
+            <a:ext cx="3383280" cy="987552"/>
           </a:xfrm>
           <a:prstGeom prst="roundRect">
             <a:avLst>
               <a:gd name="adj" fmla="val 7407"/>
             </a:avLst>
           </a:prstGeom>
-          <a:solidFill>
-            <a:srgbClr val="EAF3FF"/>
-          </a:solidFill>
+          <a:noFill/>
           <a:ln w="10160">
             <a:solidFill>
-              <a:srgbClr val="E2E8F0"/>
+              <a:srgbClr val="073B5A"/>
             </a:solidFill>
             <a:prstDash val="solid"/>
           </a:ln>
         </p:spPr>
-      </p:sp>
-      <p:sp>
-        <p:nvSpPr>
-          <p:cNvPr id="7" name="Text 5"/>
-          <p:cNvSpPr/>
-          <p:nvPr/>
-        </p:nvSpPr>
-        <p:spPr>
-          <a:xfrm>
-            <a:off x="941832" y="1261872"/>
-            <a:ext cx="4745736" cy="274320"/>
+        <p:txBody>
+          <a:bodyPr anchor="ctr"/>
+          <a:lstStyle/>
+          <a:p>
+            <a:pPr>
+              <a:lnSpc>
+                <a:spcPct val="150000"/>
+              </a:lnSpc>
+            </a:pPr>
+            <a:endParaRPr lang="ko-KR" altLang="en-US"/>
+          </a:p>
+        </p:txBody>
+      </p:sp>
+      <p:sp>
+        <p:nvSpPr>
+          <p:cNvPr id="17" name="Text 15"/>
+          <p:cNvSpPr/>
+          <p:nvPr/>
+        </p:nvSpPr>
+        <p:spPr>
+          <a:xfrm>
+            <a:off x="822960" y="2746218"/>
+            <a:ext cx="3054096" cy="411480"/>
           </a:xfrm>
           <a:prstGeom prst="rect">
             <a:avLst/>
@@ -30654,57 +32528,19 @@
           <a:ln/>
         </p:spPr>
         <p:txBody>
-          <a:bodyPr wrap="square" lIns="762" tIns="762" rIns="762" bIns="762" rtlCol="0" anchor="ctr">
-            <a:normAutofit/>
+          <a:bodyPr wrap="square" lIns="508" tIns="508" rIns="508" bIns="508" rtlCol="0" anchor="ctr">
+            <a:normAutofit lnSpcReduction="10000"/>
           </a:bodyPr>
           <a:lstStyle/>
           <a:p>
-            <a:pPr marL="0" indent="0" algn="l">
-              <a:buNone/>
-            </a:pPr>
-            <a:r>
-              <a:rPr lang="en-US" sz="1500" b="1" dirty="0">
-                <a:solidFill>
-                  <a:srgbClr val="073B5A"/>
-                </a:solidFill>
-                <a:latin typeface="맑은 고딕" pitchFamily="34" charset="0"/>
-                <a:ea typeface="맑은 고딕" pitchFamily="34" charset="-122"/>
-                <a:cs typeface="맑은 고딕" pitchFamily="34" charset="-120"/>
-              </a:rPr>
-              <a:t>1. 호흡 시스템</a:t>
-            </a:r>
-            <a:endParaRPr lang="en-US" sz="1500" dirty="0"/>
-          </a:p>
-        </p:txBody>
-      </p:sp>
-      <p:sp>
-        <p:nvSpPr>
-          <p:cNvPr id="8" name="Text 6"/>
-          <p:cNvSpPr/>
-          <p:nvPr/>
-        </p:nvSpPr>
-        <p:spPr>
-          <a:xfrm>
-            <a:off x="941832" y="1618488"/>
-            <a:ext cx="4745736" cy="411480"/>
-          </a:xfrm>
-          <a:prstGeom prst="rect">
-            <a:avLst/>
-          </a:prstGeom>
-          <a:noFill/>
-          <a:ln/>
-        </p:spPr>
-        <p:txBody>
-          <a:bodyPr wrap="square" lIns="508" tIns="508" rIns="508" bIns="508" rtlCol="0" anchor="t">
-            <a:normAutofit/>
-          </a:bodyPr>
-          <a:lstStyle/>
-          <a:p>
-            <a:pPr marL="0" indent="0" algn="l">
-              <a:buNone/>
-            </a:pPr>
-            <a:r>
-              <a:rPr lang="en-US" sz="1000" dirty="0">
+            <a:pPr marL="0" indent="0" algn="ctr">
+              <a:lnSpc>
+                <a:spcPct val="150000"/>
+              </a:lnSpc>
+              <a:buNone/>
+            </a:pPr>
+            <a:r>
+              <a:rPr lang="ko-KR" altLang="en-US" sz="1000" dirty="0">
                 <a:solidFill>
                   <a:srgbClr val="111827"/>
                 </a:solidFill>
@@ -30712,7 +32548,55 @@
                 <a:ea typeface="맑은 고딕" pitchFamily="34" charset="-122"/>
                 <a:cs typeface="맑은 고딕" pitchFamily="34" charset="-120"/>
               </a:rPr>
-              <a:t>개요 / 핵심 경험 / 시스템 볼륨 맵</a:t>
+              <a:t>월드 규칙 통합</a:t>
+            </a:r>
+            <a:endParaRPr lang="en-US" altLang="ko-KR" sz="1000" dirty="0">
+              <a:solidFill>
+                <a:srgbClr val="111827"/>
+              </a:solidFill>
+              <a:latin typeface="맑은 고딕" pitchFamily="34" charset="0"/>
+              <a:ea typeface="맑은 고딕" pitchFamily="34" charset="-122"/>
+              <a:cs typeface="맑은 고딕" pitchFamily="34" charset="-120"/>
+            </a:endParaRPr>
+          </a:p>
+          <a:p>
+            <a:pPr marL="0" indent="0" algn="ctr">
+              <a:lnSpc>
+                <a:spcPct val="150000"/>
+              </a:lnSpc>
+              <a:buNone/>
+            </a:pPr>
+            <a:r>
+              <a:rPr lang="ko-KR" altLang="en-US" sz="1000" dirty="0">
+                <a:solidFill>
+                  <a:srgbClr val="111827"/>
+                </a:solidFill>
+                <a:latin typeface="맑은 고딕" pitchFamily="34" charset="0"/>
+                <a:ea typeface="맑은 고딕" pitchFamily="34" charset="-122"/>
+              </a:rPr>
+              <a:t>호흡 상태가 환경</a:t>
+            </a:r>
+            <a:r>
+              <a:rPr lang="en-US" altLang="ko-KR" sz="1000" dirty="0">
+                <a:solidFill>
+                  <a:srgbClr val="111827"/>
+                </a:solidFill>
+                <a:latin typeface="맑은 고딕" pitchFamily="34" charset="0"/>
+                <a:ea typeface="맑은 고딕" pitchFamily="34" charset="-122"/>
+                <a:cs typeface="맑은 고딕" pitchFamily="34" charset="-120"/>
+              </a:rPr>
+              <a:t>·AI·</a:t>
+            </a:r>
+            <a:r>
+              <a:rPr lang="ko-KR" altLang="en-US" sz="1000" dirty="0">
+                <a:solidFill>
+                  <a:srgbClr val="111827"/>
+                </a:solidFill>
+                <a:latin typeface="맑은 고딕" pitchFamily="34" charset="0"/>
+                <a:ea typeface="맑은 고딕" pitchFamily="34" charset="-122"/>
+                <a:cs typeface="맑은 고딕" pitchFamily="34" charset="-120"/>
+              </a:rPr>
+              <a:t>이동에 전달</a:t>
             </a:r>
             <a:endParaRPr lang="en-US" sz="1000" dirty="0"/>
           </a:p>
@@ -30720,14 +32604,14 @@
       </p:sp>
       <p:sp>
         <p:nvSpPr>
-          <p:cNvPr id="9" name="Shape 7"/>
-          <p:cNvSpPr/>
-          <p:nvPr/>
-        </p:nvSpPr>
-        <p:spPr>
-          <a:xfrm>
-            <a:off x="6309360" y="1143000"/>
-            <a:ext cx="5074920" cy="987552"/>
+          <p:cNvPr id="18" name="Shape 16"/>
+          <p:cNvSpPr/>
+          <p:nvPr/>
+        </p:nvSpPr>
+        <p:spPr>
+          <a:xfrm>
+            <a:off x="4370832" y="2458183"/>
+            <a:ext cx="3383280" cy="987552"/>
           </a:xfrm>
           <a:prstGeom prst="roundRect">
             <a:avLst>
@@ -30735,26 +32619,38 @@
             </a:avLst>
           </a:prstGeom>
           <a:solidFill>
-            <a:srgbClr val="F4F7FA"/>
+            <a:srgbClr val="C9E8FB"/>
           </a:solidFill>
           <a:ln w="10160">
             <a:solidFill>
-              <a:srgbClr val="E2E8F0"/>
+              <a:srgbClr val="073B5A"/>
             </a:solidFill>
             <a:prstDash val="solid"/>
           </a:ln>
         </p:spPr>
-      </p:sp>
-      <p:sp>
-        <p:nvSpPr>
-          <p:cNvPr id="10" name="Text 8"/>
-          <p:cNvSpPr/>
-          <p:nvPr/>
-        </p:nvSpPr>
-        <p:spPr>
-          <a:xfrm>
-            <a:off x="6473952" y="1261872"/>
-            <a:ext cx="4745736" cy="274320"/>
+        <p:txBody>
+          <a:bodyPr anchor="ctr"/>
+          <a:lstStyle/>
+          <a:p>
+            <a:pPr>
+              <a:lnSpc>
+                <a:spcPct val="150000"/>
+              </a:lnSpc>
+            </a:pPr>
+            <a:endParaRPr lang="ko-KR" altLang="en-US"/>
+          </a:p>
+        </p:txBody>
+      </p:sp>
+      <p:sp>
+        <p:nvSpPr>
+          <p:cNvPr id="20" name="Text 18"/>
+          <p:cNvSpPr/>
+          <p:nvPr/>
+        </p:nvSpPr>
+        <p:spPr>
+          <a:xfrm>
+            <a:off x="4535424" y="2746218"/>
+            <a:ext cx="3054096" cy="411480"/>
           </a:xfrm>
           <a:prstGeom prst="rect">
             <a:avLst/>
@@ -30763,57 +32659,19 @@
           <a:ln/>
         </p:spPr>
         <p:txBody>
-          <a:bodyPr wrap="square" lIns="762" tIns="762" rIns="762" bIns="762" rtlCol="0" anchor="ctr">
-            <a:normAutofit/>
+          <a:bodyPr wrap="square" lIns="508" tIns="508" rIns="508" bIns="508" rtlCol="0" anchor="ctr">
+            <a:normAutofit lnSpcReduction="10000"/>
           </a:bodyPr>
           <a:lstStyle/>
           <a:p>
-            <a:pPr marL="0" indent="0" algn="l">
-              <a:buNone/>
-            </a:pPr>
-            <a:r>
-              <a:rPr lang="en-US" sz="1500" b="1" dirty="0">
-                <a:solidFill>
-                  <a:srgbClr val="073B5A"/>
-                </a:solidFill>
-                <a:latin typeface="맑은 고딕" pitchFamily="34" charset="0"/>
-                <a:ea typeface="맑은 고딕" pitchFamily="34" charset="-122"/>
-                <a:cs typeface="맑은 고딕" pitchFamily="34" charset="-120"/>
-              </a:rPr>
-              <a:t>2. 호흡 시스템 플레이 화면</a:t>
-            </a:r>
-            <a:endParaRPr lang="en-US" sz="1500" dirty="0"/>
-          </a:p>
-        </p:txBody>
-      </p:sp>
-      <p:sp>
-        <p:nvSpPr>
-          <p:cNvPr id="11" name="Text 9"/>
-          <p:cNvSpPr/>
-          <p:nvPr/>
-        </p:nvSpPr>
-        <p:spPr>
-          <a:xfrm>
-            <a:off x="6473952" y="1618488"/>
-            <a:ext cx="4745736" cy="411480"/>
-          </a:xfrm>
-          <a:prstGeom prst="rect">
-            <a:avLst/>
-          </a:prstGeom>
-          <a:noFill/>
-          <a:ln/>
-        </p:spPr>
-        <p:txBody>
-          <a:bodyPr wrap="square" lIns="508" tIns="508" rIns="508" bIns="508" rtlCol="0" anchor="t">
-            <a:normAutofit/>
-          </a:bodyPr>
-          <a:lstStyle/>
-          <a:p>
-            <a:pPr marL="0" indent="0" algn="l">
-              <a:buNone/>
-            </a:pPr>
-            <a:r>
-              <a:rPr lang="en-US" sz="1000" dirty="0">
+            <a:pPr marL="0" indent="0" algn="ctr">
+              <a:lnSpc>
+                <a:spcPct val="150000"/>
+              </a:lnSpc>
+              <a:buNone/>
+            </a:pPr>
+            <a:r>
+              <a:rPr lang="ko-KR" altLang="en-US" sz="1000" dirty="0">
                 <a:solidFill>
                   <a:srgbClr val="111827"/>
                 </a:solidFill>
@@ -30821,7 +32679,77 @@
                 <a:ea typeface="맑은 고딕" pitchFamily="34" charset="-122"/>
                 <a:cs typeface="맑은 고딕" pitchFamily="34" charset="-120"/>
               </a:rPr>
-              <a:t>실제 플레이 HUD와 화면 구성</a:t>
+              <a:t>전략적 판단</a:t>
+            </a:r>
+            <a:endParaRPr lang="en-US" altLang="ko-KR" sz="1000" dirty="0">
+              <a:solidFill>
+                <a:srgbClr val="111827"/>
+              </a:solidFill>
+              <a:latin typeface="맑은 고딕" pitchFamily="34" charset="0"/>
+              <a:ea typeface="맑은 고딕" pitchFamily="34" charset="-122"/>
+              <a:cs typeface="맑은 고딕" pitchFamily="34" charset="-120"/>
+            </a:endParaRPr>
+          </a:p>
+          <a:p>
+            <a:pPr marL="0" indent="0" algn="ctr">
+              <a:lnSpc>
+                <a:spcPct val="150000"/>
+              </a:lnSpc>
+              <a:buNone/>
+            </a:pPr>
+            <a:r>
+              <a:rPr lang="ko-KR" altLang="en-US" sz="1000" dirty="0">
+                <a:solidFill>
+                  <a:srgbClr val="111827"/>
+                </a:solidFill>
+                <a:latin typeface="맑은 고딕" pitchFamily="34" charset="0"/>
+                <a:ea typeface="맑은 고딕" pitchFamily="34" charset="-122"/>
+              </a:rPr>
+              <a:t>언제</a:t>
+            </a:r>
+            <a:r>
+              <a:rPr lang="en-US" altLang="ko-KR" sz="1000" dirty="0">
+                <a:solidFill>
+                  <a:srgbClr val="111827"/>
+                </a:solidFill>
+                <a:latin typeface="맑은 고딕" pitchFamily="34" charset="0"/>
+                <a:ea typeface="맑은 고딕" pitchFamily="34" charset="-122"/>
+                <a:cs typeface="맑은 고딕" pitchFamily="34" charset="-120"/>
+              </a:rPr>
+              <a:t>·</a:t>
+            </a:r>
+            <a:r>
+              <a:rPr lang="ko-KR" altLang="en-US" sz="1000" dirty="0">
+                <a:solidFill>
+                  <a:srgbClr val="111827"/>
+                </a:solidFill>
+                <a:latin typeface="맑은 고딕" pitchFamily="34" charset="0"/>
+                <a:ea typeface="맑은 고딕" pitchFamily="34" charset="-122"/>
+                <a:cs typeface="맑은 고딕" pitchFamily="34" charset="-120"/>
+              </a:rPr>
+              <a:t>얼마나</a:t>
+            </a:r>
+            <a:r>
+              <a:rPr lang="en-US" altLang="ko-KR" sz="1000" dirty="0">
+                <a:solidFill>
+                  <a:srgbClr val="111827"/>
+                </a:solidFill>
+                <a:latin typeface="맑은 고딕" pitchFamily="34" charset="0"/>
+                <a:ea typeface="맑은 고딕" pitchFamily="34" charset="-122"/>
+                <a:cs typeface="맑은 고딕" pitchFamily="34" charset="-120"/>
+              </a:rPr>
+              <a:t>·</a:t>
+            </a:r>
+            <a:r>
+              <a:rPr lang="ko-KR" altLang="en-US" sz="1000" dirty="0">
+                <a:solidFill>
+                  <a:srgbClr val="111827"/>
+                </a:solidFill>
+                <a:latin typeface="맑은 고딕" pitchFamily="34" charset="0"/>
+                <a:ea typeface="맑은 고딕" pitchFamily="34" charset="-122"/>
+                <a:cs typeface="맑은 고딕" pitchFamily="34" charset="-120"/>
+              </a:rPr>
+              <a:t>어디서 숨 쉴지 선택</a:t>
             </a:r>
             <a:endParaRPr lang="en-US" sz="1000" dirty="0"/>
           </a:p>
@@ -30829,41 +32757,127 @@
       </p:sp>
       <p:sp>
         <p:nvSpPr>
-          <p:cNvPr id="12" name="Shape 10"/>
-          <p:cNvSpPr/>
-          <p:nvPr/>
-        </p:nvSpPr>
-        <p:spPr>
-          <a:xfrm>
-            <a:off x="777240" y="2560320"/>
-            <a:ext cx="5074920" cy="987552"/>
+          <p:cNvPr id="21" name="Shape 19"/>
+          <p:cNvSpPr/>
+          <p:nvPr/>
+        </p:nvSpPr>
+        <p:spPr>
+          <a:xfrm>
+            <a:off x="8083296" y="2458183"/>
+            <a:ext cx="3383280" cy="987552"/>
           </a:xfrm>
           <a:prstGeom prst="roundRect">
             <a:avLst>
               <a:gd name="adj" fmla="val 7407"/>
             </a:avLst>
           </a:prstGeom>
-          <a:solidFill>
-            <a:srgbClr val="EAF3FF"/>
-          </a:solidFill>
+          <a:noFill/>
           <a:ln w="10160">
             <a:solidFill>
-              <a:srgbClr val="E2E8F0"/>
+              <a:srgbClr val="073B5A"/>
             </a:solidFill>
             <a:prstDash val="solid"/>
           </a:ln>
         </p:spPr>
-      </p:sp>
-      <p:sp>
-        <p:nvSpPr>
-          <p:cNvPr id="13" name="Text 11"/>
-          <p:cNvSpPr/>
-          <p:nvPr/>
-        </p:nvSpPr>
-        <p:spPr>
-          <a:xfrm>
-            <a:off x="941832" y="2679192"/>
-            <a:ext cx="4745736" cy="274320"/>
+        <p:txBody>
+          <a:bodyPr anchor="ctr"/>
+          <a:lstStyle/>
+          <a:p>
+            <a:pPr>
+              <a:lnSpc>
+                <a:spcPct val="150000"/>
+              </a:lnSpc>
+            </a:pPr>
+            <a:endParaRPr lang="ko-KR" altLang="en-US"/>
+          </a:p>
+        </p:txBody>
+      </p:sp>
+      <p:sp>
+        <p:nvSpPr>
+          <p:cNvPr id="23" name="Text 21"/>
+          <p:cNvSpPr/>
+          <p:nvPr/>
+        </p:nvSpPr>
+        <p:spPr>
+          <a:xfrm>
+            <a:off x="8247888" y="2746218"/>
+            <a:ext cx="3054096" cy="411480"/>
+          </a:xfrm>
+          <a:prstGeom prst="rect">
+            <a:avLst/>
+          </a:prstGeom>
+          <a:noFill/>
+          <a:ln/>
+        </p:spPr>
+        <p:txBody>
+          <a:bodyPr wrap="square" lIns="508" tIns="508" rIns="508" bIns="508" rtlCol="0" anchor="ctr">
+            <a:normAutofit lnSpcReduction="10000"/>
+          </a:bodyPr>
+          <a:lstStyle/>
+          <a:p>
+            <a:pPr marL="0" indent="0" algn="ctr">
+              <a:lnSpc>
+                <a:spcPct val="150000"/>
+              </a:lnSpc>
+              <a:buNone/>
+            </a:pPr>
+            <a:r>
+              <a:rPr lang="ko-KR" altLang="en-US" sz="1000" dirty="0">
+                <a:solidFill>
+                  <a:srgbClr val="111827"/>
+                </a:solidFill>
+                <a:latin typeface="맑은 고딕" pitchFamily="34" charset="0"/>
+                <a:ea typeface="맑은 고딕" pitchFamily="34" charset="-122"/>
+                <a:cs typeface="맑은 고딕" pitchFamily="34" charset="-120"/>
+              </a:rPr>
+              <a:t>성장 확장</a:t>
+            </a:r>
+            <a:endParaRPr lang="en-US" altLang="ko-KR" sz="1000" dirty="0">
+              <a:solidFill>
+                <a:srgbClr val="111827"/>
+              </a:solidFill>
+              <a:latin typeface="맑은 고딕" pitchFamily="34" charset="0"/>
+              <a:ea typeface="맑은 고딕" pitchFamily="34" charset="-122"/>
+              <a:cs typeface="맑은 고딕" pitchFamily="34" charset="-120"/>
+            </a:endParaRPr>
+          </a:p>
+          <a:p>
+            <a:pPr marL="0" indent="0" algn="ctr">
+              <a:lnSpc>
+                <a:spcPct val="150000"/>
+              </a:lnSpc>
+              <a:buNone/>
+            </a:pPr>
+            <a:r>
+              <a:rPr lang="ko-KR" altLang="en-US" sz="1000" dirty="0">
+                <a:solidFill>
+                  <a:srgbClr val="111827"/>
+                </a:solidFill>
+                <a:latin typeface="맑은 고딕" pitchFamily="34" charset="0"/>
+                <a:ea typeface="맑은 고딕" pitchFamily="34" charset="-122"/>
+              </a:rPr>
+              <a:t>동일 입력에 능력 의미 추가</a:t>
+            </a:r>
+            <a:endParaRPr lang="en-US" sz="1000" dirty="0"/>
+          </a:p>
+        </p:txBody>
+      </p:sp>
+      <p:sp>
+        <p:nvSpPr>
+          <p:cNvPr id="25" name="Text 4">
+            <a:extLst>
+              <a:ext uri="{FF2B5EF4-FFF2-40B4-BE49-F238E27FC236}">
+                <a16:creationId xmlns:a16="http://schemas.microsoft.com/office/drawing/2014/main" id="{B6D3AF9E-875E-4858-BBA9-9E39BCF0DBEE}"/>
+              </a:ext>
+            </a:extLst>
+          </p:cNvPr>
+          <p:cNvSpPr/>
+          <p:nvPr/>
+        </p:nvSpPr>
+        <p:spPr>
+          <a:xfrm>
+            <a:off x="658368" y="4128643"/>
+            <a:ext cx="1188720" cy="320040"/>
           </a:xfrm>
           <a:prstGeom prst="rect">
             <a:avLst/>
@@ -30878,10 +32892,13 @@
           <a:lstStyle/>
           <a:p>
             <a:pPr marL="0" indent="0" algn="l">
-              <a:buNone/>
-            </a:pPr>
-            <a:r>
-              <a:rPr lang="en-US" sz="1500" b="1" dirty="0">
+              <a:lnSpc>
+                <a:spcPct val="150000"/>
+              </a:lnSpc>
+              <a:buNone/>
+            </a:pPr>
+            <a:r>
+              <a:rPr lang="ko-KR" altLang="en-US" sz="1500" b="1" dirty="0">
                 <a:solidFill>
                   <a:srgbClr val="073B5A"/>
                 </a:solidFill>
@@ -30889,7 +32906,7 @@
                 <a:ea typeface="맑은 고딕" pitchFamily="34" charset="-122"/>
                 <a:cs typeface="맑은 고딕" pitchFamily="34" charset="-120"/>
               </a:rPr>
-              <a:t>3. 시스템 규칙</a:t>
+              <a:t>설계 목표</a:t>
             </a:r>
             <a:endParaRPr lang="en-US" sz="1500" dirty="0"/>
           </a:p>
@@ -30897,14 +32914,20 @@
       </p:sp>
       <p:sp>
         <p:nvSpPr>
-          <p:cNvPr id="14" name="Text 12"/>
-          <p:cNvSpPr/>
-          <p:nvPr/>
-        </p:nvSpPr>
-        <p:spPr>
-          <a:xfrm>
-            <a:off x="941832" y="3035808"/>
-            <a:ext cx="4745736" cy="411480"/>
+          <p:cNvPr id="26" name="Text 5">
+            <a:extLst>
+              <a:ext uri="{FF2B5EF4-FFF2-40B4-BE49-F238E27FC236}">
+                <a16:creationId xmlns:a16="http://schemas.microsoft.com/office/drawing/2014/main" id="{85A08BA1-DF56-44F5-923A-9C66FB3C06C7}"/>
+              </a:ext>
+            </a:extLst>
+          </p:cNvPr>
+          <p:cNvSpPr/>
+          <p:nvPr/>
+        </p:nvSpPr>
+        <p:spPr>
+          <a:xfrm>
+            <a:off x="658368" y="4512690"/>
+            <a:ext cx="7319562" cy="882269"/>
           </a:xfrm>
           <a:prstGeom prst="rect">
             <a:avLst/>
@@ -30913,16 +32936,19 @@
           <a:ln/>
         </p:spPr>
         <p:txBody>
-          <a:bodyPr wrap="square" lIns="508" tIns="508" rIns="508" bIns="508" rtlCol="0" anchor="t">
-            <a:normAutofit/>
+          <a:bodyPr wrap="square" lIns="508" tIns="508" rIns="508" bIns="508" rtlCol="0" anchor="ctr">
+            <a:noAutofit/>
           </a:bodyPr>
           <a:lstStyle/>
           <a:p>
             <a:pPr marL="0" indent="0" algn="l">
-              <a:buNone/>
-            </a:pPr>
-            <a:r>
-              <a:rPr lang="en-US" sz="1000" dirty="0">
+              <a:lnSpc>
+                <a:spcPct val="150000"/>
+              </a:lnSpc>
+              <a:buNone/>
+            </a:pPr>
+            <a:r>
+              <a:rPr lang="ko-KR" altLang="en-US" sz="1000" dirty="0">
                 <a:solidFill>
                   <a:srgbClr val="111827"/>
                 </a:solidFill>
@@ -30930,340 +32956,175 @@
                 <a:ea typeface="맑은 고딕" pitchFamily="34" charset="-122"/>
                 <a:cs typeface="맑은 고딕" pitchFamily="34" charset="-120"/>
               </a:rPr>
-              <a:t>입력·상태·소음·환경·능력 규칙</a:t>
+              <a:t>숨 참기가 정답 버튼이 되지 않도록 호흡 회복과 소음 리스크를 연결한다</a:t>
+            </a:r>
+            <a:r>
+              <a:rPr lang="en-US" altLang="ko-KR" sz="1000" dirty="0">
+                <a:solidFill>
+                  <a:srgbClr val="111827"/>
+                </a:solidFill>
+                <a:latin typeface="맑은 고딕" pitchFamily="34" charset="0"/>
+                <a:ea typeface="맑은 고딕" pitchFamily="34" charset="-122"/>
+                <a:cs typeface="맑은 고딕" pitchFamily="34" charset="-120"/>
+              </a:rPr>
+              <a:t>.</a:t>
+            </a:r>
+          </a:p>
+          <a:p>
+            <a:pPr marL="0" indent="0" algn="l">
+              <a:lnSpc>
+                <a:spcPct val="150000"/>
+              </a:lnSpc>
+              <a:buNone/>
+            </a:pPr>
+            <a:r>
+              <a:rPr lang="ko-KR" altLang="en-US" sz="1000" dirty="0">
+                <a:solidFill>
+                  <a:srgbClr val="111827"/>
+                </a:solidFill>
+                <a:latin typeface="맑은 고딕" pitchFamily="34" charset="0"/>
+                <a:ea typeface="맑은 고딕" pitchFamily="34" charset="-122"/>
+              </a:rPr>
+              <a:t>달리기</a:t>
+            </a:r>
+            <a:r>
+              <a:rPr lang="en-US" altLang="ko-KR" sz="1000" dirty="0">
+                <a:solidFill>
+                  <a:srgbClr val="111827"/>
+                </a:solidFill>
+                <a:latin typeface="맑은 고딕" pitchFamily="34" charset="0"/>
+                <a:ea typeface="맑은 고딕" pitchFamily="34" charset="-122"/>
+                <a:cs typeface="맑은 고딕" pitchFamily="34" charset="-120"/>
+              </a:rPr>
+              <a:t>·</a:t>
+            </a:r>
+            <a:r>
+              <a:rPr lang="ko-KR" altLang="en-US" sz="1000" dirty="0">
+                <a:solidFill>
+                  <a:srgbClr val="111827"/>
+                </a:solidFill>
+                <a:latin typeface="맑은 고딕" pitchFamily="34" charset="0"/>
+                <a:ea typeface="맑은 고딕" pitchFamily="34" charset="-122"/>
+                <a:cs typeface="맑은 고딕" pitchFamily="34" charset="-120"/>
+              </a:rPr>
+              <a:t>기어가기</a:t>
+            </a:r>
+            <a:r>
+              <a:rPr lang="en-US" altLang="ko-KR" sz="1000" dirty="0">
+                <a:solidFill>
+                  <a:srgbClr val="111827"/>
+                </a:solidFill>
+                <a:latin typeface="맑은 고딕" pitchFamily="34" charset="0"/>
+                <a:ea typeface="맑은 고딕" pitchFamily="34" charset="-122"/>
+                <a:cs typeface="맑은 고딕" pitchFamily="34" charset="-120"/>
+              </a:rPr>
+              <a:t>·</a:t>
+            </a:r>
+            <a:r>
+              <a:rPr lang="ko-KR" altLang="en-US" sz="1000" dirty="0">
+                <a:solidFill>
+                  <a:srgbClr val="111827"/>
+                </a:solidFill>
+                <a:latin typeface="맑은 고딕" pitchFamily="34" charset="0"/>
+                <a:ea typeface="맑은 고딕" pitchFamily="34" charset="-122"/>
+                <a:cs typeface="맑은 고딕" pitchFamily="34" charset="-120"/>
+              </a:rPr>
+              <a:t>환경 소음 등 다른 시스템이 호흡 조건을 계속 바꾸게 한다</a:t>
+            </a:r>
+            <a:r>
+              <a:rPr lang="en-US" altLang="ko-KR" sz="1000" dirty="0">
+                <a:solidFill>
+                  <a:srgbClr val="111827"/>
+                </a:solidFill>
+                <a:latin typeface="맑은 고딕" pitchFamily="34" charset="0"/>
+                <a:ea typeface="맑은 고딕" pitchFamily="34" charset="-122"/>
+                <a:cs typeface="맑은 고딕" pitchFamily="34" charset="-120"/>
+              </a:rPr>
+              <a:t>.</a:t>
+            </a:r>
+          </a:p>
+          <a:p>
+            <a:pPr marL="0" indent="0" algn="l">
+              <a:lnSpc>
+                <a:spcPct val="150000"/>
+              </a:lnSpc>
+              <a:buNone/>
+            </a:pPr>
+            <a:r>
+              <a:rPr lang="ko-KR" altLang="en-US" sz="1000" dirty="0">
+                <a:solidFill>
+                  <a:srgbClr val="111827"/>
+                </a:solidFill>
+                <a:latin typeface="맑은 고딕" pitchFamily="34" charset="0"/>
+                <a:ea typeface="맑은 고딕" pitchFamily="34" charset="-122"/>
+              </a:rPr>
+              <a:t>세 능력은 버튼을 늘리기보다 기존 들숨</a:t>
+            </a:r>
+            <a:r>
+              <a:rPr lang="en-US" altLang="ko-KR" sz="1000" dirty="0">
+                <a:solidFill>
+                  <a:srgbClr val="111827"/>
+                </a:solidFill>
+                <a:latin typeface="맑은 고딕" pitchFamily="34" charset="0"/>
+                <a:ea typeface="맑은 고딕" pitchFamily="34" charset="-122"/>
+                <a:cs typeface="맑은 고딕" pitchFamily="34" charset="-120"/>
+              </a:rPr>
+              <a:t>·</a:t>
+            </a:r>
+            <a:r>
+              <a:rPr lang="ko-KR" altLang="en-US" sz="1000" dirty="0">
+                <a:solidFill>
+                  <a:srgbClr val="111827"/>
+                </a:solidFill>
+                <a:latin typeface="맑은 고딕" pitchFamily="34" charset="0"/>
+                <a:ea typeface="맑은 고딕" pitchFamily="34" charset="-122"/>
+                <a:cs typeface="맑은 고딕" pitchFamily="34" charset="-120"/>
+              </a:rPr>
+              <a:t>참기</a:t>
+            </a:r>
+            <a:r>
+              <a:rPr lang="en-US" altLang="ko-KR" sz="1000" dirty="0">
+                <a:solidFill>
+                  <a:srgbClr val="111827"/>
+                </a:solidFill>
+                <a:latin typeface="맑은 고딕" pitchFamily="34" charset="0"/>
+                <a:ea typeface="맑은 고딕" pitchFamily="34" charset="-122"/>
+                <a:cs typeface="맑은 고딕" pitchFamily="34" charset="-120"/>
+              </a:rPr>
+              <a:t>·</a:t>
+            </a:r>
+            <a:r>
+              <a:rPr lang="ko-KR" altLang="en-US" sz="1000" dirty="0">
+                <a:solidFill>
+                  <a:srgbClr val="111827"/>
+                </a:solidFill>
+                <a:latin typeface="맑은 고딕" pitchFamily="34" charset="0"/>
+                <a:ea typeface="맑은 고딕" pitchFamily="34" charset="-122"/>
+                <a:cs typeface="맑은 고딕" pitchFamily="34" charset="-120"/>
+              </a:rPr>
+              <a:t>날숨의 결과를 확장한다</a:t>
+            </a:r>
+            <a:r>
+              <a:rPr lang="en-US" altLang="ko-KR" sz="1000" dirty="0">
+                <a:solidFill>
+                  <a:srgbClr val="111827"/>
+                </a:solidFill>
+                <a:latin typeface="맑은 고딕" pitchFamily="34" charset="0"/>
+                <a:ea typeface="맑은 고딕" pitchFamily="34" charset="-122"/>
+                <a:cs typeface="맑은 고딕" pitchFamily="34" charset="-120"/>
+              </a:rPr>
+              <a:t>.</a:t>
             </a:r>
             <a:endParaRPr lang="en-US" sz="1000" dirty="0"/>
           </a:p>
         </p:txBody>
       </p:sp>
-      <p:sp>
-        <p:nvSpPr>
-          <p:cNvPr id="15" name="Shape 13"/>
-          <p:cNvSpPr/>
-          <p:nvPr/>
-        </p:nvSpPr>
-        <p:spPr>
-          <a:xfrm>
-            <a:off x="6309360" y="2560320"/>
-            <a:ext cx="5074920" cy="987552"/>
-          </a:xfrm>
-          <a:prstGeom prst="roundRect">
-            <a:avLst>
-              <a:gd name="adj" fmla="val 7407"/>
-            </a:avLst>
-          </a:prstGeom>
-          <a:solidFill>
-            <a:srgbClr val="F4F7FA"/>
-          </a:solidFill>
-          <a:ln w="10160">
-            <a:solidFill>
-              <a:srgbClr val="E2E8F0"/>
-            </a:solidFill>
-            <a:prstDash val="solid"/>
-          </a:ln>
-        </p:spPr>
-      </p:sp>
-      <p:sp>
-        <p:nvSpPr>
-          <p:cNvPr id="16" name="Text 14"/>
-          <p:cNvSpPr/>
-          <p:nvPr/>
-        </p:nvSpPr>
-        <p:spPr>
-          <a:xfrm>
-            <a:off x="6473952" y="2679192"/>
-            <a:ext cx="4745736" cy="274320"/>
-          </a:xfrm>
-          <a:prstGeom prst="rect">
-            <a:avLst/>
-          </a:prstGeom>
-          <a:noFill/>
-          <a:ln/>
-        </p:spPr>
-        <p:txBody>
-          <a:bodyPr wrap="square" lIns="762" tIns="762" rIns="762" bIns="762" rtlCol="0" anchor="ctr">
-            <a:normAutofit/>
-          </a:bodyPr>
-          <a:lstStyle/>
-          <a:p>
-            <a:pPr marL="0" indent="0" algn="l">
-              <a:buNone/>
-            </a:pPr>
-            <a:r>
-              <a:rPr lang="en-US" sz="1500" b="1" dirty="0">
-                <a:solidFill>
-                  <a:srgbClr val="073B5A"/>
-                </a:solidFill>
-                <a:latin typeface="맑은 고딕" pitchFamily="34" charset="0"/>
-                <a:ea typeface="맑은 고딕" pitchFamily="34" charset="-122"/>
-                <a:cs typeface="맑은 고딕" pitchFamily="34" charset="-120"/>
-              </a:rPr>
-              <a:t>4. 시스템 구조도 / 순서도</a:t>
-            </a:r>
-            <a:endParaRPr lang="en-US" sz="1500" dirty="0"/>
-          </a:p>
-        </p:txBody>
-      </p:sp>
-      <p:sp>
-        <p:nvSpPr>
-          <p:cNvPr id="17" name="Text 15"/>
-          <p:cNvSpPr/>
-          <p:nvPr/>
-        </p:nvSpPr>
-        <p:spPr>
-          <a:xfrm>
-            <a:off x="6473952" y="3035808"/>
-            <a:ext cx="4745736" cy="411480"/>
-          </a:xfrm>
-          <a:prstGeom prst="rect">
-            <a:avLst/>
-          </a:prstGeom>
-          <a:noFill/>
-          <a:ln/>
-        </p:spPr>
-        <p:txBody>
-          <a:bodyPr wrap="square" lIns="508" tIns="508" rIns="508" bIns="508" rtlCol="0" anchor="t">
-            <a:normAutofit/>
-          </a:bodyPr>
-          <a:lstStyle/>
-          <a:p>
-            <a:pPr marL="0" indent="0" algn="l">
-              <a:buNone/>
-            </a:pPr>
-            <a:r>
-              <a:rPr lang="en-US" sz="1000" dirty="0">
-                <a:solidFill>
-                  <a:srgbClr val="111827"/>
-                </a:solidFill>
-                <a:latin typeface="맑은 고딕" pitchFamily="34" charset="0"/>
-                <a:ea typeface="맑은 고딕" pitchFamily="34" charset="-122"/>
-                <a:cs typeface="맑은 고딕" pitchFamily="34" charset="-120"/>
-              </a:rPr>
-              <a:t>유니티 구조도와 주요 플로우차트</a:t>
-            </a:r>
-            <a:endParaRPr lang="en-US" sz="1000" dirty="0"/>
-          </a:p>
-        </p:txBody>
-      </p:sp>
-      <p:sp>
-        <p:nvSpPr>
-          <p:cNvPr id="18" name="Shape 16"/>
-          <p:cNvSpPr/>
-          <p:nvPr/>
-        </p:nvSpPr>
-        <p:spPr>
-          <a:xfrm>
-            <a:off x="777240" y="3977640"/>
-            <a:ext cx="5074920" cy="987552"/>
-          </a:xfrm>
-          <a:prstGeom prst="roundRect">
-            <a:avLst>
-              <a:gd name="adj" fmla="val 7407"/>
-            </a:avLst>
-          </a:prstGeom>
-          <a:solidFill>
-            <a:srgbClr val="EAF3FF"/>
-          </a:solidFill>
-          <a:ln w="10160">
-            <a:solidFill>
-              <a:srgbClr val="E2E8F0"/>
-            </a:solidFill>
-            <a:prstDash val="solid"/>
-          </a:ln>
-        </p:spPr>
-      </p:sp>
-      <p:sp>
-        <p:nvSpPr>
-          <p:cNvPr id="19" name="Text 17"/>
-          <p:cNvSpPr/>
-          <p:nvPr/>
-        </p:nvSpPr>
-        <p:spPr>
-          <a:xfrm>
-            <a:off x="941832" y="4096512"/>
-            <a:ext cx="4745736" cy="274320"/>
-          </a:xfrm>
-          <a:prstGeom prst="rect">
-            <a:avLst/>
-          </a:prstGeom>
-          <a:noFill/>
-          <a:ln/>
-        </p:spPr>
-        <p:txBody>
-          <a:bodyPr wrap="square" lIns="762" tIns="762" rIns="762" bIns="762" rtlCol="0" anchor="ctr">
-            <a:normAutofit/>
-          </a:bodyPr>
-          <a:lstStyle/>
-          <a:p>
-            <a:pPr marL="0" indent="0" algn="l">
-              <a:buNone/>
-            </a:pPr>
-            <a:r>
-              <a:rPr lang="en-US" sz="1500" b="1" dirty="0">
-                <a:solidFill>
-                  <a:srgbClr val="073B5A"/>
-                </a:solidFill>
-                <a:latin typeface="맑은 고딕" pitchFamily="34" charset="0"/>
-                <a:ea typeface="맑은 고딕" pitchFamily="34" charset="-122"/>
-                <a:cs typeface="맑은 고딕" pitchFamily="34" charset="-120"/>
-              </a:rPr>
-              <a:t>5. 리소스</a:t>
-            </a:r>
-            <a:endParaRPr lang="en-US" sz="1500" dirty="0"/>
-          </a:p>
-        </p:txBody>
-      </p:sp>
-      <p:sp>
-        <p:nvSpPr>
-          <p:cNvPr id="20" name="Text 18"/>
-          <p:cNvSpPr/>
-          <p:nvPr/>
-        </p:nvSpPr>
-        <p:spPr>
-          <a:xfrm>
-            <a:off x="941832" y="4453128"/>
-            <a:ext cx="4745736" cy="411480"/>
-          </a:xfrm>
-          <a:prstGeom prst="rect">
-            <a:avLst/>
-          </a:prstGeom>
-          <a:noFill/>
-          <a:ln/>
-        </p:spPr>
-        <p:txBody>
-          <a:bodyPr wrap="square" lIns="508" tIns="508" rIns="508" bIns="508" rtlCol="0" anchor="t">
-            <a:normAutofit/>
-          </a:bodyPr>
-          <a:lstStyle/>
-          <a:p>
-            <a:pPr marL="0" indent="0" algn="l">
-              <a:buNone/>
-            </a:pPr>
-            <a:r>
-              <a:rPr lang="en-US" sz="1000" dirty="0">
-                <a:solidFill>
-                  <a:srgbClr val="111827"/>
-                </a:solidFill>
-                <a:latin typeface="맑은 고딕" pitchFamily="34" charset="0"/>
-                <a:ea typeface="맑은 고딕" pitchFamily="34" charset="-122"/>
-                <a:cs typeface="맑은 고딕" pitchFamily="34" charset="-120"/>
-              </a:rPr>
-              <a:t>UI / 애니메이션 / SFX / VFX / 데이터</a:t>
-            </a:r>
-            <a:endParaRPr lang="en-US" sz="1000" dirty="0"/>
-          </a:p>
-        </p:txBody>
-      </p:sp>
-      <p:sp>
-        <p:nvSpPr>
-          <p:cNvPr id="21" name="Shape 19"/>
-          <p:cNvSpPr/>
-          <p:nvPr/>
-        </p:nvSpPr>
-        <p:spPr>
-          <a:xfrm>
-            <a:off x="6309360" y="3977640"/>
-            <a:ext cx="5074920" cy="987552"/>
-          </a:xfrm>
-          <a:prstGeom prst="roundRect">
-            <a:avLst>
-              <a:gd name="adj" fmla="val 7407"/>
-            </a:avLst>
-          </a:prstGeom>
-          <a:solidFill>
-            <a:srgbClr val="F4F7FA"/>
-          </a:solidFill>
-          <a:ln w="10160">
-            <a:solidFill>
-              <a:srgbClr val="E2E8F0"/>
-            </a:solidFill>
-            <a:prstDash val="solid"/>
-          </a:ln>
-        </p:spPr>
-      </p:sp>
-      <p:sp>
-        <p:nvSpPr>
-          <p:cNvPr id="22" name="Text 20"/>
-          <p:cNvSpPr/>
-          <p:nvPr/>
-        </p:nvSpPr>
-        <p:spPr>
-          <a:xfrm>
-            <a:off x="6473952" y="4096512"/>
-            <a:ext cx="4745736" cy="274320"/>
-          </a:xfrm>
-          <a:prstGeom prst="rect">
-            <a:avLst/>
-          </a:prstGeom>
-          <a:noFill/>
-          <a:ln/>
-        </p:spPr>
-        <p:txBody>
-          <a:bodyPr wrap="square" lIns="762" tIns="762" rIns="762" bIns="762" rtlCol="0" anchor="ctr">
-            <a:normAutofit/>
-          </a:bodyPr>
-          <a:lstStyle/>
-          <a:p>
-            <a:pPr marL="0" indent="0" algn="l">
-              <a:buNone/>
-            </a:pPr>
-            <a:r>
-              <a:rPr lang="en-US" sz="1500" b="1" dirty="0">
-                <a:solidFill>
-                  <a:srgbClr val="073B5A"/>
-                </a:solidFill>
-                <a:latin typeface="맑은 고딕" pitchFamily="34" charset="0"/>
-                <a:ea typeface="맑은 고딕" pitchFamily="34" charset="-122"/>
-                <a:cs typeface="맑은 고딕" pitchFamily="34" charset="-120"/>
-              </a:rPr>
-              <a:t>6. 예외사항 안전장치</a:t>
-            </a:r>
-            <a:endParaRPr lang="en-US" sz="1500" dirty="0"/>
-          </a:p>
-        </p:txBody>
-      </p:sp>
-      <p:sp>
-        <p:nvSpPr>
-          <p:cNvPr id="23" name="Text 21"/>
-          <p:cNvSpPr/>
-          <p:nvPr/>
-        </p:nvSpPr>
-        <p:spPr>
-          <a:xfrm>
-            <a:off x="6473952" y="4453128"/>
-            <a:ext cx="4745736" cy="411480"/>
-          </a:xfrm>
-          <a:prstGeom prst="rect">
-            <a:avLst/>
-          </a:prstGeom>
-          <a:noFill/>
-          <a:ln/>
-        </p:spPr>
-        <p:txBody>
-          <a:bodyPr wrap="square" lIns="508" tIns="508" rIns="508" bIns="508" rtlCol="0" anchor="t">
-            <a:normAutofit/>
-          </a:bodyPr>
-          <a:lstStyle/>
-          <a:p>
-            <a:pPr marL="0" indent="0" algn="l">
-              <a:buNone/>
-            </a:pPr>
-            <a:r>
-              <a:rPr lang="en-US" sz="1000" dirty="0">
-                <a:solidFill>
-                  <a:srgbClr val="111827"/>
-                </a:solidFill>
-                <a:latin typeface="맑은 고딕" pitchFamily="34" charset="0"/>
-                <a:ea typeface="맑은 고딕" pitchFamily="34" charset="-122"/>
-                <a:cs typeface="맑은 고딕" pitchFamily="34" charset="-120"/>
-              </a:rPr>
-              <a:t>규칙 충돌·난이도 붕괴 방지</a:t>
-            </a:r>
-            <a:endParaRPr lang="en-US" sz="1000" dirty="0"/>
-          </a:p>
-        </p:txBody>
-      </p:sp>
     </p:spTree>
+    <p:extLst>
+      <p:ext uri="{BB962C8B-B14F-4D97-AF65-F5344CB8AC3E}">
+        <p14:creationId xmlns:p14="http://schemas.microsoft.com/office/powerpoint/2010/main" val="3457478672"/>
+      </p:ext>
+    </p:extLst>
   </p:cSld>
   <p:clrMapOvr>
     <a:masterClrMapping/>
@@ -34882,10 +36743,10 @@
                 <a:ea typeface="맑은 고딕" pitchFamily="34" charset="-122"/>
                 <a:cs typeface="맑은 고딕" pitchFamily="34" charset="-120"/>
               </a:rPr>
-              <a:t>플로우 </a:t>
-            </a:r>
-            <a:r>
-              <a:rPr lang="ko-KR" altLang="en-US" sz="2000" b="1" smtClean="0">
+              <a:t>플로우 차트 </a:t>
+            </a:r>
+            <a:r>
+              <a:rPr lang="en-US" altLang="ko-KR" sz="2000" b="1">
                 <a:solidFill>
                   <a:srgbClr val="111827"/>
                 </a:solidFill>
@@ -34893,10 +36754,10 @@
                 <a:ea typeface="맑은 고딕" pitchFamily="34" charset="-122"/>
                 <a:cs typeface="맑은 고딕" pitchFamily="34" charset="-120"/>
               </a:rPr>
-              <a:t>차트 </a:t>
-            </a:r>
-            <a:r>
-              <a:rPr lang="en-US" altLang="ko-KR" sz="2000" b="1" smtClean="0">
+              <a:t>– </a:t>
+            </a:r>
+            <a:r>
+              <a:rPr lang="ko-KR" altLang="en-US" sz="2000" b="1">
                 <a:solidFill>
                   <a:srgbClr val="111827"/>
                 </a:solidFill>
@@ -34904,21 +36765,10 @@
                 <a:ea typeface="맑은 고딕" pitchFamily="34" charset="-122"/>
                 <a:cs typeface="맑은 고딕" pitchFamily="34" charset="-120"/>
               </a:rPr>
-              <a:t>– </a:t>
-            </a:r>
-            <a:r>
-              <a:rPr lang="ko-KR" altLang="en-US" sz="2000" b="1" smtClean="0">
-                <a:solidFill>
-                  <a:srgbClr val="111827"/>
-                </a:solidFill>
-                <a:latin typeface="맑은 고딕" pitchFamily="34" charset="0"/>
-                <a:ea typeface="맑은 고딕" pitchFamily="34" charset="-122"/>
-                <a:cs typeface="맑은 고딕" pitchFamily="34" charset="-120"/>
-              </a:rPr>
               <a:t>능력 확장 규칙 </a:t>
             </a:r>
             <a:r>
-              <a:rPr lang="en-US" altLang="ko-KR" sz="2000" b="1" smtClean="0">
+              <a:rPr lang="en-US" altLang="ko-KR" sz="2000" b="1">
                 <a:solidFill>
                   <a:srgbClr val="111827"/>
                 </a:solidFill>
@@ -36373,13 +38223,13 @@
               <a:buNone/>
             </a:pPr>
             <a:r>
-              <a:rPr lang="ko-KR" altLang="en-US" sz="1000" b="1" smtClean="0">
+              <a:rPr lang="ko-KR" altLang="en-US" sz="1000" b="1">
                 <a:latin typeface="맑은 고딕" panose="020B0503020000020004" pitchFamily="50" charset="-127"/>
                 <a:ea typeface="맑은 고딕" panose="020B0503020000020004" pitchFamily="50" charset="-127"/>
               </a:rPr>
               <a:t>들이마시기</a:t>
             </a:r>
-            <a:endParaRPr lang="en-US" altLang="ko-KR" sz="1000" b="1" smtClean="0">
+            <a:endParaRPr lang="en-US" altLang="ko-KR" sz="1000" b="1">
               <a:latin typeface="맑은 고딕" panose="020B0503020000020004" pitchFamily="50" charset="-127"/>
               <a:ea typeface="맑은 고딕" panose="020B0503020000020004" pitchFamily="50" charset="-127"/>
             </a:endParaRPr>
@@ -36389,7 +38239,7 @@
               <a:buNone/>
             </a:pPr>
             <a:r>
-              <a:rPr lang="ko-KR" altLang="en-US" sz="1000" smtClean="0">
+              <a:rPr lang="ko-KR" altLang="en-US" sz="1000">
                 <a:latin typeface="맑은 고딕" panose="020B0503020000020004" pitchFamily="50" charset="-127"/>
                 <a:ea typeface="맑은 고딕" panose="020B0503020000020004" pitchFamily="50" charset="-127"/>
               </a:rPr>
@@ -36519,13 +38369,13 @@
               <a:buNone/>
             </a:pPr>
             <a:r>
-              <a:rPr lang="ko-KR" altLang="en-US" sz="1000" smtClean="0">
+              <a:rPr lang="ko-KR" altLang="en-US" sz="1000">
                 <a:latin typeface="맑은 고딕" panose="020B0503020000020004" pitchFamily="50" charset="-127"/>
                 <a:ea typeface="맑은 고딕" panose="020B0503020000020004" pitchFamily="50" charset="-127"/>
               </a:rPr>
               <a:t>호흡 게이지</a:t>
             </a:r>
-            <a:endParaRPr lang="en-US" altLang="ko-KR" sz="1000" smtClean="0">
+            <a:endParaRPr lang="en-US" altLang="ko-KR" sz="1000">
               <a:latin typeface="맑은 고딕" panose="020B0503020000020004" pitchFamily="50" charset="-127"/>
               <a:ea typeface="맑은 고딕" panose="020B0503020000020004" pitchFamily="50" charset="-127"/>
             </a:endParaRPr>
@@ -36535,7 +38385,7 @@
               <a:buNone/>
             </a:pPr>
             <a:r>
-              <a:rPr lang="ko-KR" altLang="en-US" sz="1000" smtClean="0">
+              <a:rPr lang="ko-KR" altLang="en-US" sz="1000">
                 <a:latin typeface="맑은 고딕" panose="020B0503020000020004" pitchFamily="50" charset="-127"/>
                 <a:ea typeface="맑은 고딕" panose="020B0503020000020004" pitchFamily="50" charset="-127"/>
               </a:rPr>
@@ -36587,7 +38437,7 @@
               <a:buNone/>
             </a:pPr>
             <a:r>
-              <a:rPr lang="ko-KR" altLang="en-US" sz="1000" smtClean="0">
+              <a:rPr lang="ko-KR" altLang="en-US" sz="1000">
                 <a:latin typeface="맑은 고딕" panose="020B0503020000020004" pitchFamily="50" charset="-127"/>
                 <a:ea typeface="맑은 고딕" panose="020B0503020000020004" pitchFamily="50" charset="-127"/>
                 <a:cs typeface="맑은 고딕" pitchFamily="34" charset="-120"/>
@@ -36603,14 +38453,14 @@
               <a:t> </a:t>
             </a:r>
             <a:r>
-              <a:rPr lang="ko-KR" altLang="en-US" sz="1000" smtClean="0">
+              <a:rPr lang="ko-KR" altLang="en-US" sz="1000">
                 <a:latin typeface="맑은 고딕" panose="020B0503020000020004" pitchFamily="50" charset="-127"/>
                 <a:ea typeface="맑은 고딕" panose="020B0503020000020004" pitchFamily="50" charset="-127"/>
               </a:rPr>
               <a:t>키를 계속 누르고 있는가</a:t>
             </a:r>
             <a:r>
-              <a:rPr lang="en-US" altLang="ko-KR" sz="1000" smtClean="0">
+              <a:rPr lang="en-US" altLang="ko-KR" sz="1000">
                 <a:latin typeface="맑은 고딕" panose="020B0503020000020004" pitchFamily="50" charset="-127"/>
                 <a:ea typeface="맑은 고딕" panose="020B0503020000020004" pitchFamily="50" charset="-127"/>
               </a:rPr>
@@ -36662,13 +38512,13 @@
               <a:buNone/>
             </a:pPr>
             <a:r>
-              <a:rPr lang="ko-KR" altLang="en-US" sz="1000" smtClean="0">
+              <a:rPr lang="ko-KR" altLang="en-US" sz="1000">
                 <a:latin typeface="맑은 고딕" panose="020B0503020000020004" pitchFamily="50" charset="-127"/>
                 <a:ea typeface="맑은 고딕" panose="020B0503020000020004" pitchFamily="50" charset="-127"/>
               </a:rPr>
               <a:t>호흡 게이지</a:t>
             </a:r>
-            <a:endParaRPr lang="en-US" altLang="ko-KR" sz="1000" smtClean="0">
+            <a:endParaRPr lang="en-US" altLang="ko-KR" sz="1000">
               <a:latin typeface="맑은 고딕" panose="020B0503020000020004" pitchFamily="50" charset="-127"/>
               <a:ea typeface="맑은 고딕" panose="020B0503020000020004" pitchFamily="50" charset="-127"/>
             </a:endParaRPr>
@@ -36678,7 +38528,7 @@
               <a:buNone/>
             </a:pPr>
             <a:r>
-              <a:rPr lang="ko-KR" altLang="en-US" sz="1000" smtClean="0">
+              <a:rPr lang="ko-KR" altLang="en-US" sz="1000">
                 <a:latin typeface="맑은 고딕" panose="020B0503020000020004" pitchFamily="50" charset="-127"/>
                 <a:ea typeface="맑은 고딕" panose="020B0503020000020004" pitchFamily="50" charset="-127"/>
               </a:rPr>
@@ -36805,7 +38655,7 @@
               <a:buNone/>
             </a:pPr>
             <a:r>
-              <a:rPr lang="ko-KR" altLang="en-US" sz="1000" smtClean="0">
+              <a:rPr lang="ko-KR" altLang="en-US" sz="1000">
                 <a:latin typeface="맑은 고딕" panose="020B0503020000020004" pitchFamily="50" charset="-127"/>
                 <a:ea typeface="맑은 고딕" panose="020B0503020000020004" pitchFamily="50" charset="-127"/>
               </a:rPr>
@@ -36857,7 +38707,7 @@
               <a:buNone/>
             </a:pPr>
             <a:r>
-              <a:rPr lang="ko-KR" altLang="en-US" sz="1000" smtClean="0">
+              <a:rPr lang="ko-KR" altLang="en-US" sz="1000">
                 <a:latin typeface="맑은 고딕" panose="020B0503020000020004" pitchFamily="50" charset="-127"/>
                 <a:ea typeface="맑은 고딕" panose="020B0503020000020004" pitchFamily="50" charset="-127"/>
                 <a:cs typeface="맑은 고딕" pitchFamily="34" charset="-120"/>
@@ -36865,7 +38715,7 @@
               <a:t>숨 참기 키를 눌렀는가</a:t>
             </a:r>
             <a:r>
-              <a:rPr lang="en-US" altLang="ko-KR" sz="1000" smtClean="0">
+              <a:rPr lang="en-US" altLang="ko-KR" sz="1000">
                 <a:latin typeface="맑은 고딕" panose="020B0503020000020004" pitchFamily="50" charset="-127"/>
                 <a:ea typeface="맑은 고딕" panose="020B0503020000020004" pitchFamily="50" charset="-127"/>
                 <a:cs typeface="맑은 고딕" pitchFamily="34" charset="-120"/>
@@ -36918,7 +38768,7 @@
               <a:buNone/>
             </a:pPr>
             <a:r>
-              <a:rPr lang="ko-KR" altLang="en-US" sz="1000" smtClean="0">
+              <a:rPr lang="ko-KR" altLang="en-US" sz="1000">
                 <a:latin typeface="맑은 고딕" panose="020B0503020000020004" pitchFamily="50" charset="-127"/>
                 <a:ea typeface="맑은 고딕" panose="020B0503020000020004" pitchFamily="50" charset="-127"/>
                 <a:cs typeface="맑은 고딕" pitchFamily="34" charset="-120"/>
@@ -36926,7 +38776,7 @@
               <a:t>내뱉기 키를 눌렀는가</a:t>
             </a:r>
             <a:r>
-              <a:rPr lang="en-US" altLang="ko-KR" sz="1000" smtClean="0">
+              <a:rPr lang="en-US" altLang="ko-KR" sz="1000">
                 <a:latin typeface="맑은 고딕" panose="020B0503020000020004" pitchFamily="50" charset="-127"/>
                 <a:ea typeface="맑은 고딕" panose="020B0503020000020004" pitchFamily="50" charset="-127"/>
                 <a:cs typeface="맑은 고딕" pitchFamily="34" charset="-120"/>
@@ -37096,7 +38946,7 @@
               <a:buNone/>
             </a:pPr>
             <a:r>
-              <a:rPr lang="ko-KR" altLang="en-US" sz="1000" smtClean="0">
+              <a:rPr lang="ko-KR" altLang="en-US" sz="1000">
                 <a:latin typeface="맑은 고딕" panose="020B0503020000020004" pitchFamily="50" charset="-127"/>
                 <a:ea typeface="맑은 고딕" panose="020B0503020000020004" pitchFamily="50" charset="-127"/>
               </a:rPr>
@@ -37148,7 +38998,7 @@
               <a:buNone/>
             </a:pPr>
             <a:r>
-              <a:rPr lang="ko-KR" altLang="en-US" sz="1000" smtClean="0">
+              <a:rPr lang="ko-KR" altLang="en-US" sz="1000">
                 <a:latin typeface="맑은 고딕" panose="020B0503020000020004" pitchFamily="50" charset="-127"/>
                 <a:ea typeface="맑은 고딕" panose="020B0503020000020004" pitchFamily="50" charset="-127"/>
               </a:rPr>
@@ -37278,7 +39128,7 @@
               <a:buNone/>
             </a:pPr>
             <a:r>
-              <a:rPr lang="ko-KR" altLang="en-US" sz="1000" smtClean="0">
+              <a:rPr lang="ko-KR" altLang="en-US" sz="1000">
                 <a:latin typeface="맑은 고딕" panose="020B0503020000020004" pitchFamily="50" charset="-127"/>
                 <a:ea typeface="맑은 고딕" panose="020B0503020000020004" pitchFamily="50" charset="-127"/>
                 <a:cs typeface="맑은 고딕" pitchFamily="34" charset="-120"/>
@@ -37286,7 +39136,7 @@
               <a:t>숨 참기 키를 계속 누르고 있는가</a:t>
             </a:r>
             <a:r>
-              <a:rPr lang="en-US" altLang="ko-KR" sz="1000" smtClean="0">
+              <a:rPr lang="en-US" altLang="ko-KR" sz="1000">
                 <a:latin typeface="맑은 고딕" panose="020B0503020000020004" pitchFamily="50" charset="-127"/>
                 <a:ea typeface="맑은 고딕" panose="020B0503020000020004" pitchFamily="50" charset="-127"/>
                 <a:cs typeface="맑은 고딕" pitchFamily="34" charset="-120"/>
@@ -37378,7 +39228,7 @@
               <a:buNone/>
             </a:pPr>
             <a:r>
-              <a:rPr lang="ko-KR" altLang="en-US" sz="1000" smtClean="0">
+              <a:rPr lang="ko-KR" altLang="en-US" sz="1000">
                 <a:latin typeface="맑은 고딕" panose="020B0503020000020004" pitchFamily="50" charset="-127"/>
                 <a:ea typeface="맑은 고딕" panose="020B0503020000020004" pitchFamily="50" charset="-127"/>
               </a:rPr>
@@ -37469,7 +39319,7 @@
               <a:buNone/>
             </a:pPr>
             <a:r>
-              <a:rPr lang="ko-KR" altLang="en-US" sz="1000" smtClean="0">
+              <a:rPr lang="ko-KR" altLang="en-US" sz="1000">
                 <a:latin typeface="맑은 고딕" panose="020B0503020000020004" pitchFamily="50" charset="-127"/>
                 <a:ea typeface="맑은 고딕" panose="020B0503020000020004" pitchFamily="50" charset="-127"/>
               </a:rPr>
@@ -37572,7 +39422,7 @@
           <a:p>
             <a:pPr algn="ctr"/>
             <a:r>
-              <a:rPr lang="ko-KR" altLang="en-US" sz="1000" smtClean="0">
+              <a:rPr lang="ko-KR" altLang="en-US" sz="1000">
                 <a:solidFill>
                   <a:schemeClr val="tx1"/>
                 </a:solidFill>
@@ -37582,7 +39432,7 @@
               <a:t>아주 큰 소음 </a:t>
             </a:r>
             <a:r>
-              <a:rPr lang="en-US" altLang="ko-KR" sz="1000" smtClean="0">
+              <a:rPr lang="en-US" altLang="ko-KR" sz="1000">
                 <a:solidFill>
                   <a:schemeClr val="tx1"/>
                 </a:solidFill>
@@ -37595,7 +39445,7 @@
           <a:p>
             <a:pPr algn="ctr"/>
             <a:r>
-              <a:rPr lang="ko-KR" altLang="en-US" sz="1000" smtClean="0">
+              <a:rPr lang="ko-KR" altLang="en-US" sz="1000">
                 <a:solidFill>
                   <a:schemeClr val="tx1"/>
                 </a:solidFill>
@@ -37665,7 +39515,7 @@
           <a:p>
             <a:pPr algn="ctr"/>
             <a:r>
-              <a:rPr lang="ko-KR" altLang="en-US" sz="1000" smtClean="0">
+              <a:rPr lang="ko-KR" altLang="en-US" sz="1000">
                 <a:solidFill>
                   <a:schemeClr val="tx1"/>
                 </a:solidFill>
@@ -37774,7 +39624,7 @@
           <a:p>
             <a:pPr algn="ctr"/>
             <a:r>
-              <a:rPr lang="ko-KR" altLang="en-US" sz="1000" smtClean="0">
+              <a:rPr lang="ko-KR" altLang="en-US" sz="1000">
                 <a:solidFill>
                   <a:schemeClr val="tx1"/>
                 </a:solidFill>
@@ -37784,7 +39634,7 @@
               <a:t>들이마시는 모션 </a:t>
             </a:r>
             <a:r>
-              <a:rPr lang="en-US" altLang="ko-KR" sz="1000" smtClean="0">
+              <a:rPr lang="en-US" altLang="ko-KR" sz="1000">
                 <a:solidFill>
                   <a:schemeClr val="tx1"/>
                 </a:solidFill>
@@ -37794,7 +39644,7 @@
               <a:t>/ </a:t>
             </a:r>
             <a:r>
-              <a:rPr lang="ko-KR" altLang="en-US" sz="1000" smtClean="0">
+              <a:rPr lang="ko-KR" altLang="en-US" sz="1000">
                 <a:solidFill>
                   <a:schemeClr val="tx1"/>
                 </a:solidFill>
@@ -37944,7 +39794,7 @@
           <a:p>
             <a:pPr algn="ctr"/>
             <a:r>
-              <a:rPr lang="ko-KR" altLang="en-US" sz="1000" smtClean="0">
+              <a:rPr lang="ko-KR" altLang="en-US" sz="1000">
                 <a:solidFill>
                   <a:schemeClr val="tx1"/>
                 </a:solidFill>
@@ -37954,7 +39804,7 @@
               <a:t>큰 소음 </a:t>
             </a:r>
             <a:r>
-              <a:rPr lang="en-US" altLang="ko-KR" sz="1000" smtClean="0">
+              <a:rPr lang="en-US" altLang="ko-KR" sz="1000">
                 <a:solidFill>
                   <a:schemeClr val="tx1"/>
                 </a:solidFill>
@@ -37967,24 +39817,14 @@
           <a:p>
             <a:pPr algn="ctr"/>
             <a:r>
-              <a:rPr lang="ko-KR" altLang="en-US" sz="1000" smtClean="0">
+              <a:rPr lang="ko-KR" altLang="en-US" sz="1000">
                 <a:solidFill>
                   <a:schemeClr val="tx1"/>
                 </a:solidFill>
                 <a:latin typeface="맑은 고딕" panose="020B0503020000020004" pitchFamily="50" charset="-127"/>
                 <a:ea typeface="맑은 고딕" panose="020B0503020000020004" pitchFamily="50" charset="-127"/>
               </a:rPr>
-              <a:t>내뱉</a:t>
-            </a:r>
-            <a:r>
-              <a:rPr lang="ko-KR" altLang="en-US" sz="1000" smtClean="0">
-                <a:solidFill>
-                  <a:schemeClr val="tx1"/>
-                </a:solidFill>
-                <a:latin typeface="맑은 고딕" panose="020B0503020000020004" pitchFamily="50" charset="-127"/>
-                <a:ea typeface="맑은 고딕" panose="020B0503020000020004" pitchFamily="50" charset="-127"/>
-              </a:rPr>
-              <a:t>는 모션</a:t>
+              <a:t>내뱉는 모션</a:t>
             </a:r>
             <a:endParaRPr lang="ko-KR" altLang="en-US" sz="1000" dirty="0">
               <a:solidFill>
@@ -40655,14 +42495,14 @@
           <p:nvPr>
             <p:extLst>
               <p:ext uri="{D42A27DB-BD31-4B8C-83A1-F6EECF244321}">
-                <p14:modId xmlns:p14="http://schemas.microsoft.com/office/powerpoint/2010/main" val="1838687250"/>
+                <p14:modId xmlns:p14="http://schemas.microsoft.com/office/powerpoint/2010/main" val="1766601712"/>
               </p:ext>
             </p:extLst>
           </p:nvPr>
         </p:nvGraphicFramePr>
         <p:xfrm>
-          <a:off x="6311899" y="325863"/>
-          <a:ext cx="5441241" cy="6206274"/>
+          <a:off x="6311899" y="325864"/>
+          <a:ext cx="5441241" cy="6206276"/>
         </p:xfrm>
         <a:graphic>
           <a:graphicData uri="http://schemas.openxmlformats.org/drawingml/2006/table">
@@ -40671,55 +42511,61 @@
                 <a:tableStyleId>{616DA210-FB5B-4158-B5E0-FEB733F419BA}</a:tableStyleId>
               </a:tblPr>
               <a:tblGrid>
-                <a:gridCol w="849155">
+                <a:gridCol w="649757">
                   <a:extLst>
                     <a:ext uri="{9D8B030D-6E8A-4147-A177-3AD203B41FA5}">
                       <a16:colId xmlns:a16="http://schemas.microsoft.com/office/drawing/2014/main" val="2544917600"/>
                     </a:ext>
                   </a:extLst>
                 </a:gridCol>
-                <a:gridCol w="1461135">
+                <a:gridCol w="1118032">
                   <a:extLst>
                     <a:ext uri="{9D8B030D-6E8A-4147-A177-3AD203B41FA5}">
                       <a16:colId xmlns:a16="http://schemas.microsoft.com/office/drawing/2014/main" val="476897612"/>
                     </a:ext>
                   </a:extLst>
                 </a:gridCol>
-                <a:gridCol w="1461135">
+                <a:gridCol w="1000144">
                   <a:extLst>
                     <a:ext uri="{9D8B030D-6E8A-4147-A177-3AD203B41FA5}">
                       <a16:colId xmlns:a16="http://schemas.microsoft.com/office/drawing/2014/main" val="3604146317"/>
                     </a:ext>
                   </a:extLst>
                 </a:gridCol>
-                <a:gridCol w="1669816">
+                <a:gridCol w="1155031">
                   <a:extLst>
                     <a:ext uri="{9D8B030D-6E8A-4147-A177-3AD203B41FA5}">
                       <a16:colId xmlns:a16="http://schemas.microsoft.com/office/drawing/2014/main" val="4273060456"/>
                     </a:ext>
                   </a:extLst>
                 </a:gridCol>
+                <a:gridCol w="1518277">
+                  <a:extLst>
+                    <a:ext uri="{9D8B030D-6E8A-4147-A177-3AD203B41FA5}">
+                      <a16:colId xmlns:a16="http://schemas.microsoft.com/office/drawing/2014/main" val="4190489508"/>
+                    </a:ext>
+                  </a:extLst>
+                </a:gridCol>
               </a:tblGrid>
-              <a:tr h="604155">
+              <a:tr h="582601">
                 <a:tc>
                   <a:txBody>
                     <a:bodyPr/>
                     <a:lstStyle/>
                     <a:p>
-                      <a:pPr algn="ctr" latinLnBrk="1"/>
+                      <a:pPr algn="ctr" latinLnBrk="1">
+                        <a:lnSpc>
+                          <a:spcPct val="150000"/>
+                        </a:lnSpc>
+                      </a:pPr>
                       <a:r>
-                        <a:rPr lang="ko-KR" altLang="en-US" sz="1500" smtClean="0">
+                        <a:rPr lang="ko-KR" altLang="en-US" sz="1500">
                           <a:solidFill>
                             <a:schemeClr val="bg1"/>
                           </a:solidFill>
                         </a:rPr>
                         <a:t>항목</a:t>
                       </a:r>
-                      <a:endParaRPr lang="ko-KR" altLang="en-US" sz="1500">
-                        <a:solidFill>
-                          <a:schemeClr val="bg1"/>
-                        </a:solidFill>
-                      </a:endParaRPr>
                     </a:p>
                   </a:txBody>
                   <a:tcPr anchor="ctr">
@@ -40769,20 +42615,19 @@
                     <a:bodyPr/>
                     <a:lstStyle/>
                     <a:p>
-                      <a:pPr algn="ctr" latinLnBrk="1"/>
+                      <a:pPr algn="ctr" latinLnBrk="1">
+                        <a:lnSpc>
+                          <a:spcPct val="150000"/>
+                        </a:lnSpc>
+                      </a:pPr>
                       <a:r>
-                        <a:rPr lang="ko-KR" altLang="en-US" sz="1500" smtClean="0">
+                        <a:rPr lang="ko-KR" altLang="en-US" sz="1500">
                           <a:solidFill>
                             <a:schemeClr val="bg1"/>
                           </a:solidFill>
                         </a:rPr>
                         <a:t>내용</a:t>
                       </a:r>
-                      <a:endParaRPr lang="ko-KR" altLang="en-US" sz="1500">
-                        <a:solidFill>
-                          <a:schemeClr val="bg1"/>
-                        </a:solidFill>
-                      </a:endParaRPr>
                     </a:p>
                   </a:txBody>
                   <a:tcPr anchor="ctr">
@@ -40836,7 +42681,17 @@
                       <a:endParaRPr lang="ko-KR" altLang="en-US"/>
                     </a:p>
                   </a:txBody>
-                  <a:tcPr/>
+                  <a:tcPr>
+                    <a:lnL w="12700" cap="flat" cmpd="sng" algn="ctr">
+                      <a:solidFill>
+                        <a:schemeClr val="tx1"/>
+                      </a:solidFill>
+                      <a:prstDash val="solid"/>
+                      <a:round/>
+                      <a:headEnd type="none" w="med" len="med"/>
+                      <a:tailEnd type="none" w="med" len="med"/>
+                    </a:lnL>
+                  </a:tcPr>
                 </a:tc>
                 <a:tc hMerge="1">
                   <a:txBody>
@@ -40849,23 +42704,353 @@
                   </a:txBody>
                   <a:tcPr/>
                 </a:tc>
+                <a:tc>
+                  <a:txBody>
+                    <a:bodyPr/>
+                    <a:lstStyle/>
+                    <a:p>
+                      <a:pPr algn="ctr" latinLnBrk="1">
+                        <a:lnSpc>
+                          <a:spcPct val="150000"/>
+                        </a:lnSpc>
+                      </a:pPr>
+                      <a:endParaRPr lang="ko-KR" altLang="en-US" sz="1500">
+                        <a:solidFill>
+                          <a:schemeClr val="bg1"/>
+                        </a:solidFill>
+                      </a:endParaRPr>
+                    </a:p>
+                  </a:txBody>
+                  <a:tcPr anchor="ctr">
+                    <a:lnR w="12700" cap="flat" cmpd="sng" algn="ctr">
+                      <a:solidFill>
+                        <a:schemeClr val="tx1"/>
+                      </a:solidFill>
+                      <a:prstDash val="solid"/>
+                      <a:round/>
+                      <a:headEnd type="none" w="med" len="med"/>
+                      <a:tailEnd type="none" w="med" len="med"/>
+                    </a:lnR>
+                    <a:lnT w="12700" cap="flat" cmpd="sng" algn="ctr">
+                      <a:solidFill>
+                        <a:schemeClr val="tx1"/>
+                      </a:solidFill>
+                      <a:prstDash val="solid"/>
+                      <a:round/>
+                      <a:headEnd type="none" w="med" len="med"/>
+                      <a:tailEnd type="none" w="med" len="med"/>
+                    </a:lnT>
+                    <a:lnB w="12700" cap="flat" cmpd="sng" algn="ctr">
+                      <a:solidFill>
+                        <a:schemeClr val="tx1"/>
+                      </a:solidFill>
+                      <a:prstDash val="solid"/>
+                      <a:round/>
+                      <a:headEnd type="none" w="med" len="med"/>
+                      <a:tailEnd type="none" w="med" len="med"/>
+                    </a:lnB>
+                    <a:solidFill>
+                      <a:srgbClr val="073B5A"/>
+                    </a:solidFill>
+                  </a:tcPr>
+                </a:tc>
                 <a:extLst>
                   <a:ext uri="{0D108BD9-81ED-4DB2-BD59-A6C34878D82A}">
                     <a16:rowId xmlns:a16="http://schemas.microsoft.com/office/drawing/2014/main" val="3304613229"/>
                   </a:ext>
                 </a:extLst>
               </a:tr>
-              <a:tr h="538817">
+              <a:tr h="519595">
                 <a:tc rowSpan="2">
                   <a:txBody>
                     <a:bodyPr/>
                     <a:lstStyle/>
                     <a:p>
-                      <a:pPr algn="ctr" latinLnBrk="1"/>
+                      <a:pPr algn="ctr" latinLnBrk="1">
+                        <a:lnSpc>
+                          <a:spcPct val="150000"/>
+                        </a:lnSpc>
+                      </a:pPr>
                       <a:r>
-                        <a:rPr lang="ko-KR" altLang="en-US" sz="1000" smtClean="0"/>
+                        <a:rPr lang="ko-KR" altLang="en-US" sz="1000"/>
                         <a:t>들이마시기</a:t>
                       </a:r>
+                    </a:p>
+                  </a:txBody>
+                  <a:tcPr anchor="ctr">
+                    <a:lnL w="12700" cap="flat" cmpd="sng" algn="ctr">
+                      <a:solidFill>
+                        <a:schemeClr val="tx1"/>
+                      </a:solidFill>
+                      <a:prstDash val="solid"/>
+                      <a:round/>
+                      <a:headEnd type="none" w="med" len="med"/>
+                      <a:tailEnd type="none" w="med" len="med"/>
+                    </a:lnL>
+                    <a:lnR w="12700" cap="flat" cmpd="sng" algn="ctr">
+                      <a:solidFill>
+                        <a:schemeClr val="tx1"/>
+                      </a:solidFill>
+                      <a:prstDash val="solid"/>
+                      <a:round/>
+                      <a:headEnd type="none" w="med" len="med"/>
+                      <a:tailEnd type="none" w="med" len="med"/>
+                    </a:lnR>
+                    <a:lnT w="12700" cap="flat" cmpd="sng" algn="ctr">
+                      <a:solidFill>
+                        <a:schemeClr val="tx1"/>
+                      </a:solidFill>
+                      <a:prstDash val="solid"/>
+                      <a:round/>
+                      <a:headEnd type="none" w="med" len="med"/>
+                      <a:tailEnd type="none" w="med" len="med"/>
+                    </a:lnT>
+                    <a:lnB w="12700" cap="flat" cmpd="sng" algn="ctr">
+                      <a:solidFill>
+                        <a:schemeClr val="tx1"/>
+                      </a:solidFill>
+                      <a:prstDash val="solid"/>
+                      <a:round/>
+                      <a:headEnd type="none" w="med" len="med"/>
+                      <a:tailEnd type="none" w="med" len="med"/>
+                    </a:lnB>
+                    <a:noFill/>
+                  </a:tcPr>
+                </a:tc>
+                <a:tc>
+                  <a:txBody>
+                    <a:bodyPr/>
+                    <a:lstStyle/>
+                    <a:p>
+                      <a:pPr algn="ctr" latinLnBrk="1">
+                        <a:lnSpc>
+                          <a:spcPct val="150000"/>
+                        </a:lnSpc>
+                      </a:pPr>
+                      <a:r>
+                        <a:rPr lang="ko-KR" altLang="en-US" sz="1000"/>
+                        <a:t>모션</a:t>
+                      </a:r>
+                    </a:p>
+                  </a:txBody>
+                  <a:tcPr anchor="ctr">
+                    <a:lnL w="12700" cap="flat" cmpd="sng" algn="ctr">
+                      <a:solidFill>
+                        <a:schemeClr val="tx1"/>
+                      </a:solidFill>
+                      <a:prstDash val="solid"/>
+                      <a:round/>
+                      <a:headEnd type="none" w="med" len="med"/>
+                      <a:tailEnd type="none" w="med" len="med"/>
+                    </a:lnL>
+                    <a:lnR w="12700" cap="flat" cmpd="sng" algn="ctr">
+                      <a:solidFill>
+                        <a:schemeClr val="tx1"/>
+                      </a:solidFill>
+                      <a:prstDash val="solid"/>
+                      <a:round/>
+                      <a:headEnd type="none" w="med" len="med"/>
+                      <a:tailEnd type="none" w="med" len="med"/>
+                    </a:lnR>
+                    <a:lnT w="12700" cap="flat" cmpd="sng" algn="ctr">
+                      <a:solidFill>
+                        <a:schemeClr val="tx1"/>
+                      </a:solidFill>
+                      <a:prstDash val="solid"/>
+                      <a:round/>
+                      <a:headEnd type="none" w="med" len="med"/>
+                      <a:tailEnd type="none" w="med" len="med"/>
+                    </a:lnT>
+                    <a:lnB w="12700" cap="flat" cmpd="sng" algn="ctr">
+                      <a:solidFill>
+                        <a:schemeClr val="tx1"/>
+                      </a:solidFill>
+                      <a:prstDash val="solid"/>
+                      <a:round/>
+                      <a:headEnd type="none" w="med" len="med"/>
+                      <a:tailEnd type="none" w="med" len="med"/>
+                    </a:lnB>
+                    <a:noFill/>
+                  </a:tcPr>
+                </a:tc>
+                <a:tc>
+                  <a:txBody>
+                    <a:bodyPr/>
+                    <a:lstStyle/>
+                    <a:p>
+                      <a:pPr algn="ctr" latinLnBrk="1">
+                        <a:lnSpc>
+                          <a:spcPct val="150000"/>
+                        </a:lnSpc>
+                      </a:pPr>
+                      <a:r>
+                        <a:rPr lang="ko-KR" altLang="en-US" sz="1000"/>
+                        <a:t>조작키</a:t>
+                      </a:r>
+                    </a:p>
+                  </a:txBody>
+                  <a:tcPr anchor="ctr">
+                    <a:lnL w="12700" cap="flat" cmpd="sng" algn="ctr">
+                      <a:solidFill>
+                        <a:schemeClr val="tx1"/>
+                      </a:solidFill>
+                      <a:prstDash val="solid"/>
+                      <a:round/>
+                      <a:headEnd type="none" w="med" len="med"/>
+                      <a:tailEnd type="none" w="med" len="med"/>
+                    </a:lnL>
+                    <a:lnR w="12700" cap="flat" cmpd="sng" algn="ctr">
+                      <a:solidFill>
+                        <a:schemeClr val="tx1"/>
+                      </a:solidFill>
+                      <a:prstDash val="solid"/>
+                      <a:round/>
+                      <a:headEnd type="none" w="med" len="med"/>
+                      <a:tailEnd type="none" w="med" len="med"/>
+                    </a:lnR>
+                    <a:lnB w="12700" cap="flat" cmpd="sng" algn="ctr">
+                      <a:solidFill>
+                        <a:schemeClr val="tx1"/>
+                      </a:solidFill>
+                      <a:prstDash val="solid"/>
+                      <a:round/>
+                      <a:headEnd type="none" w="med" len="med"/>
+                      <a:tailEnd type="none" w="med" len="med"/>
+                    </a:lnB>
+                    <a:noFill/>
+                  </a:tcPr>
+                </a:tc>
+                <a:tc>
+                  <a:txBody>
+                    <a:bodyPr/>
+                    <a:lstStyle/>
+                    <a:p>
+                      <a:pPr algn="ctr" latinLnBrk="1">
+                        <a:lnSpc>
+                          <a:spcPct val="150000"/>
+                        </a:lnSpc>
+                      </a:pPr>
+                      <a:r>
+                        <a:rPr lang="ko-KR" altLang="en-US" sz="1000" dirty="0"/>
+                        <a:t>게이지</a:t>
+                      </a:r>
+                    </a:p>
+                  </a:txBody>
+                  <a:tcPr anchor="ctr">
+                    <a:lnL w="12700" cap="flat" cmpd="sng" algn="ctr">
+                      <a:solidFill>
+                        <a:schemeClr val="tx1"/>
+                      </a:solidFill>
+                      <a:prstDash val="solid"/>
+                      <a:round/>
+                      <a:headEnd type="none" w="med" len="med"/>
+                      <a:tailEnd type="none" w="med" len="med"/>
+                    </a:lnL>
+                    <a:lnR w="12700" cap="flat" cmpd="sng" algn="ctr">
+                      <a:solidFill>
+                        <a:schemeClr val="tx1"/>
+                      </a:solidFill>
+                      <a:prstDash val="solid"/>
+                      <a:round/>
+                      <a:headEnd type="none" w="med" len="med"/>
+                      <a:tailEnd type="none" w="med" len="med"/>
+                    </a:lnR>
+                    <a:lnB w="12700" cap="flat" cmpd="sng" algn="ctr">
+                      <a:solidFill>
+                        <a:schemeClr val="tx1"/>
+                      </a:solidFill>
+                      <a:prstDash val="solid"/>
+                      <a:round/>
+                      <a:headEnd type="none" w="med" len="med"/>
+                      <a:tailEnd type="none" w="med" len="med"/>
+                    </a:lnB>
+                    <a:noFill/>
+                  </a:tcPr>
+                </a:tc>
+                <a:tc>
+                  <a:txBody>
+                    <a:bodyPr/>
+                    <a:lstStyle/>
+                    <a:p>
+                      <a:pPr algn="ctr" latinLnBrk="1">
+                        <a:lnSpc>
+                          <a:spcPct val="150000"/>
+                        </a:lnSpc>
+                      </a:pPr>
+                      <a:r>
+                        <a:rPr lang="ko-KR" altLang="en-US" sz="1000" dirty="0"/>
+                        <a:t>핵심 규칙 </a:t>
+                      </a:r>
+                      <a:r>
+                        <a:rPr lang="en-US" altLang="ko-KR" sz="1000" dirty="0"/>
+                        <a:t>/ </a:t>
+                      </a:r>
+                    </a:p>
+                    <a:p>
+                      <a:pPr algn="ctr" latinLnBrk="1">
+                        <a:lnSpc>
+                          <a:spcPct val="150000"/>
+                        </a:lnSpc>
+                      </a:pPr>
+                      <a:r>
+                        <a:rPr lang="ko-KR" altLang="en-US" sz="1000" dirty="0"/>
+                        <a:t>플레이 영향</a:t>
+                      </a:r>
+                    </a:p>
+                  </a:txBody>
+                  <a:tcPr anchor="ctr">
+                    <a:lnL w="12700" cap="flat" cmpd="sng" algn="ctr">
+                      <a:solidFill>
+                        <a:schemeClr val="tx1"/>
+                      </a:solidFill>
+                      <a:prstDash val="solid"/>
+                      <a:round/>
+                      <a:headEnd type="none" w="med" len="med"/>
+                      <a:tailEnd type="none" w="med" len="med"/>
+                    </a:lnL>
+                    <a:lnR w="12700" cap="flat" cmpd="sng" algn="ctr">
+                      <a:solidFill>
+                        <a:schemeClr val="tx1"/>
+                      </a:solidFill>
+                      <a:prstDash val="solid"/>
+                      <a:round/>
+                      <a:headEnd type="none" w="med" len="med"/>
+                      <a:tailEnd type="none" w="med" len="med"/>
+                    </a:lnR>
+                    <a:lnT w="12700" cap="flat" cmpd="sng" algn="ctr">
+                      <a:solidFill>
+                        <a:schemeClr val="tx1"/>
+                      </a:solidFill>
+                      <a:prstDash val="solid"/>
+                      <a:round/>
+                      <a:headEnd type="none" w="med" len="med"/>
+                      <a:tailEnd type="none" w="med" len="med"/>
+                    </a:lnT>
+                    <a:lnB w="12700" cap="flat" cmpd="sng" algn="ctr">
+                      <a:solidFill>
+                        <a:schemeClr val="tx1"/>
+                      </a:solidFill>
+                      <a:prstDash val="solid"/>
+                      <a:round/>
+                      <a:headEnd type="none" w="med" len="med"/>
+                      <a:tailEnd type="none" w="med" len="med"/>
+                    </a:lnB>
+                    <a:noFill/>
+                  </a:tcPr>
+                </a:tc>
+                <a:extLst>
+                  <a:ext uri="{0D108BD9-81ED-4DB2-BD59-A6C34878D82A}">
+                    <a16:rowId xmlns:a16="http://schemas.microsoft.com/office/drawing/2014/main" val="132766970"/>
+                  </a:ext>
+                </a:extLst>
+              </a:tr>
+              <a:tr h="1276020">
+                <a:tc vMerge="1">
+                  <a:txBody>
+                    <a:bodyPr/>
+                    <a:lstStyle/>
+                    <a:p>
+                      <a:pPr algn="ctr" latinLnBrk="1"/>
                       <a:endParaRPr lang="ko-KR" altLang="en-US" sz="1000"/>
                     </a:p>
                   </a:txBody>
@@ -40914,12 +43099,260 @@
                     <a:bodyPr/>
                     <a:lstStyle/>
                     <a:p>
-                      <a:pPr algn="ctr" latinLnBrk="1"/>
+                      <a:pPr algn="ctr" latinLnBrk="1">
+                        <a:lnSpc>
+                          <a:spcPct val="150000"/>
+                        </a:lnSpc>
+                      </a:pPr>
+                      <a:endParaRPr lang="ko-KR" altLang="en-US" sz="1000"/>
+                    </a:p>
+                  </a:txBody>
+                  <a:tcPr anchor="ctr">
+                    <a:lnL w="12700" cap="flat" cmpd="sng" algn="ctr">
+                      <a:solidFill>
+                        <a:schemeClr val="tx1"/>
+                      </a:solidFill>
+                      <a:prstDash val="solid"/>
+                      <a:round/>
+                      <a:headEnd type="none" w="med" len="med"/>
+                      <a:tailEnd type="none" w="med" len="med"/>
+                    </a:lnL>
+                    <a:lnR w="12700" cap="flat" cmpd="sng" algn="ctr">
+                      <a:solidFill>
+                        <a:schemeClr val="tx1"/>
+                      </a:solidFill>
+                      <a:prstDash val="solid"/>
+                      <a:round/>
+                      <a:headEnd type="none" w="med" len="med"/>
+                      <a:tailEnd type="none" w="med" len="med"/>
+                    </a:lnR>
+                    <a:lnT w="12700" cap="flat" cmpd="sng" algn="ctr">
+                      <a:solidFill>
+                        <a:schemeClr val="tx1"/>
+                      </a:solidFill>
+                      <a:prstDash val="solid"/>
+                      <a:round/>
+                      <a:headEnd type="none" w="med" len="med"/>
+                      <a:tailEnd type="none" w="med" len="med"/>
+                    </a:lnT>
+                    <a:lnB w="12700" cap="flat" cmpd="sng" algn="ctr">
+                      <a:solidFill>
+                        <a:schemeClr val="tx1"/>
+                      </a:solidFill>
+                      <a:prstDash val="solid"/>
+                      <a:round/>
+                      <a:headEnd type="none" w="med" len="med"/>
+                      <a:tailEnd type="none" w="med" len="med"/>
+                    </a:lnB>
+                  </a:tcPr>
+                </a:tc>
+                <a:tc>
+                  <a:txBody>
+                    <a:bodyPr/>
+                    <a:lstStyle/>
+                    <a:p>
+                      <a:pPr algn="ctr" latinLnBrk="1">
+                        <a:lnSpc>
+                          <a:spcPct val="150000"/>
+                        </a:lnSpc>
+                      </a:pPr>
+                      <a:endParaRPr lang="ko-KR" altLang="en-US" sz="1000"/>
+                    </a:p>
+                  </a:txBody>
+                  <a:tcPr anchor="ctr">
+                    <a:lnL w="12700" cap="flat" cmpd="sng" algn="ctr">
+                      <a:solidFill>
+                        <a:schemeClr val="tx1"/>
+                      </a:solidFill>
+                      <a:prstDash val="solid"/>
+                      <a:round/>
+                      <a:headEnd type="none" w="med" len="med"/>
+                      <a:tailEnd type="none" w="med" len="med"/>
+                    </a:lnL>
+                    <a:lnR w="12700" cap="flat" cmpd="sng" algn="ctr">
+                      <a:solidFill>
+                        <a:schemeClr val="tx1"/>
+                      </a:solidFill>
+                      <a:prstDash val="solid"/>
+                      <a:round/>
+                      <a:headEnd type="none" w="med" len="med"/>
+                      <a:tailEnd type="none" w="med" len="med"/>
+                    </a:lnR>
+                    <a:lnT w="12700" cap="flat" cmpd="sng" algn="ctr">
+                      <a:solidFill>
+                        <a:schemeClr val="tx1"/>
+                      </a:solidFill>
+                      <a:prstDash val="solid"/>
+                      <a:round/>
+                      <a:headEnd type="none" w="med" len="med"/>
+                      <a:tailEnd type="none" w="med" len="med"/>
+                    </a:lnT>
+                    <a:lnB w="12700" cap="flat" cmpd="sng" algn="ctr">
+                      <a:solidFill>
+                        <a:schemeClr val="tx1"/>
+                      </a:solidFill>
+                      <a:prstDash val="solid"/>
+                      <a:round/>
+                      <a:headEnd type="none" w="med" len="med"/>
+                      <a:tailEnd type="none" w="med" len="med"/>
+                    </a:lnB>
+                  </a:tcPr>
+                </a:tc>
+                <a:tc>
+                  <a:txBody>
+                    <a:bodyPr/>
+                    <a:lstStyle/>
+                    <a:p>
+                      <a:pPr algn="ctr" latinLnBrk="1">
+                        <a:lnSpc>
+                          <a:spcPct val="150000"/>
+                        </a:lnSpc>
+                      </a:pPr>
+                      <a:endParaRPr lang="ko-KR" altLang="en-US" sz="1000"/>
+                    </a:p>
+                  </a:txBody>
+                  <a:tcPr anchor="ctr">
+                    <a:lnL w="12700" cap="flat" cmpd="sng" algn="ctr">
+                      <a:solidFill>
+                        <a:schemeClr val="tx1"/>
+                      </a:solidFill>
+                      <a:prstDash val="solid"/>
+                      <a:round/>
+                      <a:headEnd type="none" w="med" len="med"/>
+                      <a:tailEnd type="none" w="med" len="med"/>
+                    </a:lnL>
+                    <a:lnR w="12700" cap="flat" cmpd="sng" algn="ctr">
+                      <a:solidFill>
+                        <a:schemeClr val="tx1"/>
+                      </a:solidFill>
+                      <a:prstDash val="solid"/>
+                      <a:round/>
+                      <a:headEnd type="none" w="med" len="med"/>
+                      <a:tailEnd type="none" w="med" len="med"/>
+                    </a:lnR>
+                    <a:lnT w="12700" cap="flat" cmpd="sng" algn="ctr">
+                      <a:solidFill>
+                        <a:schemeClr val="tx1"/>
+                      </a:solidFill>
+                      <a:prstDash val="solid"/>
+                      <a:round/>
+                      <a:headEnd type="none" w="med" len="med"/>
+                      <a:tailEnd type="none" w="med" len="med"/>
+                    </a:lnT>
+                    <a:lnB w="12700" cap="flat" cmpd="sng" algn="ctr">
+                      <a:solidFill>
+                        <a:schemeClr val="tx1"/>
+                      </a:solidFill>
+                      <a:prstDash val="solid"/>
+                      <a:round/>
+                      <a:headEnd type="none" w="med" len="med"/>
+                      <a:tailEnd type="none" w="med" len="med"/>
+                    </a:lnB>
+                  </a:tcPr>
+                </a:tc>
+                <a:tc>
+                  <a:txBody>
+                    <a:bodyPr/>
+                    <a:lstStyle/>
+                    <a:p>
+                      <a:pPr algn="ctr" latinLnBrk="1">
+                        <a:lnSpc>
+                          <a:spcPct val="150000"/>
+                        </a:lnSpc>
+                      </a:pPr>
                       <a:r>
-                        <a:rPr lang="ko-KR" altLang="en-US" sz="1000" smtClean="0"/>
-                        <a:t>모션</a:t>
+                        <a:rPr lang="ko-KR" altLang="en-US" sz="1000" dirty="0"/>
+                        <a:t>숨 참기 진입 전</a:t>
                       </a:r>
-                      <a:endParaRPr lang="ko-KR" altLang="en-US" sz="1000"/>
+                      <a:endParaRPr lang="en-US" altLang="ko-KR" sz="1000" dirty="0"/>
+                    </a:p>
+                    <a:p>
+                      <a:pPr algn="ctr" latinLnBrk="1">
+                        <a:lnSpc>
+                          <a:spcPct val="150000"/>
+                        </a:lnSpc>
+                      </a:pPr>
+                      <a:r>
+                        <a:rPr lang="ko-KR" altLang="en-US" sz="1000" dirty="0"/>
+                        <a:t>선행 행동 </a:t>
+                      </a:r>
+                      <a:r>
+                        <a:rPr lang="en-US" altLang="ko-KR" sz="1000" dirty="0"/>
+                        <a:t>/</a:t>
+                      </a:r>
+                    </a:p>
+                    <a:p>
+                      <a:pPr algn="ctr" latinLnBrk="1">
+                        <a:lnSpc>
+                          <a:spcPct val="150000"/>
+                        </a:lnSpc>
+                      </a:pPr>
+                      <a:r>
+                        <a:rPr lang="ko-KR" altLang="en-US" sz="1000" dirty="0"/>
+                        <a:t>짧은 들숨 소음 발생</a:t>
+                      </a:r>
+                    </a:p>
+                  </a:txBody>
+                  <a:tcPr anchor="ctr">
+                    <a:lnL w="12700" cap="flat" cmpd="sng" algn="ctr">
+                      <a:solidFill>
+                        <a:schemeClr val="tx1"/>
+                      </a:solidFill>
+                      <a:prstDash val="solid"/>
+                      <a:round/>
+                      <a:headEnd type="none" w="med" len="med"/>
+                      <a:tailEnd type="none" w="med" len="med"/>
+                    </a:lnL>
+                    <a:lnR w="12700" cap="flat" cmpd="sng" algn="ctr">
+                      <a:solidFill>
+                        <a:schemeClr val="tx1"/>
+                      </a:solidFill>
+                      <a:prstDash val="solid"/>
+                      <a:round/>
+                      <a:headEnd type="none" w="med" len="med"/>
+                      <a:tailEnd type="none" w="med" len="med"/>
+                    </a:lnR>
+                    <a:lnT w="12700" cap="flat" cmpd="sng" algn="ctr">
+                      <a:solidFill>
+                        <a:schemeClr val="tx1"/>
+                      </a:solidFill>
+                      <a:prstDash val="solid"/>
+                      <a:round/>
+                      <a:headEnd type="none" w="med" len="med"/>
+                      <a:tailEnd type="none" w="med" len="med"/>
+                    </a:lnT>
+                    <a:lnB w="12700" cap="flat" cmpd="sng" algn="ctr">
+                      <a:solidFill>
+                        <a:schemeClr val="tx1"/>
+                      </a:solidFill>
+                      <a:prstDash val="solid"/>
+                      <a:round/>
+                      <a:headEnd type="none" w="med" len="med"/>
+                      <a:tailEnd type="none" w="med" len="med"/>
+                    </a:lnB>
+                  </a:tcPr>
+                </a:tc>
+                <a:extLst>
+                  <a:ext uri="{0D108BD9-81ED-4DB2-BD59-A6C34878D82A}">
+                    <a16:rowId xmlns:a16="http://schemas.microsoft.com/office/drawing/2014/main" val="4150700937"/>
+                  </a:ext>
+                </a:extLst>
+              </a:tr>
+              <a:tr h="1276020">
+                <a:tc>
+                  <a:txBody>
+                    <a:bodyPr/>
+                    <a:lstStyle/>
+                    <a:p>
+                      <a:pPr algn="ctr" latinLnBrk="1">
+                        <a:lnSpc>
+                          <a:spcPct val="150000"/>
+                        </a:lnSpc>
+                      </a:pPr>
+                      <a:r>
+                        <a:rPr lang="ko-KR" altLang="en-US" sz="1000" dirty="0"/>
+                        <a:t>숨 참기</a:t>
+                      </a:r>
                     </a:p>
                   </a:txBody>
                   <a:tcPr anchor="ctr">
@@ -40967,12 +43400,12 @@
                     <a:bodyPr/>
                     <a:lstStyle/>
                     <a:p>
-                      <a:pPr algn="ctr" latinLnBrk="1"/>
-                      <a:r>
-                        <a:rPr lang="ko-KR" altLang="en-US" sz="1000" smtClean="0"/>
-                        <a:t>조작키</a:t>
-                      </a:r>
-                      <a:endParaRPr lang="ko-KR" altLang="en-US" sz="1000"/>
+                      <a:pPr algn="ctr" latinLnBrk="1">
+                        <a:lnSpc>
+                          <a:spcPct val="150000"/>
+                        </a:lnSpc>
+                      </a:pPr>
+                      <a:endParaRPr lang="ko-KR" altLang="en-US" sz="1000" dirty="0"/>
                     </a:p>
                   </a:txBody>
                   <a:tcPr anchor="ctr">
@@ -41020,234 +43453,12 @@
                     <a:bodyPr/>
                     <a:lstStyle/>
                     <a:p>
-                      <a:pPr algn="ctr" latinLnBrk="1"/>
-                      <a:r>
-                        <a:rPr lang="ko-KR" altLang="en-US" sz="1000" smtClean="0"/>
-                        <a:t>게이지</a:t>
-                      </a:r>
-                      <a:endParaRPr lang="ko-KR" altLang="en-US" sz="1000"/>
-                    </a:p>
-                  </a:txBody>
-                  <a:tcPr anchor="ctr">
-                    <a:lnL w="12700" cap="flat" cmpd="sng" algn="ctr">
-                      <a:solidFill>
-                        <a:schemeClr val="tx1"/>
-                      </a:solidFill>
-                      <a:prstDash val="solid"/>
-                      <a:round/>
-                      <a:headEnd type="none" w="med" len="med"/>
-                      <a:tailEnd type="none" w="med" len="med"/>
-                    </a:lnL>
-                    <a:lnR w="12700" cap="flat" cmpd="sng" algn="ctr">
-                      <a:solidFill>
-                        <a:schemeClr val="tx1"/>
-                      </a:solidFill>
-                      <a:prstDash val="solid"/>
-                      <a:round/>
-                      <a:headEnd type="none" w="med" len="med"/>
-                      <a:tailEnd type="none" w="med" len="med"/>
-                    </a:lnR>
-                    <a:lnT w="12700" cap="flat" cmpd="sng" algn="ctr">
-                      <a:solidFill>
-                        <a:schemeClr val="tx1"/>
-                      </a:solidFill>
-                      <a:prstDash val="solid"/>
-                      <a:round/>
-                      <a:headEnd type="none" w="med" len="med"/>
-                      <a:tailEnd type="none" w="med" len="med"/>
-                    </a:lnT>
-                    <a:lnB w="12700" cap="flat" cmpd="sng" algn="ctr">
-                      <a:solidFill>
-                        <a:schemeClr val="tx1"/>
-                      </a:solidFill>
-                      <a:prstDash val="solid"/>
-                      <a:round/>
-                      <a:headEnd type="none" w="med" len="med"/>
-                      <a:tailEnd type="none" w="med" len="med"/>
-                    </a:lnB>
-                    <a:noFill/>
-                  </a:tcPr>
-                </a:tc>
-                <a:extLst>
-                  <a:ext uri="{0D108BD9-81ED-4DB2-BD59-A6C34878D82A}">
-                    <a16:rowId xmlns:a16="http://schemas.microsoft.com/office/drawing/2014/main" val="132766970"/>
-                  </a:ext>
-                </a:extLst>
-              </a:tr>
-              <a:tr h="1323227">
-                <a:tc vMerge="1">
-                  <a:txBody>
-                    <a:bodyPr/>
-                    <a:lstStyle/>
-                    <a:p>
-                      <a:pPr algn="ctr" latinLnBrk="1"/>
-                      <a:endParaRPr lang="ko-KR" altLang="en-US" sz="1000"/>
-                    </a:p>
-                  </a:txBody>
-                  <a:tcPr/>
-                </a:tc>
-                <a:tc>
-                  <a:txBody>
-                    <a:bodyPr/>
-                    <a:lstStyle/>
-                    <a:p>
-                      <a:pPr algn="ctr" latinLnBrk="1"/>
-                      <a:endParaRPr lang="ko-KR" altLang="en-US" sz="1000"/>
-                    </a:p>
-                  </a:txBody>
-                  <a:tcPr anchor="ctr">
-                    <a:lnL w="12700" cap="flat" cmpd="sng" algn="ctr">
-                      <a:solidFill>
-                        <a:schemeClr val="tx1"/>
-                      </a:solidFill>
-                      <a:prstDash val="solid"/>
-                      <a:round/>
-                      <a:headEnd type="none" w="med" len="med"/>
-                      <a:tailEnd type="none" w="med" len="med"/>
-                    </a:lnL>
-                    <a:lnR w="12700" cap="flat" cmpd="sng" algn="ctr">
-                      <a:solidFill>
-                        <a:schemeClr val="tx1"/>
-                      </a:solidFill>
-                      <a:prstDash val="solid"/>
-                      <a:round/>
-                      <a:headEnd type="none" w="med" len="med"/>
-                      <a:tailEnd type="none" w="med" len="med"/>
-                    </a:lnR>
-                    <a:lnT w="12700" cap="flat" cmpd="sng" algn="ctr">
-                      <a:solidFill>
-                        <a:schemeClr val="tx1"/>
-                      </a:solidFill>
-                      <a:prstDash val="solid"/>
-                      <a:round/>
-                      <a:headEnd type="none" w="med" len="med"/>
-                      <a:tailEnd type="none" w="med" len="med"/>
-                    </a:lnT>
-                    <a:lnB w="12700" cap="flat" cmpd="sng" algn="ctr">
-                      <a:solidFill>
-                        <a:schemeClr val="tx1"/>
-                      </a:solidFill>
-                      <a:prstDash val="solid"/>
-                      <a:round/>
-                      <a:headEnd type="none" w="med" len="med"/>
-                      <a:tailEnd type="none" w="med" len="med"/>
-                    </a:lnB>
-                  </a:tcPr>
-                </a:tc>
-                <a:tc>
-                  <a:txBody>
-                    <a:bodyPr/>
-                    <a:lstStyle/>
-                    <a:p>
-                      <a:pPr algn="ctr" latinLnBrk="1"/>
-                      <a:endParaRPr lang="ko-KR" altLang="en-US" sz="1000"/>
-                    </a:p>
-                  </a:txBody>
-                  <a:tcPr anchor="ctr">
-                    <a:lnL w="12700" cap="flat" cmpd="sng" algn="ctr">
-                      <a:solidFill>
-                        <a:schemeClr val="tx1"/>
-                      </a:solidFill>
-                      <a:prstDash val="solid"/>
-                      <a:round/>
-                      <a:headEnd type="none" w="med" len="med"/>
-                      <a:tailEnd type="none" w="med" len="med"/>
-                    </a:lnL>
-                    <a:lnR w="12700" cap="flat" cmpd="sng" algn="ctr">
-                      <a:solidFill>
-                        <a:schemeClr val="tx1"/>
-                      </a:solidFill>
-                      <a:prstDash val="solid"/>
-                      <a:round/>
-                      <a:headEnd type="none" w="med" len="med"/>
-                      <a:tailEnd type="none" w="med" len="med"/>
-                    </a:lnR>
-                    <a:lnT w="12700" cap="flat" cmpd="sng" algn="ctr">
-                      <a:solidFill>
-                        <a:schemeClr val="tx1"/>
-                      </a:solidFill>
-                      <a:prstDash val="solid"/>
-                      <a:round/>
-                      <a:headEnd type="none" w="med" len="med"/>
-                      <a:tailEnd type="none" w="med" len="med"/>
-                    </a:lnT>
-                    <a:lnB w="12700" cap="flat" cmpd="sng" algn="ctr">
-                      <a:solidFill>
-                        <a:schemeClr val="tx1"/>
-                      </a:solidFill>
-                      <a:prstDash val="solid"/>
-                      <a:round/>
-                      <a:headEnd type="none" w="med" len="med"/>
-                      <a:tailEnd type="none" w="med" len="med"/>
-                    </a:lnB>
-                  </a:tcPr>
-                </a:tc>
-                <a:tc>
-                  <a:txBody>
-                    <a:bodyPr/>
-                    <a:lstStyle/>
-                    <a:p>
-                      <a:pPr algn="ctr" latinLnBrk="1"/>
-                      <a:endParaRPr lang="ko-KR" altLang="en-US" sz="1000"/>
-                    </a:p>
-                  </a:txBody>
-                  <a:tcPr anchor="ctr">
-                    <a:lnL w="12700" cap="flat" cmpd="sng" algn="ctr">
-                      <a:solidFill>
-                        <a:schemeClr val="tx1"/>
-                      </a:solidFill>
-                      <a:prstDash val="solid"/>
-                      <a:round/>
-                      <a:headEnd type="none" w="med" len="med"/>
-                      <a:tailEnd type="none" w="med" len="med"/>
-                    </a:lnL>
-                    <a:lnR w="12700" cap="flat" cmpd="sng" algn="ctr">
-                      <a:solidFill>
-                        <a:schemeClr val="tx1"/>
-                      </a:solidFill>
-                      <a:prstDash val="solid"/>
-                      <a:round/>
-                      <a:headEnd type="none" w="med" len="med"/>
-                      <a:tailEnd type="none" w="med" len="med"/>
-                    </a:lnR>
-                    <a:lnT w="12700" cap="flat" cmpd="sng" algn="ctr">
-                      <a:solidFill>
-                        <a:schemeClr val="tx1"/>
-                      </a:solidFill>
-                      <a:prstDash val="solid"/>
-                      <a:round/>
-                      <a:headEnd type="none" w="med" len="med"/>
-                      <a:tailEnd type="none" w="med" len="med"/>
-                    </a:lnT>
-                    <a:lnB w="12700" cap="flat" cmpd="sng" algn="ctr">
-                      <a:solidFill>
-                        <a:schemeClr val="tx1"/>
-                      </a:solidFill>
-                      <a:prstDash val="solid"/>
-                      <a:round/>
-                      <a:headEnd type="none" w="med" len="med"/>
-                      <a:tailEnd type="none" w="med" len="med"/>
-                    </a:lnB>
-                  </a:tcPr>
-                </a:tc>
-                <a:extLst>
-                  <a:ext uri="{0D108BD9-81ED-4DB2-BD59-A6C34878D82A}">
-                    <a16:rowId xmlns:a16="http://schemas.microsoft.com/office/drawing/2014/main" val="4150700937"/>
-                  </a:ext>
-                </a:extLst>
-              </a:tr>
-              <a:tr h="520363">
-                <a:tc rowSpan="2">
-                  <a:txBody>
-                    <a:bodyPr/>
-                    <a:lstStyle/>
-                    <a:p>
-                      <a:pPr algn="ctr" latinLnBrk="1"/>
-                      <a:r>
-                        <a:rPr lang="ko-KR" altLang="en-US" sz="1000" smtClean="0"/>
-                        <a:t>숨 참기</a:t>
-                      </a:r>
-                      <a:endParaRPr lang="ko-KR" altLang="en-US" sz="1000"/>
+                      <a:pPr algn="ctr" latinLnBrk="1">
+                        <a:lnSpc>
+                          <a:spcPct val="150000"/>
+                        </a:lnSpc>
+                      </a:pPr>
+                      <a:endParaRPr lang="ko-KR" altLang="en-US" sz="1000" dirty="0"/>
                     </a:p>
                   </a:txBody>
                   <a:tcPr anchor="ctr">
@@ -41295,12 +43506,12 @@
                     <a:bodyPr/>
                     <a:lstStyle/>
                     <a:p>
-                      <a:pPr algn="ctr" latinLnBrk="1"/>
-                      <a:r>
-                        <a:rPr lang="ko-KR" altLang="en-US" sz="1000" smtClean="0"/>
-                        <a:t>모션</a:t>
-                      </a:r>
-                      <a:endParaRPr lang="ko-KR" altLang="en-US" sz="1000"/>
+                      <a:pPr algn="ctr" latinLnBrk="1">
+                        <a:lnSpc>
+                          <a:spcPct val="150000"/>
+                        </a:lnSpc>
+                      </a:pPr>
+                      <a:endParaRPr lang="ko-KR" altLang="en-US" sz="1000" dirty="0"/>
                     </a:p>
                   </a:txBody>
                   <a:tcPr anchor="ctr">
@@ -41348,12 +43559,105 @@
                     <a:bodyPr/>
                     <a:lstStyle/>
                     <a:p>
-                      <a:pPr algn="ctr" latinLnBrk="1"/>
+                      <a:pPr algn="ctr" latinLnBrk="1">
+                        <a:lnSpc>
+                          <a:spcPct val="150000"/>
+                        </a:lnSpc>
+                      </a:pPr>
                       <a:r>
-                        <a:rPr lang="ko-KR" altLang="en-US" sz="1000" smtClean="0"/>
-                        <a:t>조작키</a:t>
+                        <a:rPr lang="ko-KR" altLang="en-US" sz="1000" dirty="0"/>
+                        <a:t>유지 중 호흡 게이지</a:t>
                       </a:r>
-                      <a:endParaRPr lang="ko-KR" altLang="en-US" sz="1000"/>
+                      <a:endParaRPr lang="en-US" altLang="ko-KR" sz="1000" dirty="0"/>
+                    </a:p>
+                    <a:p>
+                      <a:pPr algn="ctr" latinLnBrk="1">
+                        <a:lnSpc>
+                          <a:spcPct val="150000"/>
+                        </a:lnSpc>
+                      </a:pPr>
+                      <a:r>
+                        <a:rPr lang="ko-KR" altLang="en-US" sz="1000" dirty="0"/>
+                        <a:t>계속 감소 </a:t>
+                      </a:r>
+                      <a:r>
+                        <a:rPr lang="en-US" altLang="ko-KR" sz="1000" dirty="0"/>
+                        <a:t>/ </a:t>
+                      </a:r>
+                    </a:p>
+                    <a:p>
+                      <a:pPr algn="ctr" latinLnBrk="1">
+                        <a:lnSpc>
+                          <a:spcPct val="150000"/>
+                        </a:lnSpc>
+                      </a:pPr>
+                      <a:r>
+                        <a:rPr lang="ko-KR" altLang="en-US" sz="1000" dirty="0"/>
+                        <a:t>호흡 소음 억제</a:t>
+                      </a:r>
+                    </a:p>
+                  </a:txBody>
+                  <a:tcPr anchor="ctr">
+                    <a:lnL w="12700" cap="flat" cmpd="sng" algn="ctr">
+                      <a:solidFill>
+                        <a:schemeClr val="tx1"/>
+                      </a:solidFill>
+                      <a:prstDash val="solid"/>
+                      <a:round/>
+                      <a:headEnd type="none" w="med" len="med"/>
+                      <a:tailEnd type="none" w="med" len="med"/>
+                    </a:lnL>
+                    <a:lnR w="12700" cap="flat" cmpd="sng" algn="ctr">
+                      <a:solidFill>
+                        <a:schemeClr val="tx1"/>
+                      </a:solidFill>
+                      <a:prstDash val="solid"/>
+                      <a:round/>
+                      <a:headEnd type="none" w="med" len="med"/>
+                      <a:tailEnd type="none" w="med" len="med"/>
+                    </a:lnR>
+                    <a:lnT w="12700" cap="flat" cmpd="sng" algn="ctr">
+                      <a:solidFill>
+                        <a:schemeClr val="tx1"/>
+                      </a:solidFill>
+                      <a:prstDash val="solid"/>
+                      <a:round/>
+                      <a:headEnd type="none" w="med" len="med"/>
+                      <a:tailEnd type="none" w="med" len="med"/>
+                    </a:lnT>
+                    <a:lnB w="12700" cap="flat" cmpd="sng" algn="ctr">
+                      <a:solidFill>
+                        <a:schemeClr val="tx1"/>
+                      </a:solidFill>
+                      <a:prstDash val="solid"/>
+                      <a:round/>
+                      <a:headEnd type="none" w="med" len="med"/>
+                      <a:tailEnd type="none" w="med" len="med"/>
+                    </a:lnB>
+                    <a:noFill/>
+                  </a:tcPr>
+                </a:tc>
+                <a:extLst>
+                  <a:ext uri="{0D108BD9-81ED-4DB2-BD59-A6C34878D82A}">
+                    <a16:rowId xmlns:a16="http://schemas.microsoft.com/office/drawing/2014/main" val="2702937608"/>
+                  </a:ext>
+                </a:extLst>
+              </a:tr>
+              <a:tr h="1276020">
+                <a:tc>
+                  <a:txBody>
+                    <a:bodyPr/>
+                    <a:lstStyle/>
+                    <a:p>
+                      <a:pPr algn="ctr" latinLnBrk="1">
+                        <a:lnSpc>
+                          <a:spcPct val="150000"/>
+                        </a:lnSpc>
+                      </a:pPr>
+                      <a:r>
+                        <a:rPr lang="ko-KR" altLang="en-US" sz="1000" dirty="0"/>
+                        <a:t>내뱉기</a:t>
+                      </a:r>
                     </a:p>
                   </a:txBody>
                   <a:tcPr anchor="ctr">
@@ -41401,79 +43705,12 @@
                     <a:bodyPr/>
                     <a:lstStyle/>
                     <a:p>
-                      <a:pPr algn="ctr" latinLnBrk="1"/>
-                      <a:r>
-                        <a:rPr lang="ko-KR" altLang="en-US" sz="1000" smtClean="0"/>
-                        <a:t>게이지</a:t>
-                      </a:r>
-                      <a:endParaRPr lang="ko-KR" altLang="en-US" sz="1000"/>
-                    </a:p>
-                  </a:txBody>
-                  <a:tcPr anchor="ctr">
-                    <a:lnL w="12700" cap="flat" cmpd="sng" algn="ctr">
-                      <a:solidFill>
-                        <a:schemeClr val="tx1"/>
-                      </a:solidFill>
-                      <a:prstDash val="solid"/>
-                      <a:round/>
-                      <a:headEnd type="none" w="med" len="med"/>
-                      <a:tailEnd type="none" w="med" len="med"/>
-                    </a:lnL>
-                    <a:lnR w="12700" cap="flat" cmpd="sng" algn="ctr">
-                      <a:solidFill>
-                        <a:schemeClr val="tx1"/>
-                      </a:solidFill>
-                      <a:prstDash val="solid"/>
-                      <a:round/>
-                      <a:headEnd type="none" w="med" len="med"/>
-                      <a:tailEnd type="none" w="med" len="med"/>
-                    </a:lnR>
-                    <a:lnT w="12700" cap="flat" cmpd="sng" algn="ctr">
-                      <a:solidFill>
-                        <a:schemeClr val="tx1"/>
-                      </a:solidFill>
-                      <a:prstDash val="solid"/>
-                      <a:round/>
-                      <a:headEnd type="none" w="med" len="med"/>
-                      <a:tailEnd type="none" w="med" len="med"/>
-                    </a:lnT>
-                    <a:lnB w="12700" cap="flat" cmpd="sng" algn="ctr">
-                      <a:solidFill>
-                        <a:schemeClr val="tx1"/>
-                      </a:solidFill>
-                      <a:prstDash val="solid"/>
-                      <a:round/>
-                      <a:headEnd type="none" w="med" len="med"/>
-                      <a:tailEnd type="none" w="med" len="med"/>
-                    </a:lnB>
-                    <a:noFill/>
-                  </a:tcPr>
-                </a:tc>
-                <a:extLst>
-                  <a:ext uri="{0D108BD9-81ED-4DB2-BD59-A6C34878D82A}">
-                    <a16:rowId xmlns:a16="http://schemas.microsoft.com/office/drawing/2014/main" val="302984948"/>
-                  </a:ext>
-                </a:extLst>
-              </a:tr>
-              <a:tr h="1323227">
-                <a:tc vMerge="1">
-                  <a:txBody>
-                    <a:bodyPr/>
-                    <a:lstStyle/>
-                    <a:p>
-                      <a:pPr algn="ctr" latinLnBrk="1"/>
-                      <a:endParaRPr lang="ko-KR" altLang="en-US" sz="1000"/>
-                    </a:p>
-                  </a:txBody>
-                  <a:tcPr/>
-                </a:tc>
-                <a:tc>
-                  <a:txBody>
-                    <a:bodyPr/>
-                    <a:lstStyle/>
-                    <a:p>
-                      <a:pPr algn="ctr" latinLnBrk="1"/>
-                      <a:endParaRPr lang="ko-KR" altLang="en-US" sz="1000"/>
+                      <a:pPr algn="ctr" latinLnBrk="1">
+                        <a:lnSpc>
+                          <a:spcPct val="150000"/>
+                        </a:lnSpc>
+                      </a:pPr>
+                      <a:endParaRPr lang="ko-KR" altLang="en-US" sz="1000" dirty="0"/>
                     </a:p>
                   </a:txBody>
                   <a:tcPr anchor="ctr">
@@ -41520,8 +43757,12 @@
                     <a:bodyPr/>
                     <a:lstStyle/>
                     <a:p>
-                      <a:pPr algn="ctr" latinLnBrk="1"/>
-                      <a:endParaRPr lang="ko-KR" altLang="en-US" sz="1000"/>
+                      <a:pPr algn="ctr" latinLnBrk="1">
+                        <a:lnSpc>
+                          <a:spcPct val="150000"/>
+                        </a:lnSpc>
+                      </a:pPr>
+                      <a:endParaRPr lang="ko-KR" altLang="en-US" sz="1000" dirty="0"/>
                     </a:p>
                   </a:txBody>
                   <a:tcPr anchor="ctr">
@@ -41568,8 +43809,82 @@
                     <a:bodyPr/>
                     <a:lstStyle/>
                     <a:p>
-                      <a:pPr algn="ctr" latinLnBrk="1"/>
-                      <a:endParaRPr lang="ko-KR" altLang="en-US" sz="1000"/>
+                      <a:pPr algn="ctr" latinLnBrk="1">
+                        <a:lnSpc>
+                          <a:spcPct val="150000"/>
+                        </a:lnSpc>
+                      </a:pPr>
+                      <a:endParaRPr lang="ko-KR" altLang="en-US" sz="1000" dirty="0"/>
+                    </a:p>
+                  </a:txBody>
+                  <a:tcPr anchor="ctr">
+                    <a:lnL w="12700" cap="flat" cmpd="sng" algn="ctr">
+                      <a:solidFill>
+                        <a:schemeClr val="tx1"/>
+                      </a:solidFill>
+                      <a:prstDash val="solid"/>
+                      <a:round/>
+                      <a:headEnd type="none" w="med" len="med"/>
+                      <a:tailEnd type="none" w="med" len="med"/>
+                    </a:lnL>
+                    <a:lnR w="12700" cap="flat" cmpd="sng" algn="ctr">
+                      <a:solidFill>
+                        <a:schemeClr val="tx1"/>
+                      </a:solidFill>
+                      <a:prstDash val="solid"/>
+                      <a:round/>
+                      <a:headEnd type="none" w="med" len="med"/>
+                      <a:tailEnd type="none" w="med" len="med"/>
+                    </a:lnR>
+                    <a:lnT w="12700" cap="flat" cmpd="sng" algn="ctr">
+                      <a:solidFill>
+                        <a:schemeClr val="tx1"/>
+                      </a:solidFill>
+                      <a:prstDash val="solid"/>
+                      <a:round/>
+                      <a:headEnd type="none" w="med" len="med"/>
+                      <a:tailEnd type="none" w="med" len="med"/>
+                    </a:lnT>
+                    <a:lnB w="12700" cap="flat" cmpd="sng" algn="ctr">
+                      <a:solidFill>
+                        <a:schemeClr val="tx1"/>
+                      </a:solidFill>
+                      <a:prstDash val="solid"/>
+                      <a:round/>
+                      <a:headEnd type="none" w="med" len="med"/>
+                      <a:tailEnd type="none" w="med" len="med"/>
+                    </a:lnB>
+                  </a:tcPr>
+                </a:tc>
+                <a:tc>
+                  <a:txBody>
+                    <a:bodyPr/>
+                    <a:lstStyle/>
+                    <a:p>
+                      <a:pPr algn="ctr" latinLnBrk="1">
+                        <a:lnSpc>
+                          <a:spcPct val="150000"/>
+                        </a:lnSpc>
+                      </a:pPr>
+                      <a:r>
+                        <a:rPr lang="ko-KR" altLang="en-US" sz="1000" dirty="0"/>
+                        <a:t>게이지 회복 </a:t>
+                      </a:r>
+                      <a:r>
+                        <a:rPr lang="en-US" altLang="ko-KR" sz="1000" dirty="0"/>
+                        <a:t>/ </a:t>
+                      </a:r>
+                    </a:p>
+                    <a:p>
+                      <a:pPr algn="ctr" latinLnBrk="1">
+                        <a:lnSpc>
+                          <a:spcPct val="150000"/>
+                        </a:lnSpc>
+                      </a:pPr>
+                      <a:r>
+                        <a:rPr lang="ko-KR" altLang="en-US" sz="1000" dirty="0"/>
+                        <a:t>내쉬는 동안 소음 발생</a:t>
+                      </a:r>
                     </a:p>
                   </a:txBody>
                   <a:tcPr anchor="ctr">
@@ -41613,22 +43928,37 @@
                 </a:tc>
                 <a:extLst>
                   <a:ext uri="{0D108BD9-81ED-4DB2-BD59-A6C34878D82A}">
-                    <a16:rowId xmlns:a16="http://schemas.microsoft.com/office/drawing/2014/main" val="2702937608"/>
+                    <a16:rowId xmlns:a16="http://schemas.microsoft.com/office/drawing/2014/main" val="46020317"/>
                   </a:ext>
                 </a:extLst>
               </a:tr>
-              <a:tr h="573258">
-                <a:tc rowSpan="2">
+              <a:tr h="1276020">
+                <a:tc>
                   <a:txBody>
                     <a:bodyPr/>
                     <a:lstStyle/>
                     <a:p>
-                      <a:pPr algn="ctr" latinLnBrk="1"/>
+                      <a:pPr algn="ctr" latinLnBrk="1">
+                        <a:lnSpc>
+                          <a:spcPct val="150000"/>
+                        </a:lnSpc>
+                      </a:pPr>
                       <a:r>
-                        <a:rPr lang="ko-KR" altLang="en-US" sz="1000" smtClean="0"/>
-                        <a:t>내뱉기</a:t>
+                        <a:rPr lang="ko-KR" altLang="en-US" sz="1000" dirty="0"/>
+                        <a:t>한계</a:t>
                       </a:r>
-                      <a:endParaRPr lang="ko-KR" altLang="en-US" sz="1000"/>
+                      <a:endParaRPr lang="en-US" altLang="ko-KR" sz="1000" dirty="0"/>
+                    </a:p>
+                    <a:p>
+                      <a:pPr algn="ctr" latinLnBrk="1">
+                        <a:lnSpc>
+                          <a:spcPct val="150000"/>
+                        </a:lnSpc>
+                      </a:pPr>
+                      <a:r>
+                        <a:rPr lang="ko-KR" altLang="en-US" sz="1000" dirty="0"/>
+                        <a:t>도달</a:t>
+                      </a:r>
                     </a:p>
                   </a:txBody>
                   <a:tcPr anchor="ctr">
@@ -41676,12 +44006,12 @@
                     <a:bodyPr/>
                     <a:lstStyle/>
                     <a:p>
-                      <a:pPr algn="ctr" latinLnBrk="1"/>
-                      <a:r>
-                        <a:rPr lang="ko-KR" altLang="en-US" sz="1000" smtClean="0"/>
-                        <a:t>모션</a:t>
-                      </a:r>
-                      <a:endParaRPr lang="ko-KR" altLang="en-US" sz="1000"/>
+                      <a:pPr algn="ctr" latinLnBrk="1">
+                        <a:lnSpc>
+                          <a:spcPct val="150000"/>
+                        </a:lnSpc>
+                      </a:pPr>
+                      <a:endParaRPr lang="ko-KR" altLang="en-US" sz="1000" dirty="0"/>
                     </a:p>
                   </a:txBody>
                   <a:tcPr anchor="ctr">
@@ -41729,12 +44059,15 @@
                     <a:bodyPr/>
                     <a:lstStyle/>
                     <a:p>
-                      <a:pPr algn="ctr" latinLnBrk="1"/>
+                      <a:pPr algn="ctr" latinLnBrk="1">
+                        <a:lnSpc>
+                          <a:spcPct val="150000"/>
+                        </a:lnSpc>
+                      </a:pPr>
                       <a:r>
-                        <a:rPr lang="ko-KR" altLang="en-US" sz="1000" smtClean="0"/>
-                        <a:t>조작키</a:t>
+                        <a:rPr lang="ko-KR" altLang="en-US" sz="1000" dirty="0"/>
+                        <a:t>자동 발생</a:t>
                       </a:r>
-                      <a:endParaRPr lang="ko-KR" altLang="en-US" sz="1000"/>
                     </a:p>
                   </a:txBody>
                   <a:tcPr anchor="ctr">
@@ -41782,12 +44115,123 @@
                     <a:bodyPr/>
                     <a:lstStyle/>
                     <a:p>
-                      <a:pPr algn="ctr" latinLnBrk="1"/>
+                      <a:pPr algn="ctr" latinLnBrk="1">
+                        <a:lnSpc>
+                          <a:spcPct val="150000"/>
+                        </a:lnSpc>
+                      </a:pPr>
+                      <a:endParaRPr lang="ko-KR" altLang="en-US" sz="1000" dirty="0"/>
+                    </a:p>
+                  </a:txBody>
+                  <a:tcPr anchor="ctr">
+                    <a:lnL w="12700" cap="flat" cmpd="sng" algn="ctr">
+                      <a:solidFill>
+                        <a:schemeClr val="tx1"/>
+                      </a:solidFill>
+                      <a:prstDash val="solid"/>
+                      <a:round/>
+                      <a:headEnd type="none" w="med" len="med"/>
+                      <a:tailEnd type="none" w="med" len="med"/>
+                    </a:lnL>
+                    <a:lnR w="12700" cap="flat" cmpd="sng" algn="ctr">
+                      <a:solidFill>
+                        <a:schemeClr val="tx1"/>
+                      </a:solidFill>
+                      <a:prstDash val="solid"/>
+                      <a:round/>
+                      <a:headEnd type="none" w="med" len="med"/>
+                      <a:tailEnd type="none" w="med" len="med"/>
+                    </a:lnR>
+                    <a:lnT w="12700" cap="flat" cmpd="sng" algn="ctr">
+                      <a:solidFill>
+                        <a:schemeClr val="tx1"/>
+                      </a:solidFill>
+                      <a:prstDash val="solid"/>
+                      <a:round/>
+                      <a:headEnd type="none" w="med" len="med"/>
+                      <a:tailEnd type="none" w="med" len="med"/>
+                    </a:lnT>
+                    <a:lnB w="12700" cap="flat" cmpd="sng" algn="ctr">
+                      <a:solidFill>
+                        <a:schemeClr val="tx1"/>
+                      </a:solidFill>
+                      <a:prstDash val="solid"/>
+                      <a:round/>
+                      <a:headEnd type="none" w="med" len="med"/>
+                      <a:tailEnd type="none" w="med" len="med"/>
+                    </a:lnB>
+                    <a:noFill/>
+                  </a:tcPr>
+                </a:tc>
+                <a:tc>
+                  <a:txBody>
+                    <a:bodyPr/>
+                    <a:lstStyle/>
+                    <a:p>
+                      <a:pPr algn="ctr" latinLnBrk="1">
+                        <a:lnSpc>
+                          <a:spcPct val="150000"/>
+                        </a:lnSpc>
+                      </a:pPr>
                       <a:r>
-                        <a:rPr lang="ko-KR" altLang="en-US" sz="1000" smtClean="0"/>
-                        <a:t>게이지</a:t>
+                        <a:rPr lang="ko-KR" altLang="en-US" sz="1000" dirty="0"/>
+                        <a:t>게이지 </a:t>
                       </a:r>
-                      <a:endParaRPr lang="ko-KR" altLang="en-US" sz="1000"/>
+                      <a:r>
+                        <a:rPr lang="en-US" altLang="ko-KR" sz="1000" dirty="0"/>
+                        <a:t>0 </a:t>
+                      </a:r>
+                      <a:r>
+                        <a:rPr lang="ko-KR" altLang="en-US" sz="1000" dirty="0"/>
+                        <a:t>도달 시</a:t>
+                      </a:r>
+                      <a:endParaRPr lang="en-US" altLang="ko-KR" sz="1000" dirty="0"/>
+                    </a:p>
+                    <a:p>
+                      <a:pPr algn="ctr" latinLnBrk="1">
+                        <a:lnSpc>
+                          <a:spcPct val="150000"/>
+                        </a:lnSpc>
+                      </a:pPr>
+                      <a:r>
+                        <a:rPr lang="ko-KR" altLang="en-US" sz="1000" dirty="0"/>
+                        <a:t>강제 </a:t>
+                      </a:r>
+                      <a:r>
+                        <a:rPr lang="ko-KR" altLang="en-US" sz="1000" dirty="0" err="1"/>
+                        <a:t>과호흡</a:t>
+                      </a:r>
+                      <a:r>
+                        <a:rPr lang="ko-KR" altLang="en-US" sz="1000" dirty="0"/>
+                        <a:t> </a:t>
+                      </a:r>
+                      <a:r>
+                        <a:rPr lang="en-US" altLang="ko-KR" sz="1000" dirty="0"/>
+                        <a:t>/ </a:t>
+                      </a:r>
+                    </a:p>
+                    <a:p>
+                      <a:pPr algn="ctr" latinLnBrk="1">
+                        <a:lnSpc>
+                          <a:spcPct val="150000"/>
+                        </a:lnSpc>
+                      </a:pPr>
+                      <a:r>
+                        <a:rPr lang="ko-KR" altLang="en-US" sz="1000" dirty="0"/>
+                        <a:t>큰 소음으로</a:t>
+                      </a:r>
+                      <a:endParaRPr lang="en-US" altLang="ko-KR" sz="1000" dirty="0"/>
+                    </a:p>
+                    <a:p>
+                      <a:pPr algn="ctr" latinLnBrk="1">
+                        <a:lnSpc>
+                          <a:spcPct val="150000"/>
+                        </a:lnSpc>
+                      </a:pPr>
+                      <a:r>
+                        <a:rPr lang="ko-KR" altLang="en-US" sz="1000" dirty="0"/>
+                        <a:t>적 경계도 상승</a:t>
+                      </a:r>
                     </a:p>
                   </a:txBody>
                   <a:tcPr anchor="ctr">
@@ -41832,169 +44276,7 @@
                 </a:tc>
                 <a:extLst>
                   <a:ext uri="{0D108BD9-81ED-4DB2-BD59-A6C34878D82A}">
-                    <a16:rowId xmlns:a16="http://schemas.microsoft.com/office/drawing/2014/main" val="2577161141"/>
-                  </a:ext>
-                </a:extLst>
-              </a:tr>
-              <a:tr h="1323227">
-                <a:tc vMerge="1">
-                  <a:txBody>
-                    <a:bodyPr/>
-                    <a:lstStyle/>
-                    <a:p>
-                      <a:pPr algn="ctr" latinLnBrk="1"/>
-                      <a:endParaRPr lang="ko-KR" altLang="en-US" sz="1000"/>
-                    </a:p>
-                  </a:txBody>
-                  <a:tcPr/>
-                </a:tc>
-                <a:tc>
-                  <a:txBody>
-                    <a:bodyPr/>
-                    <a:lstStyle/>
-                    <a:p>
-                      <a:pPr algn="ctr" latinLnBrk="1"/>
-                      <a:endParaRPr lang="ko-KR" altLang="en-US" sz="1000"/>
-                    </a:p>
-                  </a:txBody>
-                  <a:tcPr anchor="ctr">
-                    <a:lnL w="12700" cap="flat" cmpd="sng" algn="ctr">
-                      <a:solidFill>
-                        <a:schemeClr val="tx1"/>
-                      </a:solidFill>
-                      <a:prstDash val="solid"/>
-                      <a:round/>
-                      <a:headEnd type="none" w="med" len="med"/>
-                      <a:tailEnd type="none" w="med" len="med"/>
-                    </a:lnL>
-                    <a:lnR w="12700" cap="flat" cmpd="sng" algn="ctr">
-                      <a:solidFill>
-                        <a:schemeClr val="tx1"/>
-                      </a:solidFill>
-                      <a:prstDash val="solid"/>
-                      <a:round/>
-                      <a:headEnd type="none" w="med" len="med"/>
-                      <a:tailEnd type="none" w="med" len="med"/>
-                    </a:lnR>
-                    <a:lnT w="12700" cap="flat" cmpd="sng" algn="ctr">
-                      <a:solidFill>
-                        <a:schemeClr val="tx1"/>
-                      </a:solidFill>
-                      <a:prstDash val="solid"/>
-                      <a:round/>
-                      <a:headEnd type="none" w="med" len="med"/>
-                      <a:tailEnd type="none" w="med" len="med"/>
-                    </a:lnT>
-                    <a:lnB w="12700" cap="flat" cmpd="sng" algn="ctr">
-                      <a:solidFill>
-                        <a:schemeClr val="tx1"/>
-                      </a:solidFill>
-                      <a:prstDash val="solid"/>
-                      <a:round/>
-                      <a:headEnd type="none" w="med" len="med"/>
-                      <a:tailEnd type="none" w="med" len="med"/>
-                    </a:lnB>
-                  </a:tcPr>
-                </a:tc>
-                <a:tc>
-                  <a:txBody>
-                    <a:bodyPr/>
-                    <a:lstStyle/>
-                    <a:p>
-                      <a:pPr algn="ctr" latinLnBrk="1"/>
-                      <a:endParaRPr lang="ko-KR" altLang="en-US" sz="1000"/>
-                    </a:p>
-                  </a:txBody>
-                  <a:tcPr anchor="ctr">
-                    <a:lnL w="12700" cap="flat" cmpd="sng" algn="ctr">
-                      <a:solidFill>
-                        <a:schemeClr val="tx1"/>
-                      </a:solidFill>
-                      <a:prstDash val="solid"/>
-                      <a:round/>
-                      <a:headEnd type="none" w="med" len="med"/>
-                      <a:tailEnd type="none" w="med" len="med"/>
-                    </a:lnL>
-                    <a:lnR w="12700" cap="flat" cmpd="sng" algn="ctr">
-                      <a:solidFill>
-                        <a:schemeClr val="tx1"/>
-                      </a:solidFill>
-                      <a:prstDash val="solid"/>
-                      <a:round/>
-                      <a:headEnd type="none" w="med" len="med"/>
-                      <a:tailEnd type="none" w="med" len="med"/>
-                    </a:lnR>
-                    <a:lnT w="12700" cap="flat" cmpd="sng" algn="ctr">
-                      <a:solidFill>
-                        <a:schemeClr val="tx1"/>
-                      </a:solidFill>
-                      <a:prstDash val="solid"/>
-                      <a:round/>
-                      <a:headEnd type="none" w="med" len="med"/>
-                      <a:tailEnd type="none" w="med" len="med"/>
-                    </a:lnT>
-                    <a:lnB w="12700" cap="flat" cmpd="sng" algn="ctr">
-                      <a:solidFill>
-                        <a:schemeClr val="tx1"/>
-                      </a:solidFill>
-                      <a:prstDash val="solid"/>
-                      <a:round/>
-                      <a:headEnd type="none" w="med" len="med"/>
-                      <a:tailEnd type="none" w="med" len="med"/>
-                    </a:lnB>
-                  </a:tcPr>
-                </a:tc>
-                <a:tc>
-                  <a:txBody>
-                    <a:bodyPr/>
-                    <a:lstStyle/>
-                    <a:p>
-                      <a:pPr algn="ctr" latinLnBrk="1"/>
-                      <a:endParaRPr lang="ko-KR" altLang="en-US" sz="1000"/>
-                    </a:p>
-                  </a:txBody>
-                  <a:tcPr anchor="ctr">
-                    <a:lnL w="12700" cap="flat" cmpd="sng" algn="ctr">
-                      <a:solidFill>
-                        <a:schemeClr val="tx1"/>
-                      </a:solidFill>
-                      <a:prstDash val="solid"/>
-                      <a:round/>
-                      <a:headEnd type="none" w="med" len="med"/>
-                      <a:tailEnd type="none" w="med" len="med"/>
-                    </a:lnL>
-                    <a:lnR w="12700" cap="flat" cmpd="sng" algn="ctr">
-                      <a:solidFill>
-                        <a:schemeClr val="tx1"/>
-                      </a:solidFill>
-                      <a:prstDash val="solid"/>
-                      <a:round/>
-                      <a:headEnd type="none" w="med" len="med"/>
-                      <a:tailEnd type="none" w="med" len="med"/>
-                    </a:lnR>
-                    <a:lnT w="12700" cap="flat" cmpd="sng" algn="ctr">
-                      <a:solidFill>
-                        <a:schemeClr val="tx1"/>
-                      </a:solidFill>
-                      <a:prstDash val="solid"/>
-                      <a:round/>
-                      <a:headEnd type="none" w="med" len="med"/>
-                      <a:tailEnd type="none" w="med" len="med"/>
-                    </a:lnT>
-                    <a:lnB w="12700" cap="flat" cmpd="sng" algn="ctr">
-                      <a:solidFill>
-                        <a:schemeClr val="tx1"/>
-                      </a:solidFill>
-                      <a:prstDash val="solid"/>
-                      <a:round/>
-                      <a:headEnd type="none" w="med" len="med"/>
-                      <a:tailEnd type="none" w="med" len="med"/>
-                    </a:lnB>
-                  </a:tcPr>
-                </a:tc>
-                <a:extLst>
-                  <a:ext uri="{0D108BD9-81ED-4DB2-BD59-A6C34878D82A}">
-                    <a16:rowId xmlns:a16="http://schemas.microsoft.com/office/drawing/2014/main" val="46020317"/>
+                    <a16:rowId xmlns:a16="http://schemas.microsoft.com/office/drawing/2014/main" val="3873763898"/>
                   </a:ext>
                 </a:extLst>
               </a:tr>
@@ -42036,7 +44318,7 @@
         </p:blipFill>
         <p:spPr>
           <a:xfrm>
-            <a:off x="9035318" y="1895248"/>
+            <a:off x="8265638" y="1914467"/>
             <a:ext cx="687211" cy="386556"/>
           </a:xfrm>
           <a:prstGeom prst="rect">
@@ -42076,7 +44358,7 @@
         </p:blipFill>
         <p:spPr>
           <a:xfrm>
-            <a:off x="9199364" y="3824951"/>
+            <a:off x="8397513" y="3275306"/>
             <a:ext cx="359118" cy="301659"/>
           </a:xfrm>
           <a:prstGeom prst="rect">
@@ -42119,7 +44401,7 @@
         </p:blipFill>
         <p:spPr>
           <a:xfrm>
-            <a:off x="9203146" y="5669757"/>
+            <a:off x="8399404" y="4459072"/>
             <a:ext cx="355336" cy="287655"/>
           </a:xfrm>
           <a:prstGeom prst="rect">
@@ -42136,7 +44418,7 @@
           <p:nvPr>
             <p:extLst>
               <p:ext uri="{D42A27DB-BD31-4B8C-83A1-F6EECF244321}">
-                <p14:modId xmlns:p14="http://schemas.microsoft.com/office/powerpoint/2010/main" val="1219268007"/>
+                <p14:modId xmlns:p14="http://schemas.microsoft.com/office/powerpoint/2010/main" val="118522682"/>
               </p:ext>
             </p:extLst>
           </p:nvPr>
@@ -42180,20 +44462,19 @@
                     <a:bodyPr/>
                     <a:lstStyle/>
                     <a:p>
-                      <a:pPr algn="ctr" latinLnBrk="1"/>
+                      <a:pPr algn="ctr" latinLnBrk="1">
+                        <a:lnSpc>
+                          <a:spcPct val="150000"/>
+                        </a:lnSpc>
+                      </a:pPr>
                       <a:r>
-                        <a:rPr lang="ko-KR" altLang="en-US" sz="1500" smtClean="0">
+                        <a:rPr lang="ko-KR" altLang="en-US" sz="1500">
                           <a:solidFill>
                             <a:schemeClr val="bg1"/>
                           </a:solidFill>
                         </a:rPr>
                         <a:t>항목</a:t>
                       </a:r>
-                      <a:endParaRPr lang="ko-KR" altLang="en-US" sz="1500">
-                        <a:solidFill>
-                          <a:schemeClr val="bg1"/>
-                        </a:solidFill>
-                      </a:endParaRPr>
                     </a:p>
                   </a:txBody>
                   <a:tcPr anchor="ctr">
@@ -42243,20 +44524,19 @@
                     <a:bodyPr/>
                     <a:lstStyle/>
                     <a:p>
-                      <a:pPr algn="ctr" latinLnBrk="1"/>
+                      <a:pPr algn="ctr" latinLnBrk="1">
+                        <a:lnSpc>
+                          <a:spcPct val="150000"/>
+                        </a:lnSpc>
+                      </a:pPr>
                       <a:r>
-                        <a:rPr lang="ko-KR" altLang="en-US" sz="1500" smtClean="0">
+                        <a:rPr lang="ko-KR" altLang="en-US" sz="1500">
                           <a:solidFill>
                             <a:schemeClr val="bg1"/>
                           </a:solidFill>
                         </a:rPr>
                         <a:t>내용</a:t>
                       </a:r>
-                      <a:endParaRPr lang="ko-KR" altLang="en-US" sz="1500">
-                        <a:solidFill>
-                          <a:schemeClr val="bg1"/>
-                        </a:solidFill>
-                      </a:endParaRPr>
                     </a:p>
                   </a:txBody>
                   <a:tcPr anchor="ctr">
@@ -42324,28 +44604,15 @@
                     <a:bodyPr/>
                     <a:lstStyle/>
                     <a:p>
-                      <a:pPr algn="ctr" latinLnBrk="1"/>
+                      <a:pPr algn="ctr" latinLnBrk="1">
+                        <a:lnSpc>
+                          <a:spcPct val="150000"/>
+                        </a:lnSpc>
+                      </a:pPr>
                       <a:r>
-                        <a:rPr lang="ko-KR" altLang="en-US" sz="1000" smtClean="0"/>
-                        <a:t>숨</a:t>
+                        <a:rPr lang="ko-KR" altLang="en-US" sz="1000" dirty="0"/>
+                        <a:t>한계 도달</a:t>
                       </a:r>
-                      <a:r>
-                        <a:rPr lang="en-US" altLang="ko-KR" sz="1000" baseline="0" smtClean="0"/>
-                        <a:t> </a:t>
-                      </a:r>
-                      <a:r>
-                        <a:rPr lang="ko-KR" altLang="en-US" sz="1000" baseline="0" smtClean="0"/>
-                        <a:t>게이지</a:t>
-                      </a:r>
-                      <a:endParaRPr lang="en-US" altLang="ko-KR" sz="1000" baseline="0" smtClean="0"/>
-                    </a:p>
-                    <a:p>
-                      <a:pPr algn="ctr" latinLnBrk="1"/>
-                      <a:r>
-                        <a:rPr lang="ko-KR" altLang="en-US" sz="1000" baseline="0" smtClean="0"/>
-                        <a:t>한계</a:t>
-                      </a:r>
-                      <a:endParaRPr lang="ko-KR" altLang="en-US" sz="1000"/>
                     </a:p>
                   </a:txBody>
                   <a:tcPr anchor="ctr">
@@ -42393,12 +44660,15 @@
                     <a:bodyPr/>
                     <a:lstStyle/>
                     <a:p>
-                      <a:pPr algn="ctr" latinLnBrk="1"/>
+                      <a:pPr algn="ctr" latinLnBrk="1">
+                        <a:lnSpc>
+                          <a:spcPct val="150000"/>
+                        </a:lnSpc>
+                      </a:pPr>
                       <a:r>
-                        <a:rPr lang="ko-KR" altLang="en-US" sz="1000" smtClean="0"/>
+                        <a:rPr lang="ko-KR" altLang="en-US" sz="1000"/>
                         <a:t>화면 연출</a:t>
                       </a:r>
-                      <a:endParaRPr lang="ko-KR" altLang="en-US" sz="1000"/>
                     </a:p>
                   </a:txBody>
                   <a:tcPr anchor="ctr">
@@ -42446,12 +44716,15 @@
                     <a:bodyPr/>
                     <a:lstStyle/>
                     <a:p>
-                      <a:pPr algn="ctr" latinLnBrk="1"/>
+                      <a:pPr algn="ctr" latinLnBrk="1">
+                        <a:lnSpc>
+                          <a:spcPct val="150000"/>
+                        </a:lnSpc>
+                      </a:pPr>
                       <a:r>
-                        <a:rPr lang="ko-KR" altLang="en-US" sz="1000" smtClean="0"/>
-                        <a:t>게이지</a:t>
+                        <a:rPr lang="ko-KR" altLang="en-US" sz="1000" dirty="0"/>
+                        <a:t>발생 결과</a:t>
                       </a:r>
-                      <a:endParaRPr lang="ko-KR" altLang="en-US" sz="1000"/>
                     </a:p>
                   </a:txBody>
                   <a:tcPr anchor="ctr">
@@ -42517,7 +44790,11 @@
                     <a:bodyPr/>
                     <a:lstStyle/>
                     <a:p>
-                      <a:pPr algn="ctr" latinLnBrk="1"/>
+                      <a:pPr algn="ctr" latinLnBrk="1">
+                        <a:lnSpc>
+                          <a:spcPct val="150000"/>
+                        </a:lnSpc>
+                      </a:pPr>
                       <a:endParaRPr lang="ko-KR" altLang="en-US" sz="1000"/>
                     </a:p>
                   </a:txBody>
@@ -42565,8 +44842,47 @@
                     <a:bodyPr/>
                     <a:lstStyle/>
                     <a:p>
-                      <a:pPr algn="ctr" latinLnBrk="1"/>
-                      <a:endParaRPr lang="ko-KR" altLang="en-US" sz="1000"/>
+                      <a:pPr algn="ctr" latinLnBrk="1">
+                        <a:lnSpc>
+                          <a:spcPct val="150000"/>
+                        </a:lnSpc>
+                      </a:pPr>
+                      <a:r>
+                        <a:rPr lang="ko-KR" altLang="en-US" sz="1000" dirty="0"/>
+                        <a:t>강제 </a:t>
+                      </a:r>
+                      <a:r>
+                        <a:rPr lang="ko-KR" altLang="en-US" sz="1000" dirty="0" err="1"/>
+                        <a:t>과호흡</a:t>
+                      </a:r>
+                      <a:r>
+                        <a:rPr lang="ko-KR" altLang="en-US" sz="1000" dirty="0"/>
+                        <a:t> 발생</a:t>
+                      </a:r>
+                      <a:endParaRPr lang="en-US" altLang="ko-KR" sz="1000" dirty="0"/>
+                    </a:p>
+                    <a:p>
+                      <a:pPr algn="ctr" latinLnBrk="1">
+                        <a:lnSpc>
+                          <a:spcPct val="150000"/>
+                        </a:lnSpc>
+                      </a:pPr>
+                      <a:r>
+                        <a:rPr lang="ko-KR" altLang="en-US" sz="1000" dirty="0"/>
+                        <a:t>→ 큰 소음 발생</a:t>
+                      </a:r>
+                      <a:endParaRPr lang="en-US" altLang="ko-KR" sz="1000" dirty="0"/>
+                    </a:p>
+                    <a:p>
+                      <a:pPr algn="ctr" latinLnBrk="1">
+                        <a:lnSpc>
+                          <a:spcPct val="150000"/>
+                        </a:lnSpc>
+                      </a:pPr>
+                      <a:r>
+                        <a:rPr lang="ko-KR" altLang="en-US" sz="1000" dirty="0"/>
+                        <a:t>→ 주변 적 경계도 상승</a:t>
+                      </a:r>
                     </a:p>
                   </a:txBody>
                   <a:tcPr anchor="ctr">
@@ -42640,8 +44956,8 @@
         </p:blipFill>
         <p:spPr>
           <a:xfrm>
-            <a:off x="10359261" y="3743450"/>
-            <a:ext cx="1099250" cy="383160"/>
+            <a:off x="9229831" y="3218140"/>
+            <a:ext cx="825255" cy="287655"/>
           </a:xfrm>
           <a:prstGeom prst="rect">
             <a:avLst/>
@@ -42670,8 +44986,8 @@
         </p:blipFill>
         <p:spPr>
           <a:xfrm>
-            <a:off x="10359261" y="5645717"/>
-            <a:ext cx="1099250" cy="383160"/>
+            <a:off x="9229830" y="4459072"/>
+            <a:ext cx="825255" cy="287655"/>
           </a:xfrm>
           <a:prstGeom prst="rect">
             <a:avLst/>
@@ -42680,7 +44996,7 @@
       </p:pic>
       <p:pic>
         <p:nvPicPr>
-          <p:cNvPr id="20" name="그림 19"/>
+          <p:cNvPr id="21" name="그림 20"/>
           <p:cNvPicPr>
             <a:picLocks noChangeAspect="1"/>
           </p:cNvPicPr>
@@ -42700,8 +45016,8 @@
         </p:blipFill>
         <p:spPr>
           <a:xfrm>
-            <a:off x="4465697" y="5521299"/>
-            <a:ext cx="1099250" cy="377435"/>
+            <a:off x="9289897" y="1930918"/>
+            <a:ext cx="825255" cy="283357"/>
           </a:xfrm>
           <a:prstGeom prst="rect">
             <a:avLst/>
@@ -42710,7 +45026,7 @@
       </p:pic>
       <p:pic>
         <p:nvPicPr>
-          <p:cNvPr id="21" name="그림 20"/>
+          <p:cNvPr id="22" name="그림 21"/>
           <p:cNvPicPr>
             <a:picLocks noChangeAspect="1"/>
           </p:cNvPicPr>
@@ -42730,8 +45046,8 @@
         </p:blipFill>
         <p:spPr>
           <a:xfrm>
-            <a:off x="10359262" y="1967548"/>
-            <a:ext cx="1099250" cy="377435"/>
+            <a:off x="7132089" y="2893675"/>
+            <a:ext cx="792224" cy="989927"/>
           </a:xfrm>
           <a:prstGeom prst="rect">
             <a:avLst/>
@@ -42740,7 +45056,7 @@
       </p:pic>
       <p:pic>
         <p:nvPicPr>
-          <p:cNvPr id="22" name="그림 21"/>
+          <p:cNvPr id="23" name="그림 22"/>
           <p:cNvPicPr>
             <a:picLocks noChangeAspect="1"/>
           </p:cNvPicPr>
@@ -42760,8 +45076,8 @@
         </p:blipFill>
         <p:spPr>
           <a:xfrm>
-            <a:off x="7355513" y="3405088"/>
-            <a:ext cx="970172" cy="1212283"/>
+            <a:off x="7004707" y="1577634"/>
+            <a:ext cx="1083223" cy="989927"/>
           </a:xfrm>
           <a:prstGeom prst="rect">
             <a:avLst/>
@@ -42770,7 +45086,7 @@
       </p:pic>
       <p:pic>
         <p:nvPicPr>
-          <p:cNvPr id="23" name="그림 22"/>
+          <p:cNvPr id="24" name="그림 23"/>
           <p:cNvPicPr>
             <a:picLocks noChangeAspect="1"/>
           </p:cNvPicPr>
@@ -42790,8 +45106,8 @@
         </p:blipFill>
         <p:spPr>
           <a:xfrm>
-            <a:off x="7228131" y="1524723"/>
-            <a:ext cx="1326535" cy="1212283"/>
+            <a:off x="7123118" y="4107937"/>
+            <a:ext cx="792224" cy="989927"/>
           </a:xfrm>
           <a:prstGeom prst="rect">
             <a:avLst/>
@@ -42800,7 +45116,7 @@
       </p:pic>
       <p:pic>
         <p:nvPicPr>
-          <p:cNvPr id="24" name="그림 23"/>
+          <p:cNvPr id="25" name="그림 24"/>
           <p:cNvPicPr>
             <a:picLocks noChangeAspect="1"/>
           </p:cNvPicPr>
@@ -42820,17 +45136,84 @@
         </p:blipFill>
         <p:spPr>
           <a:xfrm>
-            <a:off x="7432195" y="5266494"/>
-            <a:ext cx="970172" cy="1212283"/>
+            <a:off x="1688336" y="5236366"/>
+            <a:ext cx="2122266" cy="1184519"/>
           </a:xfrm>
           <a:prstGeom prst="rect">
             <a:avLst/>
           </a:prstGeom>
         </p:spPr>
       </p:pic>
+      <p:sp>
+        <p:nvSpPr>
+          <p:cNvPr id="17" name="Text 3"/>
+          <p:cNvSpPr/>
+          <p:nvPr/>
+        </p:nvSpPr>
+        <p:spPr>
+          <a:xfrm>
+            <a:off x="530352" y="329184"/>
+            <a:ext cx="8046720" cy="292608"/>
+          </a:xfrm>
+          <a:prstGeom prst="rect">
+            <a:avLst/>
+          </a:prstGeom>
+          <a:noFill/>
+          <a:ln/>
+        </p:spPr>
+        <p:txBody>
+          <a:bodyPr wrap="square" lIns="0" tIns="0" rIns="0" bIns="0" rtlCol="0" anchor="ctr"/>
+          <a:lstStyle/>
+          <a:p>
+            <a:pPr marL="0" indent="0">
+              <a:buNone/>
+            </a:pPr>
+            <a:r>
+              <a:rPr lang="ko-KR" altLang="en-US" sz="2000" b="1">
+                <a:solidFill>
+                  <a:srgbClr val="111827"/>
+                </a:solidFill>
+                <a:latin typeface="맑은 고딕" pitchFamily="34" charset="0"/>
+                <a:ea typeface="맑은 고딕" pitchFamily="34" charset="-122"/>
+                <a:cs typeface="맑은 고딕" pitchFamily="34" charset="-120"/>
+              </a:rPr>
+              <a:t>화면 구성</a:t>
+            </a:r>
+            <a:r>
+              <a:rPr lang="en-US" altLang="ko-KR" sz="2000" b="1">
+                <a:solidFill>
+                  <a:srgbClr val="111827"/>
+                </a:solidFill>
+                <a:latin typeface="맑은 고딕" pitchFamily="34" charset="0"/>
+                <a:ea typeface="맑은 고딕" pitchFamily="34" charset="-122"/>
+                <a:cs typeface="맑은 고딕" pitchFamily="34" charset="-120"/>
+              </a:rPr>
+              <a:t> </a:t>
+            </a:r>
+            <a:r>
+              <a:rPr lang="ko-KR" altLang="en-US" sz="2000" b="1">
+                <a:solidFill>
+                  <a:srgbClr val="111827"/>
+                </a:solidFill>
+                <a:latin typeface="맑은 고딕" pitchFamily="34" charset="0"/>
+                <a:ea typeface="맑은 고딕" pitchFamily="34" charset="-122"/>
+                <a:cs typeface="맑은 고딕" pitchFamily="34" charset="-120"/>
+              </a:rPr>
+              <a:t>요소</a:t>
+            </a:r>
+            <a:endParaRPr lang="en-US" sz="2000" dirty="0"/>
+          </a:p>
+        </p:txBody>
+      </p:sp>
       <p:pic>
         <p:nvPicPr>
-          <p:cNvPr id="25" name="그림 24"/>
+          <p:cNvPr id="26" name="그림 25">
+            <a:extLst>
+              <a:ext uri="{FF2B5EF4-FFF2-40B4-BE49-F238E27FC236}">
+                <a16:creationId xmlns:a16="http://schemas.microsoft.com/office/drawing/2014/main" id="{13427E35-80C1-4829-9280-2EFAB9AF7604}"/>
+              </a:ext>
+            </a:extLst>
+          </p:cNvPr>
           <p:cNvPicPr>
             <a:picLocks noChangeAspect="1"/>
           </p:cNvPicPr>
@@ -42850,75 +45233,50 @@
         </p:blipFill>
         <p:spPr>
           <a:xfrm>
-            <a:off x="1487208" y="5097864"/>
-            <a:ext cx="2370418" cy="1323022"/>
+            <a:off x="9259748" y="5720814"/>
+            <a:ext cx="777164" cy="266845"/>
           </a:xfrm>
           <a:prstGeom prst="rect">
             <a:avLst/>
           </a:prstGeom>
         </p:spPr>
       </p:pic>
-      <p:sp>
-        <p:nvSpPr>
-          <p:cNvPr id="17" name="Text 3"/>
-          <p:cNvSpPr/>
-          <p:nvPr/>
-        </p:nvSpPr>
-        <p:spPr>
-          <a:xfrm>
-            <a:off x="530352" y="329184"/>
-            <a:ext cx="8046720" cy="292608"/>
-          </a:xfrm>
-          <a:prstGeom prst="rect">
-            <a:avLst/>
-          </a:prstGeom>
-          <a:noFill/>
-          <a:ln/>
-        </p:spPr>
-        <p:txBody>
-          <a:bodyPr wrap="square" lIns="0" tIns="0" rIns="0" bIns="0" rtlCol="0" anchor="ctr"/>
-          <a:lstStyle/>
-          <a:p>
-            <a:pPr marL="0" indent="0">
-              <a:buNone/>
-            </a:pPr>
-            <a:r>
-              <a:rPr lang="ko-KR" altLang="en-US" sz="2000" b="1" smtClean="0">
-                <a:solidFill>
-                  <a:srgbClr val="111827"/>
-                </a:solidFill>
-                <a:latin typeface="맑은 고딕" pitchFamily="34" charset="0"/>
-                <a:ea typeface="맑은 고딕" pitchFamily="34" charset="-122"/>
-                <a:cs typeface="맑은 고딕" pitchFamily="34" charset="-120"/>
-              </a:rPr>
-              <a:t>화면 구성</a:t>
-            </a:r>
-            <a:r>
-              <a:rPr lang="en-US" altLang="ko-KR" sz="2000" b="1">
-                <a:solidFill>
-                  <a:srgbClr val="111827"/>
-                </a:solidFill>
-                <a:latin typeface="맑은 고딕" pitchFamily="34" charset="0"/>
-                <a:ea typeface="맑은 고딕" pitchFamily="34" charset="-122"/>
-                <a:cs typeface="맑은 고딕" pitchFamily="34" charset="-120"/>
-              </a:rPr>
-              <a:t> </a:t>
-            </a:r>
-            <a:r>
-              <a:rPr lang="ko-KR" altLang="en-US" sz="2000" b="1" smtClean="0">
-                <a:solidFill>
-                  <a:srgbClr val="111827"/>
-                </a:solidFill>
-                <a:latin typeface="맑은 고딕" pitchFamily="34" charset="0"/>
-                <a:ea typeface="맑은 고딕" pitchFamily="34" charset="-122"/>
-                <a:cs typeface="맑은 고딕" pitchFamily="34" charset="-120"/>
-              </a:rPr>
-              <a:t>요소</a:t>
-            </a:r>
-            <a:endParaRPr lang="en-US" sz="2000" dirty="0"/>
-          </a:p>
-        </p:txBody>
-      </p:sp>
+      <p:pic>
+        <p:nvPicPr>
+          <p:cNvPr id="27" name="그림 26">
+            <a:extLst>
+              <a:ext uri="{FF2B5EF4-FFF2-40B4-BE49-F238E27FC236}">
+                <a16:creationId xmlns:a16="http://schemas.microsoft.com/office/drawing/2014/main" id="{23E07564-5C1E-4D5C-B879-4CB3AFCC398E}"/>
+              </a:ext>
+            </a:extLst>
+          </p:cNvPr>
+          <p:cNvPicPr>
+            <a:picLocks noChangeAspect="1"/>
+          </p:cNvPicPr>
+          <p:nvPr/>
+        </p:nvPicPr>
+        <p:blipFill>
+          <a:blip r:embed="rId10" cstate="print">
+            <a:extLst>
+              <a:ext uri="{28A0092B-C50C-407E-A947-70E740481C1C}">
+                <a14:useLocalDpi xmlns:a14="http://schemas.microsoft.com/office/drawing/2010/main" val="0"/>
+              </a:ext>
+            </a:extLst>
+          </a:blip>
+          <a:stretch>
+            <a:fillRect/>
+          </a:stretch>
+        </p:blipFill>
+        <p:spPr>
+          <a:xfrm>
+            <a:off x="7123118" y="5394610"/>
+            <a:ext cx="792224" cy="989927"/>
+          </a:xfrm>
+          <a:prstGeom prst="rect">
+            <a:avLst/>
+          </a:prstGeom>
+        </p:spPr>
+      </p:pic>
     </p:spTree>
     <p:extLst>
       <p:ext uri="{BB962C8B-B14F-4D97-AF65-F5344CB8AC3E}">
@@ -43032,18 +45390,13 @@
                     <a:p>
                       <a:pPr algn="ctr" latinLnBrk="1"/>
                       <a:r>
-                        <a:rPr lang="ko-KR" altLang="en-US" sz="1300" smtClean="0">
+                        <a:rPr lang="ko-KR" altLang="en-US" sz="1300">
                           <a:solidFill>
                             <a:schemeClr val="bg1"/>
                           </a:solidFill>
                         </a:rPr>
                         <a:t>항목</a:t>
                       </a:r>
-                      <a:endParaRPr lang="ko-KR" altLang="en-US" sz="1300">
-                        <a:solidFill>
-                          <a:schemeClr val="bg1"/>
-                        </a:solidFill>
-                      </a:endParaRPr>
                     </a:p>
                   </a:txBody>
                   <a:tcPr marL="80959" marR="80959" marT="40479" marB="40479" anchor="ctr">
@@ -43095,18 +45448,13 @@
                     <a:p>
                       <a:pPr algn="ctr" latinLnBrk="1"/>
                       <a:r>
-                        <a:rPr lang="ko-KR" altLang="en-US" sz="1300" smtClean="0">
+                        <a:rPr lang="ko-KR" altLang="en-US" sz="1300">
                           <a:solidFill>
                             <a:schemeClr val="bg1"/>
                           </a:solidFill>
                         </a:rPr>
                         <a:t>내용</a:t>
                       </a:r>
-                      <a:endParaRPr lang="ko-KR" altLang="en-US" sz="1300">
-                        <a:solidFill>
-                          <a:schemeClr val="bg1"/>
-                        </a:solidFill>
-                      </a:endParaRPr>
                     </a:p>
                   </a:txBody>
                   <a:tcPr marL="80959" marR="80959" marT="40479" marB="40479" anchor="ctr">
@@ -43220,10 +45568,9 @@
                     <a:p>
                       <a:pPr algn="ctr" latinLnBrk="1"/>
                       <a:r>
-                        <a:rPr lang="ko-KR" altLang="en-US" sz="900" smtClean="0"/>
+                        <a:rPr lang="ko-KR" altLang="en-US" sz="900"/>
                         <a:t>들이마시기</a:t>
                       </a:r>
-                      <a:endParaRPr lang="ko-KR" altLang="en-US" sz="900"/>
                     </a:p>
                   </a:txBody>
                   <a:tcPr marL="80959" marR="80959" marT="40479" marB="40479" anchor="ctr">
@@ -43273,10 +45620,9 @@
                     <a:p>
                       <a:pPr algn="ctr" latinLnBrk="1"/>
                       <a:r>
-                        <a:rPr lang="ko-KR" altLang="en-US" sz="900" smtClean="0"/>
+                        <a:rPr lang="ko-KR" altLang="en-US" sz="900"/>
                         <a:t>흡인</a:t>
                       </a:r>
-                      <a:endParaRPr lang="ko-KR" altLang="en-US" sz="900"/>
                     </a:p>
                   </a:txBody>
                   <a:tcPr marL="80959" marR="80959" marT="40479" marB="40479" anchor="ctr">
@@ -43353,7 +45699,7 @@
                         <a:defRPr/>
                       </a:pPr>
                       <a:r>
-                        <a:rPr lang="ko-KR" altLang="en-US" sz="900" smtClean="0"/>
+                        <a:rPr lang="ko-KR" altLang="en-US" sz="900"/>
                         <a:t>흡음</a:t>
                       </a:r>
                     </a:p>
@@ -43432,7 +45778,7 @@
                         <a:defRPr/>
                       </a:pPr>
                       <a:r>
-                        <a:rPr lang="ko-KR" altLang="en-US" sz="900" smtClean="0"/>
+                        <a:rPr lang="ko-KR" altLang="en-US" sz="900"/>
                         <a:t>흡기도약</a:t>
                       </a:r>
                     </a:p>
@@ -43814,10 +46160,9 @@
                     <a:p>
                       <a:pPr algn="ctr" latinLnBrk="1"/>
                       <a:r>
-                        <a:rPr lang="ko-KR" altLang="en-US" sz="900" smtClean="0"/>
+                        <a:rPr lang="ko-KR" altLang="en-US" sz="900"/>
                         <a:t>숨 참기</a:t>
                       </a:r>
-                      <a:endParaRPr lang="ko-KR" altLang="en-US" sz="900"/>
                     </a:p>
                   </a:txBody>
                   <a:tcPr marL="80959" marR="80959" marT="40479" marB="40479" anchor="ctr">
@@ -43867,10 +46212,9 @@
                     <a:p>
                       <a:pPr algn="ctr" latinLnBrk="1"/>
                       <a:r>
-                        <a:rPr lang="ko-KR" altLang="en-US" sz="900" smtClean="0"/>
+                        <a:rPr lang="ko-KR" altLang="en-US" sz="900"/>
                         <a:t>기척 소거</a:t>
                       </a:r>
-                      <a:endParaRPr lang="ko-KR" altLang="en-US" sz="900"/>
                     </a:p>
                   </a:txBody>
                   <a:tcPr marL="80959" marR="80959" marT="40479" marB="40479" anchor="ctr">
@@ -43931,10 +46275,9 @@
                     <a:p>
                       <a:pPr algn="ctr" latinLnBrk="1"/>
                       <a:r>
-                        <a:rPr lang="ko-KR" altLang="en-US" sz="900" smtClean="0"/>
+                        <a:rPr lang="ko-KR" altLang="en-US" sz="900"/>
                         <a:t>공중 부유</a:t>
                       </a:r>
-                      <a:endParaRPr lang="ko-KR" altLang="en-US" sz="900"/>
                     </a:p>
                   </a:txBody>
                   <a:tcPr marL="80959" marR="80959" marT="40479" marB="40479" anchor="ctr">
@@ -43995,10 +46338,9 @@
                     <a:p>
                       <a:pPr algn="ctr" latinLnBrk="1"/>
                       <a:r>
-                        <a:rPr lang="ko-KR" altLang="en-US" sz="900" smtClean="0"/>
+                        <a:rPr lang="ko-KR" altLang="en-US" sz="900"/>
                         <a:t>시간 정지</a:t>
                       </a:r>
-                      <a:endParaRPr lang="ko-KR" altLang="en-US" sz="900"/>
                     </a:p>
                   </a:txBody>
                   <a:tcPr marL="80959" marR="80959" marT="40479" marB="40479" anchor="ctr">
@@ -44372,10 +46714,9 @@
                     <a:p>
                       <a:pPr algn="ctr" latinLnBrk="1"/>
                       <a:r>
-                        <a:rPr lang="ko-KR" altLang="en-US" sz="900" smtClean="0"/>
+                        <a:rPr lang="ko-KR" altLang="en-US" sz="900"/>
                         <a:t>내쉬기</a:t>
                       </a:r>
-                      <a:endParaRPr lang="ko-KR" altLang="en-US" sz="900"/>
                     </a:p>
                   </a:txBody>
                   <a:tcPr marL="80959" marR="80959" marT="40479" marB="40479" anchor="ctr">
@@ -44425,10 +46766,9 @@
                     <a:p>
                       <a:pPr algn="ctr" latinLnBrk="1"/>
                       <a:r>
-                        <a:rPr lang="ko-KR" altLang="en-US" sz="900" smtClean="0"/>
+                        <a:rPr lang="ko-KR" altLang="en-US" sz="900"/>
                         <a:t>공명</a:t>
                       </a:r>
-                      <a:endParaRPr lang="ko-KR" altLang="en-US" sz="900"/>
                     </a:p>
                   </a:txBody>
                   <a:tcPr marL="80959" marR="80959" marT="40479" marB="40479" anchor="ctr">
@@ -44489,10 +46829,9 @@
                     <a:p>
                       <a:pPr algn="ctr" latinLnBrk="1"/>
                       <a:r>
-                        <a:rPr lang="ko-KR" altLang="en-US" sz="900" smtClean="0"/>
+                        <a:rPr lang="ko-KR" altLang="en-US" sz="900"/>
                         <a:t>잔기</a:t>
                       </a:r>
-                      <a:endParaRPr lang="ko-KR" altLang="en-US" sz="900"/>
                     </a:p>
                   </a:txBody>
                   <a:tcPr marL="80959" marR="80959" marT="40479" marB="40479" anchor="ctr">
@@ -44818,7 +47157,7 @@
                     <a:lstStyle/>
                     <a:p>
                       <a:pPr latinLnBrk="1"/>
-                      <a:endParaRPr lang="ko-KR" altLang="en-US" sz="1600"/>
+                      <a:endParaRPr lang="ko-KR" altLang="en-US" sz="1600" dirty="0"/>
                     </a:p>
                   </a:txBody>
                   <a:tcPr marL="80959" marR="80959" marT="40479" marB="40479" anchor="ctr">
@@ -45045,7 +47384,7 @@
               <a:buNone/>
             </a:pPr>
             <a:r>
-              <a:rPr lang="ko-KR" altLang="en-US" sz="2000" b="1" smtClean="0">
+              <a:rPr lang="ko-KR" altLang="en-US" sz="2000" b="1">
                 <a:solidFill>
                   <a:srgbClr val="111827"/>
                 </a:solidFill>
